--- a/docs/example3_walkthrough.pptx
+++ b/docs/example3_walkthrough.pptx
@@ -3142,8 +3142,8 @@
         </p:nvSpPr>
         <p:spPr>
           <a:xfrm>
-            <a:off x="7909560" y="0"/>
-            <a:ext cx="1234440" cy="6858000"/>
+            <a:off x="7543800" y="0"/>
+            <a:ext cx="1600200" cy="6858000"/>
           </a:xfrm>
           <a:prstGeom prst="rect">
             <a:avLst/>
@@ -3187,8 +3187,8 @@
         </p:nvSpPr>
         <p:spPr>
           <a:xfrm rot="16200000">
-            <a:off x="8001000" y="274320"/>
-            <a:ext cx="1051560" cy="6309360"/>
+            <a:off x="7616952" y="274320"/>
+            <a:ext cx="1453896" cy="6309360"/>
           </a:xfrm>
           <a:prstGeom prst="rect">
             <a:avLst/>
@@ -3196,13 +3196,13 @@
           <a:noFill/>
         </p:spPr>
         <p:txBody>
-          <a:bodyPr wrap="none" anchor="ctr">
+          <a:bodyPr wrap="square" anchor="ctr">
             <a:spAutoFit/>
           </a:bodyPr>
           <a:lstStyle/>
           <a:p>
             <a:pPr>
-              <a:defRPr sz="2800">
+              <a:defRPr sz="2600">
                 <a:solidFill>
                   <a:srgbClr val="141414"/>
                 </a:solidFill>
@@ -3224,7 +3224,7 @@
         <p:spPr>
           <a:xfrm>
             <a:off x="731520" y="502920"/>
-            <a:ext cx="6812280" cy="1051560"/>
+            <a:ext cx="6446520" cy="1051560"/>
           </a:xfrm>
           <a:prstGeom prst="rect">
             <a:avLst/>
@@ -3244,7 +3244,7 @@
                 </a:solidFill>
                 <a:latin typeface="Aptos"/>
               </a:rPr>
-              <a:t>We want to union any number of (</a:t>
+              <a:t>We want to union any number of sets (</a:t>
             </a:r>
             <a:r>
               <a:rPr sz="1600">
@@ -3262,7 +3262,7 @@
                 </a:solidFill>
                 <a:latin typeface="Aptos"/>
               </a:rPr>
-              <a:t>) sets. In OO terms, any collection that is an iterable of </a:t>
+              <a:t>). In OO terms, any collection that is an iterable of </a:t>
             </a:r>
             <a:r>
               <a:rPr sz="1600">
@@ -3301,8 +3301,8 @@
         </p:blipFill>
         <p:spPr>
           <a:xfrm>
-            <a:off x="977103" y="1691640"/>
-            <a:ext cx="5955352" cy="4846320"/>
+            <a:off x="433134" y="1691640"/>
+            <a:ext cx="6677530" cy="4846320"/>
           </a:xfrm>
           <a:prstGeom prst="rect">
             <a:avLst/>
@@ -3387,8 +3387,8 @@
           <a:noFill/>
         </p:spPr>
         <p:txBody>
-          <a:bodyPr wrap="none">
-            <a:spAutoFit/>
+          <a:bodyPr wrap="square">
+            <a:noAutofit/>
           </a:bodyPr>
           <a:lstStyle/>
           <a:p>
@@ -3508,25 +3508,7 @@
                 </a:solidFill>
                 <a:latin typeface="Consolas"/>
               </a:rPr>
-              <a:t>#[</a:t>
-            </a:r>
-            <a:r>
-              <a:rPr sz="1600">
-                <a:solidFill>
-                  <a:srgbClr val="6A9955"/>
-                </a:solidFill>
-                <a:latin typeface="Consolas"/>
-              </a:rPr>
-              <a:t>derive(Debug, Clone)</a:t>
-            </a:r>
-            <a:r>
-              <a:rPr sz="1600">
-                <a:solidFill>
-                  <a:srgbClr val="6A9955"/>
-                </a:solidFill>
-                <a:latin typeface="Consolas"/>
-              </a:rPr>
-              <a:t>]</a:t>
+              <a:t>// For this example, use u64 as our stand-in integer type.</a:t>
             </a:r>
           </a:p>
           <a:p>
@@ -3548,7 +3530,7 @@
                 </a:solidFill>
                 <a:latin typeface="Consolas"/>
               </a:rPr>
-              <a:t>struct</a:t>
+              <a:t>type</a:t>
             </a:r>
             <a:r>
               <a:rPr sz="1600">
@@ -3566,52 +3548,52 @@
                 </a:solidFill>
                 <a:latin typeface="Consolas"/>
               </a:rPr>
-              <a:t>RangeSetBlaze</a:t>
-            </a:r>
-            <a:r>
-              <a:rPr sz="1600">
-                <a:solidFill>
-                  <a:srgbClr val="DCDCDC"/>
-                </a:solidFill>
-                <a:latin typeface="Consolas"/>
-              </a:rPr>
-              <a:t>&lt;</a:t>
-            </a:r>
-            <a:r>
-              <a:rPr sz="1600">
-                <a:solidFill>
-                  <a:srgbClr val="DCDCDC"/>
-                </a:solidFill>
-                <a:latin typeface="Consolas"/>
-              </a:rPr>
-              <a:t>T</a:t>
-            </a:r>
-            <a:r>
-              <a:rPr sz="1600">
-                <a:solidFill>
-                  <a:srgbClr val="DCDCDC"/>
-                </a:solidFill>
-                <a:latin typeface="Consolas"/>
-              </a:rPr>
-              <a:t>&gt;</a:t>
-            </a:r>
-            <a:r>
-              <a:rPr sz="1600">
-                <a:solidFill>
-                  <a:srgbClr val="DCDCDC"/>
-                </a:solidFill>
-                <a:latin typeface="Consolas"/>
-              </a:rPr>
-              <a:t> </a:t>
-            </a:r>
-            <a:r>
-              <a:rPr sz="1600">
-                <a:solidFill>
-                  <a:srgbClr val="DCDCDC"/>
-                </a:solidFill>
-                <a:latin typeface="Consolas"/>
-              </a:rPr>
-              <a:t>{</a:t>
+              <a:t>Integer</a:t>
+            </a:r>
+            <a:r>
+              <a:rPr sz="1600">
+                <a:solidFill>
+                  <a:srgbClr val="DCDCDC"/>
+                </a:solidFill>
+                <a:latin typeface="Consolas"/>
+              </a:rPr>
+              <a:t> </a:t>
+            </a:r>
+            <a:r>
+              <a:rPr sz="1600">
+                <a:solidFill>
+                  <a:srgbClr val="DCDCDC"/>
+                </a:solidFill>
+                <a:latin typeface="Consolas"/>
+              </a:rPr>
+              <a:t>=</a:t>
+            </a:r>
+            <a:r>
+              <a:rPr sz="1600">
+                <a:solidFill>
+                  <a:srgbClr val="DCDCDC"/>
+                </a:solidFill>
+                <a:latin typeface="Consolas"/>
+              </a:rPr>
+              <a:t> </a:t>
+            </a:r>
+            <a:r>
+              <a:rPr sz="1600">
+                <a:solidFill>
+                  <a:srgbClr val="C586C0"/>
+                </a:solidFill>
+                <a:latin typeface="Consolas"/>
+              </a:rPr>
+              <a:t>u64</a:t>
+            </a:r>
+            <a:r>
+              <a:rPr sz="1600">
+                <a:solidFill>
+                  <a:srgbClr val="DCDCDC"/>
+                </a:solidFill>
+                <a:latin typeface="Consolas"/>
+              </a:rPr>
+              <a:t>;</a:t>
             </a:r>
           </a:p>
           <a:p>
@@ -3626,87 +3608,6 @@
                 <a:spcPts val="0"/>
               </a:spcAft>
             </a:pPr>
-            <a:r>
-              <a:rPr sz="1600">
-                <a:solidFill>
-                  <a:srgbClr val="DCDCDC"/>
-                </a:solidFill>
-                <a:latin typeface="Consolas"/>
-              </a:rPr>
-              <a:t>    </a:t>
-            </a:r>
-            <a:r>
-              <a:rPr sz="1600">
-                <a:solidFill>
-                  <a:srgbClr val="DCDCDC"/>
-                </a:solidFill>
-                <a:latin typeface="Consolas"/>
-              </a:rPr>
-              <a:t>values</a:t>
-            </a:r>
-            <a:r>
-              <a:rPr sz="1600">
-                <a:solidFill>
-                  <a:srgbClr val="DCDCDC"/>
-                </a:solidFill>
-                <a:latin typeface="Consolas"/>
-              </a:rPr>
-              <a:t>:</a:t>
-            </a:r>
-            <a:r>
-              <a:rPr sz="1600">
-                <a:solidFill>
-                  <a:srgbClr val="DCDCDC"/>
-                </a:solidFill>
-                <a:latin typeface="Consolas"/>
-              </a:rPr>
-              <a:t> </a:t>
-            </a:r>
-            <a:r>
-              <a:rPr sz="1600">
-                <a:solidFill>
-                  <a:srgbClr val="4EC9B0"/>
-                </a:solidFill>
-                <a:latin typeface="Consolas"/>
-              </a:rPr>
-              <a:t>BTreeSet</a:t>
-            </a:r>
-            <a:r>
-              <a:rPr sz="1600">
-                <a:solidFill>
-                  <a:srgbClr val="DCDCDC"/>
-                </a:solidFill>
-                <a:latin typeface="Consolas"/>
-              </a:rPr>
-              <a:t>&lt;</a:t>
-            </a:r>
-            <a:r>
-              <a:rPr sz="1600">
-                <a:solidFill>
-                  <a:srgbClr val="DCDCDC"/>
-                </a:solidFill>
-                <a:latin typeface="Consolas"/>
-              </a:rPr>
-              <a:t>T</a:t>
-            </a:r>
-            <a:r>
-              <a:rPr sz="1600">
-                <a:solidFill>
-                  <a:srgbClr val="DCDCDC"/>
-                </a:solidFill>
-                <a:latin typeface="Consolas"/>
-              </a:rPr>
-              <a:t>&gt;</a:t>
-            </a:r>
-            <a:r>
-              <a:rPr sz="1600">
-                <a:solidFill>
-                  <a:srgbClr val="DCDCDC"/>
-                </a:solidFill>
-                <a:latin typeface="Consolas"/>
-              </a:rPr>
-              <a:t>,</a:t>
-            </a:r>
           </a:p>
           <a:p>
             <a:pPr>
@@ -3723,11 +3624,11 @@
             <a:r>
               <a:rPr sz="1600">
                 <a:solidFill>
-                  <a:srgbClr val="DCDCDC"/>
-                </a:solidFill>
-                <a:latin typeface="Consolas"/>
-              </a:rPr>
-              <a:t>}</a:t>
+                  <a:srgbClr val="6A9955"/>
+                </a:solidFill>
+                <a:latin typeface="Consolas"/>
+              </a:rPr>
+              <a:t>// Mock up RangeSetBlaze as a BTreeSet wrapper for demo purposes.</a:t>
             </a:r>
           </a:p>
           <a:p>
@@ -3742,6 +3643,33 @@
                 <a:spcPts val="0"/>
               </a:spcAft>
             </a:pPr>
+            <a:r>
+              <a:rPr sz="1600">
+                <a:solidFill>
+                  <a:srgbClr val="6A9955"/>
+                </a:solidFill>
+                <a:latin typeface="Consolas"/>
+              </a:rPr>
+              <a:t>#[</a:t>
+            </a:r>
+            <a:r>
+              <a:rPr sz="1600">
+                <a:solidFill>
+                  <a:srgbClr val="6A9955"/>
+                </a:solidFill>
+                <a:latin typeface="Consolas"/>
+              </a:rPr>
+              <a:t>derive(Debug, Clone, PartialEq, Eq)</a:t>
+            </a:r>
+            <a:r>
+              <a:rPr sz="1600">
+                <a:solidFill>
+                  <a:srgbClr val="6A9955"/>
+                </a:solidFill>
+                <a:latin typeface="Consolas"/>
+              </a:rPr>
+              <a:t>]</a:t>
+            </a:r>
           </a:p>
           <a:p>
             <a:pPr>
@@ -3762,34 +3690,7 @@
                 </a:solidFill>
                 <a:latin typeface="Consolas"/>
               </a:rPr>
-              <a:t>impl</a:t>
-            </a:r>
-            <a:r>
-              <a:rPr sz="1600">
-                <a:solidFill>
-                  <a:srgbClr val="DCDCDC"/>
-                </a:solidFill>
-                <a:latin typeface="Consolas"/>
-              </a:rPr>
-              <a:t>&lt;</a:t>
-            </a:r>
-            <a:r>
-              <a:rPr sz="1600">
-                <a:solidFill>
-                  <a:srgbClr val="DCDCDC"/>
-                </a:solidFill>
-                <a:latin typeface="Consolas"/>
-              </a:rPr>
-              <a:t>T</a:t>
-            </a:r>
-            <a:r>
-              <a:rPr sz="1600">
-                <a:solidFill>
-                  <a:srgbClr val="DCDCDC"/>
-                </a:solidFill>
-                <a:latin typeface="Consolas"/>
-              </a:rPr>
-              <a:t>:</a:t>
+              <a:t>struct</a:t>
             </a:r>
             <a:r>
               <a:rPr sz="1600">
@@ -3807,97 +3708,7 @@
                 </a:solidFill>
                 <a:latin typeface="Consolas"/>
               </a:rPr>
-              <a:t>Ord</a:t>
-            </a:r>
-            <a:r>
-              <a:rPr sz="1600">
-                <a:solidFill>
-                  <a:srgbClr val="DCDCDC"/>
-                </a:solidFill>
-                <a:latin typeface="Consolas"/>
-              </a:rPr>
-              <a:t> </a:t>
-            </a:r>
-            <a:r>
-              <a:rPr sz="1600">
-                <a:solidFill>
-                  <a:srgbClr val="DCDCDC"/>
-                </a:solidFill>
-                <a:latin typeface="Consolas"/>
-              </a:rPr>
-              <a:t>+</a:t>
-            </a:r>
-            <a:r>
-              <a:rPr sz="1600">
-                <a:solidFill>
-                  <a:srgbClr val="DCDCDC"/>
-                </a:solidFill>
-                <a:latin typeface="Consolas"/>
-              </a:rPr>
-              <a:t> </a:t>
-            </a:r>
-            <a:r>
-              <a:rPr sz="1600">
-                <a:solidFill>
-                  <a:srgbClr val="4EC9B0"/>
-                </a:solidFill>
-                <a:latin typeface="Consolas"/>
-              </a:rPr>
-              <a:t>Copy</a:t>
-            </a:r>
-            <a:r>
-              <a:rPr sz="1600">
-                <a:solidFill>
-                  <a:srgbClr val="DCDCDC"/>
-                </a:solidFill>
-                <a:latin typeface="Consolas"/>
-              </a:rPr>
-              <a:t>&gt;</a:t>
-            </a:r>
-            <a:r>
-              <a:rPr sz="1600">
-                <a:solidFill>
-                  <a:srgbClr val="DCDCDC"/>
-                </a:solidFill>
-                <a:latin typeface="Consolas"/>
-              </a:rPr>
-              <a:t> </a:t>
-            </a:r>
-            <a:r>
-              <a:rPr sz="1600">
-                <a:solidFill>
-                  <a:srgbClr val="DCDCDC"/>
-                </a:solidFill>
-                <a:latin typeface="Consolas"/>
-              </a:rPr>
               <a:t>RangeSetBlaze</a:t>
-            </a:r>
-            <a:r>
-              <a:rPr sz="1600">
-                <a:solidFill>
-                  <a:srgbClr val="DCDCDC"/>
-                </a:solidFill>
-                <a:latin typeface="Consolas"/>
-              </a:rPr>
-              <a:t>&lt;</a:t>
-            </a:r>
-            <a:r>
-              <a:rPr sz="1600">
-                <a:solidFill>
-                  <a:srgbClr val="DCDCDC"/>
-                </a:solidFill>
-                <a:latin typeface="Consolas"/>
-              </a:rPr>
-              <a:t>T</a:t>
-            </a:r>
-            <a:r>
-              <a:rPr sz="1600">
-                <a:solidFill>
-                  <a:srgbClr val="DCDCDC"/>
-                </a:solidFill>
-                <a:latin typeface="Consolas"/>
-              </a:rPr>
-              <a:t>&gt;</a:t>
             </a:r>
             <a:r>
               <a:rPr sz="1600">
@@ -3942,65 +3753,20 @@
             <a:r>
               <a:rPr sz="1600">
                 <a:solidFill>
-                  <a:srgbClr val="C586C0"/>
-                </a:solidFill>
-                <a:latin typeface="Consolas"/>
-              </a:rPr>
-              <a:t>fn</a:t>
-            </a:r>
-            <a:r>
-              <a:rPr sz="1600">
-                <a:solidFill>
-                  <a:srgbClr val="DCDCDC"/>
-                </a:solidFill>
-                <a:latin typeface="Consolas"/>
-              </a:rPr>
-              <a:t> </a:t>
-            </a:r>
-            <a:r>
-              <a:rPr sz="1600">
-                <a:solidFill>
-                  <a:srgbClr val="DCDCAA"/>
-                </a:solidFill>
-                <a:latin typeface="Consolas"/>
-              </a:rPr>
-              <a:t>new</a:t>
-            </a:r>
-            <a:r>
-              <a:rPr sz="1600">
-                <a:solidFill>
-                  <a:srgbClr val="DCDCDC"/>
-                </a:solidFill>
-                <a:latin typeface="Consolas"/>
-              </a:rPr>
-              <a:t>(</a:t>
-            </a:r>
-            <a:r>
-              <a:rPr sz="1600">
-                <a:solidFill>
-                  <a:srgbClr val="DCDCDC"/>
-                </a:solidFill>
-                <a:latin typeface="Consolas"/>
-              </a:rPr>
-              <a:t>)</a:t>
-            </a:r>
-            <a:r>
-              <a:rPr sz="1600">
-                <a:solidFill>
-                  <a:srgbClr val="DCDCDC"/>
-                </a:solidFill>
-                <a:latin typeface="Consolas"/>
-              </a:rPr>
-              <a:t> </a:t>
-            </a:r>
-            <a:r>
-              <a:rPr sz="1600">
-                <a:solidFill>
-                  <a:srgbClr val="DCDCDC"/>
-                </a:solidFill>
-                <a:latin typeface="Consolas"/>
-              </a:rPr>
-              <a:t>-&gt;</a:t>
+                  <a:srgbClr val="DCDCDC"/>
+                </a:solidFill>
+                <a:latin typeface="Consolas"/>
+              </a:rPr>
+              <a:t>values</a:t>
+            </a:r>
+            <a:r>
+              <a:rPr sz="1600">
+                <a:solidFill>
+                  <a:srgbClr val="DCDCDC"/>
+                </a:solidFill>
+                <a:latin typeface="Consolas"/>
+              </a:rPr>
+              <a:t>:</a:t>
             </a:r>
             <a:r>
               <a:rPr sz="1600">
@@ -4018,25 +3784,43 @@
                 </a:solidFill>
                 <a:latin typeface="Consolas"/>
               </a:rPr>
-              <a:t>Self</a:t>
-            </a:r>
-            <a:r>
-              <a:rPr sz="1600">
-                <a:solidFill>
-                  <a:srgbClr val="DCDCDC"/>
-                </a:solidFill>
-                <a:latin typeface="Consolas"/>
-              </a:rPr>
-              <a:t> </a:t>
-            </a:r>
-            <a:r>
-              <a:rPr sz="1600">
-                <a:solidFill>
-                  <a:srgbClr val="DCDCDC"/>
-                </a:solidFill>
-                <a:latin typeface="Consolas"/>
-              </a:rPr>
-              <a:t>{</a:t>
+              <a:t>BTreeSet</a:t>
+            </a:r>
+            <a:r>
+              <a:rPr sz="1600">
+                <a:solidFill>
+                  <a:srgbClr val="DCDCDC"/>
+                </a:solidFill>
+                <a:latin typeface="Consolas"/>
+              </a:rPr>
+              <a:t>&lt;</a:t>
+            </a:r>
+            <a:r>
+              <a:rPr sz="1600">
+                <a:solidFill>
+                  <a:srgbClr val="DCDCDC"/>
+                </a:solidFill>
+                <a:latin typeface="Consolas"/>
+              </a:rPr>
+              <a:t>Integer</a:t>
+            </a:r>
+            <a:r>
+              <a:rPr sz="1600">
+                <a:solidFill>
+                  <a:srgbClr val="DCDCDC"/>
+                </a:solidFill>
+                <a:latin typeface="Consolas"/>
+              </a:rPr>
+              <a:t>&gt;</a:t>
+            </a:r>
+            <a:r>
+              <a:rPr sz="1600">
+                <a:solidFill>
+                  <a:srgbClr val="DCDCDC"/>
+                </a:solidFill>
+                <a:latin typeface="Consolas"/>
+              </a:rPr>
+              <a:t>,</a:t>
             </a:r>
           </a:p>
           <a:p>
@@ -4058,34 +3842,7 @@
                 </a:solidFill>
                 <a:latin typeface="Consolas"/>
               </a:rPr>
-              <a:t>        </a:t>
-            </a:r>
-            <a:r>
-              <a:rPr sz="1600">
-                <a:solidFill>
-                  <a:srgbClr val="4EC9B0"/>
-                </a:solidFill>
-                <a:latin typeface="Consolas"/>
-              </a:rPr>
-              <a:t>Self</a:t>
-            </a:r>
-            <a:r>
-              <a:rPr sz="1600">
-                <a:solidFill>
-                  <a:srgbClr val="DCDCDC"/>
-                </a:solidFill>
-                <a:latin typeface="Consolas"/>
-              </a:rPr>
-              <a:t> </a:t>
-            </a:r>
-            <a:r>
-              <a:rPr sz="1600">
-                <a:solidFill>
-                  <a:srgbClr val="DCDCDC"/>
-                </a:solidFill>
-                <a:latin typeface="Consolas"/>
-              </a:rPr>
-              <a:t>{</a:t>
+              <a:t>}</a:t>
             </a:r>
           </a:p>
           <a:p>
@@ -4100,96 +3857,6 @@
                 <a:spcPts val="0"/>
               </a:spcAft>
             </a:pPr>
-            <a:r>
-              <a:rPr sz="1600">
-                <a:solidFill>
-                  <a:srgbClr val="DCDCDC"/>
-                </a:solidFill>
-                <a:latin typeface="Consolas"/>
-              </a:rPr>
-              <a:t>            </a:t>
-            </a:r>
-            <a:r>
-              <a:rPr sz="1600">
-                <a:solidFill>
-                  <a:srgbClr val="DCDCDC"/>
-                </a:solidFill>
-                <a:latin typeface="Consolas"/>
-              </a:rPr>
-              <a:t>values</a:t>
-            </a:r>
-            <a:r>
-              <a:rPr sz="1600">
-                <a:solidFill>
-                  <a:srgbClr val="DCDCDC"/>
-                </a:solidFill>
-                <a:latin typeface="Consolas"/>
-              </a:rPr>
-              <a:t>:</a:t>
-            </a:r>
-            <a:r>
-              <a:rPr sz="1600">
-                <a:solidFill>
-                  <a:srgbClr val="DCDCDC"/>
-                </a:solidFill>
-                <a:latin typeface="Consolas"/>
-              </a:rPr>
-              <a:t> </a:t>
-            </a:r>
-            <a:r>
-              <a:rPr sz="1600">
-                <a:solidFill>
-                  <a:srgbClr val="4EC9B0"/>
-                </a:solidFill>
-                <a:latin typeface="Consolas"/>
-              </a:rPr>
-              <a:t>BTreeSet</a:t>
-            </a:r>
-            <a:r>
-              <a:rPr sz="1600">
-                <a:solidFill>
-                  <a:srgbClr val="DCDCDC"/>
-                </a:solidFill>
-                <a:latin typeface="Consolas"/>
-              </a:rPr>
-              <a:t>::</a:t>
-            </a:r>
-            <a:r>
-              <a:rPr sz="1600">
-                <a:solidFill>
-                  <a:srgbClr val="DCDCDC"/>
-                </a:solidFill>
-                <a:latin typeface="Consolas"/>
-              </a:rPr>
-              <a:t>new</a:t>
-            </a:r>
-            <a:r>
-              <a:rPr sz="1600">
-                <a:solidFill>
-                  <a:srgbClr val="DCDCDC"/>
-                </a:solidFill>
-                <a:latin typeface="Consolas"/>
-              </a:rPr>
-              <a:t>(</a:t>
-            </a:r>
-            <a:r>
-              <a:rPr sz="1600">
-                <a:solidFill>
-                  <a:srgbClr val="DCDCDC"/>
-                </a:solidFill>
-                <a:latin typeface="Consolas"/>
-              </a:rPr>
-              <a:t>)</a:t>
-            </a:r>
-            <a:r>
-              <a:rPr sz="1600">
-                <a:solidFill>
-                  <a:srgbClr val="DCDCDC"/>
-                </a:solidFill>
-                <a:latin typeface="Consolas"/>
-              </a:rPr>
-              <a:t>,</a:t>
-            </a:r>
           </a:p>
           <a:p>
             <a:pPr>
@@ -4206,20 +3873,47 @@
             <a:r>
               <a:rPr sz="1600">
                 <a:solidFill>
-                  <a:srgbClr val="DCDCDC"/>
-                </a:solidFill>
-                <a:latin typeface="Consolas"/>
-              </a:rPr>
-              <a:t>        </a:t>
-            </a:r>
-            <a:r>
-              <a:rPr sz="1600">
-                <a:solidFill>
-                  <a:srgbClr val="DCDCDC"/>
-                </a:solidFill>
-                <a:latin typeface="Consolas"/>
-              </a:rPr>
-              <a:t>}</a:t>
+                  <a:srgbClr val="C586C0"/>
+                </a:solidFill>
+                <a:latin typeface="Consolas"/>
+              </a:rPr>
+              <a:t>impl</a:t>
+            </a:r>
+            <a:r>
+              <a:rPr sz="1600">
+                <a:solidFill>
+                  <a:srgbClr val="DCDCDC"/>
+                </a:solidFill>
+                <a:latin typeface="Consolas"/>
+              </a:rPr>
+              <a:t> </a:t>
+            </a:r>
+            <a:r>
+              <a:rPr sz="1600">
+                <a:solidFill>
+                  <a:srgbClr val="DCDCDC"/>
+                </a:solidFill>
+                <a:latin typeface="Consolas"/>
+              </a:rPr>
+              <a:t>RangeSetBlaze</a:t>
+            </a:r>
+            <a:r>
+              <a:rPr sz="1600">
+                <a:solidFill>
+                  <a:srgbClr val="DCDCDC"/>
+                </a:solidFill>
+                <a:latin typeface="Consolas"/>
+              </a:rPr>
+              <a:t> </a:t>
+            </a:r>
+            <a:r>
+              <a:rPr sz="1600">
+                <a:solidFill>
+                  <a:srgbClr val="DCDCDC"/>
+                </a:solidFill>
+                <a:latin typeface="Consolas"/>
+              </a:rPr>
+              <a:t>{</a:t>
             </a:r>
           </a:p>
           <a:p>
@@ -4246,11 +3940,101 @@
             <a:r>
               <a:rPr sz="1600">
                 <a:solidFill>
-                  <a:srgbClr val="DCDCDC"/>
-                </a:solidFill>
-                <a:latin typeface="Consolas"/>
-              </a:rPr>
-              <a:t>}</a:t>
+                  <a:srgbClr val="C586C0"/>
+                </a:solidFill>
+                <a:latin typeface="Consolas"/>
+              </a:rPr>
+              <a:t>fn</a:t>
+            </a:r>
+            <a:r>
+              <a:rPr sz="1600">
+                <a:solidFill>
+                  <a:srgbClr val="DCDCDC"/>
+                </a:solidFill>
+                <a:latin typeface="Consolas"/>
+              </a:rPr>
+              <a:t> </a:t>
+            </a:r>
+            <a:r>
+              <a:rPr sz="1600">
+                <a:solidFill>
+                  <a:srgbClr val="DCDCAA"/>
+                </a:solidFill>
+                <a:latin typeface="Consolas"/>
+              </a:rPr>
+              <a:t>new</a:t>
+            </a:r>
+            <a:r>
+              <a:rPr sz="1600">
+                <a:solidFill>
+                  <a:srgbClr val="DCDCDC"/>
+                </a:solidFill>
+                <a:latin typeface="Consolas"/>
+              </a:rPr>
+              <a:t>(</a:t>
+            </a:r>
+            <a:r>
+              <a:rPr sz="1600">
+                <a:solidFill>
+                  <a:srgbClr val="DCDCDC"/>
+                </a:solidFill>
+                <a:latin typeface="Consolas"/>
+              </a:rPr>
+              <a:t>)</a:t>
+            </a:r>
+            <a:r>
+              <a:rPr sz="1600">
+                <a:solidFill>
+                  <a:srgbClr val="DCDCDC"/>
+                </a:solidFill>
+                <a:latin typeface="Consolas"/>
+              </a:rPr>
+              <a:t> </a:t>
+            </a:r>
+            <a:r>
+              <a:rPr sz="1600">
+                <a:solidFill>
+                  <a:srgbClr val="DCDCDC"/>
+                </a:solidFill>
+                <a:latin typeface="Consolas"/>
+              </a:rPr>
+              <a:t>-&gt;</a:t>
+            </a:r>
+            <a:r>
+              <a:rPr sz="1600">
+                <a:solidFill>
+                  <a:srgbClr val="DCDCDC"/>
+                </a:solidFill>
+                <a:latin typeface="Consolas"/>
+              </a:rPr>
+              <a:t> </a:t>
+            </a:r>
+            <a:r>
+              <a:rPr sz="1600">
+                <a:solidFill>
+                  <a:srgbClr val="4EC9B0"/>
+                </a:solidFill>
+                <a:latin typeface="Consolas"/>
+              </a:rPr>
+              <a:t>Self</a:t>
+            </a:r>
+            <a:r>
+              <a:rPr sz="1600">
+                <a:solidFill>
+                  <a:srgbClr val="DCDCDC"/>
+                </a:solidFill>
+                <a:latin typeface="Consolas"/>
+              </a:rPr>
+              <a:t> </a:t>
+            </a:r>
+            <a:r>
+              <a:rPr sz="1600">
+                <a:solidFill>
+                  <a:srgbClr val="DCDCDC"/>
+                </a:solidFill>
+                <a:latin typeface="Consolas"/>
+              </a:rPr>
+              <a:t>{</a:t>
             </a:r>
           </a:p>
           <a:p>
@@ -4265,6 +4049,42 @@
                 <a:spcPts val="0"/>
               </a:spcAft>
             </a:pPr>
+            <a:r>
+              <a:rPr sz="1600">
+                <a:solidFill>
+                  <a:srgbClr val="DCDCDC"/>
+                </a:solidFill>
+                <a:latin typeface="Consolas"/>
+              </a:rPr>
+              <a:t>        </a:t>
+            </a:r>
+            <a:r>
+              <a:rPr sz="1600">
+                <a:solidFill>
+                  <a:srgbClr val="4EC9B0"/>
+                </a:solidFill>
+                <a:latin typeface="Consolas"/>
+              </a:rPr>
+              <a:t>Self</a:t>
+            </a:r>
+            <a:r>
+              <a:rPr sz="1600">
+                <a:solidFill>
+                  <a:srgbClr val="DCDCDC"/>
+                </a:solidFill>
+                <a:latin typeface="Consolas"/>
+              </a:rPr>
+              <a:t> </a:t>
+            </a:r>
+            <a:r>
+              <a:rPr sz="1600">
+                <a:solidFill>
+                  <a:srgbClr val="DCDCDC"/>
+                </a:solidFill>
+                <a:latin typeface="Consolas"/>
+              </a:rPr>
+              <a:t>{</a:t>
+            </a:r>
           </a:p>
           <a:p>
             <a:pPr>
@@ -4285,34 +4105,61 @@
                 </a:solidFill>
                 <a:latin typeface="Consolas"/>
               </a:rPr>
-              <a:t>    </a:t>
-            </a:r>
-            <a:r>
-              <a:rPr sz="1600">
-                <a:solidFill>
-                  <a:srgbClr val="C586C0"/>
-                </a:solidFill>
-                <a:latin typeface="Consolas"/>
-              </a:rPr>
-              <a:t>fn</a:t>
-            </a:r>
-            <a:r>
-              <a:rPr sz="1600">
-                <a:solidFill>
-                  <a:srgbClr val="DCDCDC"/>
-                </a:solidFill>
-                <a:latin typeface="Consolas"/>
-              </a:rPr>
-              <a:t> </a:t>
-            </a:r>
-            <a:r>
-              <a:rPr sz="1600">
-                <a:solidFill>
-                  <a:srgbClr val="DCDCAA"/>
-                </a:solidFill>
-                <a:latin typeface="Consolas"/>
-              </a:rPr>
-              <a:t>from_values</a:t>
+              <a:t>            </a:t>
+            </a:r>
+            <a:r>
+              <a:rPr sz="1600">
+                <a:solidFill>
+                  <a:srgbClr val="DCDCDC"/>
+                </a:solidFill>
+                <a:latin typeface="Consolas"/>
+              </a:rPr>
+              <a:t>values</a:t>
+            </a:r>
+            <a:r>
+              <a:rPr sz="1600">
+                <a:solidFill>
+                  <a:srgbClr val="DCDCDC"/>
+                </a:solidFill>
+                <a:latin typeface="Consolas"/>
+              </a:rPr>
+              <a:t>:</a:t>
+            </a:r>
+            <a:r>
+              <a:rPr sz="1600">
+                <a:solidFill>
+                  <a:srgbClr val="DCDCDC"/>
+                </a:solidFill>
+                <a:latin typeface="Consolas"/>
+              </a:rPr>
+              <a:t> </a:t>
+            </a:r>
+            <a:r>
+              <a:rPr sz="1600">
+                <a:solidFill>
+                  <a:srgbClr val="4EC9B0"/>
+                </a:solidFill>
+                <a:latin typeface="Consolas"/>
+              </a:rPr>
+              <a:t>BTreeSet</a:t>
+            </a:r>
+            <a:r>
+              <a:rPr sz="1600">
+                <a:solidFill>
+                  <a:srgbClr val="DCDCDC"/>
+                </a:solidFill>
+                <a:latin typeface="Consolas"/>
+              </a:rPr>
+              <a:t>::</a:t>
+            </a:r>
+            <a:r>
+              <a:rPr sz="1600">
+                <a:solidFill>
+                  <a:srgbClr val="DCDCDC"/>
+                </a:solidFill>
+                <a:latin typeface="Consolas"/>
+              </a:rPr>
+              <a:t>new</a:t>
             </a:r>
             <a:r>
               <a:rPr sz="1600">
@@ -4330,69 +4177,6 @@
                 </a:solidFill>
                 <a:latin typeface="Consolas"/>
               </a:rPr>
-              <a:t>values</a:t>
-            </a:r>
-            <a:r>
-              <a:rPr sz="1600">
-                <a:solidFill>
-                  <a:srgbClr val="DCDCDC"/>
-                </a:solidFill>
-                <a:latin typeface="Consolas"/>
-              </a:rPr>
-              <a:t>:</a:t>
-            </a:r>
-            <a:r>
-              <a:rPr sz="1600">
-                <a:solidFill>
-                  <a:srgbClr val="DCDCDC"/>
-                </a:solidFill>
-                <a:latin typeface="Consolas"/>
-              </a:rPr>
-              <a:t> </a:t>
-            </a:r>
-            <a:r>
-              <a:rPr sz="1600">
-                <a:solidFill>
-                  <a:srgbClr val="C586C0"/>
-                </a:solidFill>
-                <a:latin typeface="Consolas"/>
-              </a:rPr>
-              <a:t>&amp;</a:t>
-            </a:r>
-            <a:r>
-              <a:rPr sz="1600">
-                <a:solidFill>
-                  <a:srgbClr val="DCDCDC"/>
-                </a:solidFill>
-                <a:latin typeface="Consolas"/>
-              </a:rPr>
-              <a:t>[</a:t>
-            </a:r>
-            <a:r>
-              <a:rPr sz="1600">
-                <a:solidFill>
-                  <a:srgbClr val="DCDCDC"/>
-                </a:solidFill>
-                <a:latin typeface="Consolas"/>
-              </a:rPr>
-              <a:t>T</a:t>
-            </a:r>
-            <a:r>
-              <a:rPr sz="1600">
-                <a:solidFill>
-                  <a:srgbClr val="DCDCDC"/>
-                </a:solidFill>
-                <a:latin typeface="Consolas"/>
-              </a:rPr>
-              <a:t>]</a:t>
-            </a:r>
-            <a:r>
-              <a:rPr sz="1600">
-                <a:solidFill>
-                  <a:srgbClr val="DCDCDC"/>
-                </a:solidFill>
-                <a:latin typeface="Consolas"/>
-              </a:rPr>
               <a:t>)</a:t>
             </a:r>
             <a:r>
@@ -4402,52 +4186,7 @@
                 </a:solidFill>
                 <a:latin typeface="Consolas"/>
               </a:rPr>
-              <a:t> </a:t>
-            </a:r>
-            <a:r>
-              <a:rPr sz="1600">
-                <a:solidFill>
-                  <a:srgbClr val="DCDCDC"/>
-                </a:solidFill>
-                <a:latin typeface="Consolas"/>
-              </a:rPr>
-              <a:t>-&gt;</a:t>
-            </a:r>
-            <a:r>
-              <a:rPr sz="1600">
-                <a:solidFill>
-                  <a:srgbClr val="DCDCDC"/>
-                </a:solidFill>
-                <a:latin typeface="Consolas"/>
-              </a:rPr>
-              <a:t> </a:t>
-            </a:r>
-            <a:r>
-              <a:rPr sz="1600">
-                <a:solidFill>
-                  <a:srgbClr val="4EC9B0"/>
-                </a:solidFill>
-                <a:latin typeface="Consolas"/>
-              </a:rPr>
-              <a:t>Self</a:t>
-            </a:r>
-            <a:r>
-              <a:rPr sz="1600">
-                <a:solidFill>
-                  <a:srgbClr val="DCDCDC"/>
-                </a:solidFill>
-                <a:latin typeface="Consolas"/>
-              </a:rPr>
-              <a:t> </a:t>
-            </a:r>
-            <a:r>
-              <a:rPr sz="1600">
-                <a:solidFill>
-                  <a:srgbClr val="DCDCDC"/>
-                </a:solidFill>
-                <a:latin typeface="Consolas"/>
-              </a:rPr>
-              <a:t>{</a:t>
+              <a:t>,</a:t>
             </a:r>
           </a:p>
           <a:p>
@@ -4474,29 +4213,11 @@
             <a:r>
               <a:rPr sz="1600">
                 <a:solidFill>
-                  <a:srgbClr val="4EC9B0"/>
-                </a:solidFill>
-                <a:latin typeface="Consolas"/>
-              </a:rPr>
-              <a:t>Self</a:t>
-            </a:r>
-            <a:r>
-              <a:rPr sz="1600">
-                <a:solidFill>
-                  <a:srgbClr val="DCDCDC"/>
-                </a:solidFill>
-                <a:latin typeface="Consolas"/>
-              </a:rPr>
-              <a:t> </a:t>
-            </a:r>
-            <a:r>
-              <a:rPr sz="1600">
-                <a:solidFill>
-                  <a:srgbClr val="DCDCDC"/>
-                </a:solidFill>
-                <a:latin typeface="Consolas"/>
-              </a:rPr>
-              <a:t>{</a:t>
+                  <a:srgbClr val="DCDCDC"/>
+                </a:solidFill>
+                <a:latin typeface="Consolas"/>
+              </a:rPr>
+              <a:t>}</a:t>
             </a:r>
           </a:p>
           <a:p>
@@ -4518,160 +4239,16 @@
                 </a:solidFill>
                 <a:latin typeface="Consolas"/>
               </a:rPr>
-              <a:t>            </a:t>
-            </a:r>
-            <a:r>
-              <a:rPr sz="1600">
-                <a:solidFill>
-                  <a:srgbClr val="DCDCDC"/>
-                </a:solidFill>
-                <a:latin typeface="Consolas"/>
-              </a:rPr>
-              <a:t>values</a:t>
-            </a:r>
-            <a:r>
-              <a:rPr sz="1600">
-                <a:solidFill>
-                  <a:srgbClr val="DCDCDC"/>
-                </a:solidFill>
-                <a:latin typeface="Consolas"/>
-              </a:rPr>
-              <a:t>:</a:t>
-            </a:r>
-            <a:r>
-              <a:rPr sz="1600">
-                <a:solidFill>
-                  <a:srgbClr val="DCDCDC"/>
-                </a:solidFill>
-                <a:latin typeface="Consolas"/>
-              </a:rPr>
-              <a:t> </a:t>
-            </a:r>
-            <a:r>
-              <a:rPr sz="1600">
-                <a:solidFill>
-                  <a:srgbClr val="4EC9B0"/>
-                </a:solidFill>
-                <a:latin typeface="Consolas"/>
-              </a:rPr>
-              <a:t>values</a:t>
-            </a:r>
-            <a:r>
-              <a:rPr sz="1600">
-                <a:solidFill>
-                  <a:srgbClr val="DCDCDC"/>
-                </a:solidFill>
-                <a:latin typeface="Consolas"/>
-              </a:rPr>
-              <a:t>.</a:t>
-            </a:r>
-            <a:r>
-              <a:rPr sz="1600">
-                <a:solidFill>
-                  <a:srgbClr val="DCDCDC"/>
-                </a:solidFill>
-                <a:latin typeface="Consolas"/>
-              </a:rPr>
-              <a:t>iter</a:t>
-            </a:r>
-            <a:r>
-              <a:rPr sz="1600">
-                <a:solidFill>
-                  <a:srgbClr val="DCDCDC"/>
-                </a:solidFill>
-                <a:latin typeface="Consolas"/>
-              </a:rPr>
-              <a:t>(</a:t>
-            </a:r>
-            <a:r>
-              <a:rPr sz="1600">
-                <a:solidFill>
-                  <a:srgbClr val="DCDCDC"/>
-                </a:solidFill>
-                <a:latin typeface="Consolas"/>
-              </a:rPr>
-              <a:t>)</a:t>
-            </a:r>
-            <a:r>
-              <a:rPr sz="1600">
-                <a:solidFill>
-                  <a:srgbClr val="DCDCDC"/>
-                </a:solidFill>
-                <a:latin typeface="Consolas"/>
-              </a:rPr>
-              <a:t>.</a:t>
-            </a:r>
-            <a:r>
-              <a:rPr sz="1600">
-                <a:solidFill>
-                  <a:srgbClr val="DCDCDC"/>
-                </a:solidFill>
-                <a:latin typeface="Consolas"/>
-              </a:rPr>
-              <a:t>copied</a:t>
-            </a:r>
-            <a:r>
-              <a:rPr sz="1600">
-                <a:solidFill>
-                  <a:srgbClr val="DCDCDC"/>
-                </a:solidFill>
-                <a:latin typeface="Consolas"/>
-              </a:rPr>
-              <a:t>(</a:t>
-            </a:r>
-            <a:r>
-              <a:rPr sz="1600">
-                <a:solidFill>
-                  <a:srgbClr val="DCDCDC"/>
-                </a:solidFill>
-                <a:latin typeface="Consolas"/>
-              </a:rPr>
-              <a:t>)</a:t>
-            </a:r>
-            <a:r>
-              <a:rPr sz="1600">
-                <a:solidFill>
-                  <a:srgbClr val="DCDCDC"/>
-                </a:solidFill>
-                <a:latin typeface="Consolas"/>
-              </a:rPr>
-              <a:t>.</a:t>
-            </a:r>
-            <a:r>
-              <a:rPr sz="1600">
-                <a:solidFill>
-                  <a:srgbClr val="DCDCDC"/>
-                </a:solidFill>
-                <a:latin typeface="Consolas"/>
-              </a:rPr>
-              <a:t>collect</a:t>
-            </a:r>
-            <a:r>
-              <a:rPr sz="1600">
-                <a:solidFill>
-                  <a:srgbClr val="DCDCDC"/>
-                </a:solidFill>
-                <a:latin typeface="Consolas"/>
-              </a:rPr>
-              <a:t>(</a:t>
-            </a:r>
-            <a:r>
-              <a:rPr sz="1600">
-                <a:solidFill>
-                  <a:srgbClr val="DCDCDC"/>
-                </a:solidFill>
-                <a:latin typeface="Consolas"/>
-              </a:rPr>
-              <a:t>)</a:t>
-            </a:r>
-            <a:r>
-              <a:rPr sz="1600">
-                <a:solidFill>
-                  <a:srgbClr val="DCDCDC"/>
-                </a:solidFill>
-                <a:latin typeface="Consolas"/>
-              </a:rPr>
-              <a:t>,</a:t>
+              <a:t>    </a:t>
+            </a:r>
+            <a:r>
+              <a:rPr sz="1600">
+                <a:solidFill>
+                  <a:srgbClr val="DCDCDC"/>
+                </a:solidFill>
+                <a:latin typeface="Consolas"/>
+              </a:rPr>
+              <a:t>}</a:t>
             </a:r>
           </a:p>
           <a:p>
@@ -4686,24 +4263,6 @@
                 <a:spcPts val="0"/>
               </a:spcAft>
             </a:pPr>
-            <a:r>
-              <a:rPr sz="1600">
-                <a:solidFill>
-                  <a:srgbClr val="DCDCDC"/>
-                </a:solidFill>
-                <a:latin typeface="Consolas"/>
-              </a:rPr>
-              <a:t>        </a:t>
-            </a:r>
-            <a:r>
-              <a:rPr sz="1600">
-                <a:solidFill>
-                  <a:srgbClr val="DCDCDC"/>
-                </a:solidFill>
-                <a:latin typeface="Consolas"/>
-              </a:rPr>
-              <a:t>}</a:t>
-            </a:r>
           </a:p>
           <a:p>
             <a:pPr>
@@ -4729,11 +4288,11 @@
             <a:r>
               <a:rPr sz="1600">
                 <a:solidFill>
-                  <a:srgbClr val="DCDCDC"/>
-                </a:solidFill>
-                <a:latin typeface="Consolas"/>
-              </a:rPr>
-              <a:t>}</a:t>
+                  <a:srgbClr val="6A9955"/>
+                </a:solidFill>
+                <a:latin typeface="Consolas"/>
+              </a:rPr>
+              <a:t>// Construct from a slice of Integer values.</a:t>
             </a:r>
           </a:p>
           <a:p>
@@ -4748,6 +4307,177 @@
                 <a:spcPts val="0"/>
               </a:spcAft>
             </a:pPr>
+            <a:r>
+              <a:rPr sz="1600">
+                <a:solidFill>
+                  <a:srgbClr val="DCDCDC"/>
+                </a:solidFill>
+                <a:latin typeface="Consolas"/>
+              </a:rPr>
+              <a:t>    </a:t>
+            </a:r>
+            <a:r>
+              <a:rPr sz="1600">
+                <a:solidFill>
+                  <a:srgbClr val="C586C0"/>
+                </a:solidFill>
+                <a:latin typeface="Consolas"/>
+              </a:rPr>
+              <a:t>fn</a:t>
+            </a:r>
+            <a:r>
+              <a:rPr sz="1600">
+                <a:solidFill>
+                  <a:srgbClr val="DCDCDC"/>
+                </a:solidFill>
+                <a:latin typeface="Consolas"/>
+              </a:rPr>
+              <a:t> </a:t>
+            </a:r>
+            <a:r>
+              <a:rPr sz="1600">
+                <a:solidFill>
+                  <a:srgbClr val="DCDCAA"/>
+                </a:solidFill>
+                <a:latin typeface="Consolas"/>
+              </a:rPr>
+              <a:t>from_slice</a:t>
+            </a:r>
+            <a:r>
+              <a:rPr sz="1600">
+                <a:solidFill>
+                  <a:srgbClr val="DCDCDC"/>
+                </a:solidFill>
+                <a:latin typeface="Consolas"/>
+              </a:rPr>
+              <a:t>(</a:t>
+            </a:r>
+            <a:r>
+              <a:rPr sz="1600">
+                <a:solidFill>
+                  <a:srgbClr val="DCDCDC"/>
+                </a:solidFill>
+                <a:latin typeface="Consolas"/>
+              </a:rPr>
+              <a:t>values</a:t>
+            </a:r>
+            <a:r>
+              <a:rPr sz="1600">
+                <a:solidFill>
+                  <a:srgbClr val="DCDCDC"/>
+                </a:solidFill>
+                <a:latin typeface="Consolas"/>
+              </a:rPr>
+              <a:t>:</a:t>
+            </a:r>
+            <a:r>
+              <a:rPr sz="1600">
+                <a:solidFill>
+                  <a:srgbClr val="DCDCDC"/>
+                </a:solidFill>
+                <a:latin typeface="Consolas"/>
+              </a:rPr>
+              <a:t> </a:t>
+            </a:r>
+            <a:r>
+              <a:rPr sz="1600">
+                <a:solidFill>
+                  <a:srgbClr val="C586C0"/>
+                </a:solidFill>
+                <a:latin typeface="Consolas"/>
+              </a:rPr>
+              <a:t>&amp;</a:t>
+            </a:r>
+            <a:r>
+              <a:rPr sz="1600">
+                <a:solidFill>
+                  <a:srgbClr val="DCDCDC"/>
+                </a:solidFill>
+                <a:latin typeface="Consolas"/>
+              </a:rPr>
+              <a:t>[</a:t>
+            </a:r>
+            <a:r>
+              <a:rPr sz="1600">
+                <a:solidFill>
+                  <a:srgbClr val="DCDCDC"/>
+                </a:solidFill>
+                <a:latin typeface="Consolas"/>
+              </a:rPr>
+              <a:t>Integer</a:t>
+            </a:r>
+            <a:r>
+              <a:rPr sz="1600">
+                <a:solidFill>
+                  <a:srgbClr val="DCDCDC"/>
+                </a:solidFill>
+                <a:latin typeface="Consolas"/>
+              </a:rPr>
+              <a:t>]</a:t>
+            </a:r>
+            <a:r>
+              <a:rPr sz="1600">
+                <a:solidFill>
+                  <a:srgbClr val="DCDCDC"/>
+                </a:solidFill>
+                <a:latin typeface="Consolas"/>
+              </a:rPr>
+              <a:t>)</a:t>
+            </a:r>
+            <a:r>
+              <a:rPr sz="1600">
+                <a:solidFill>
+                  <a:srgbClr val="DCDCDC"/>
+                </a:solidFill>
+                <a:latin typeface="Consolas"/>
+              </a:rPr>
+              <a:t> </a:t>
+            </a:r>
+            <a:r>
+              <a:rPr sz="1600">
+                <a:solidFill>
+                  <a:srgbClr val="DCDCDC"/>
+                </a:solidFill>
+                <a:latin typeface="Consolas"/>
+              </a:rPr>
+              <a:t>-&gt;</a:t>
+            </a:r>
+            <a:r>
+              <a:rPr sz="1600">
+                <a:solidFill>
+                  <a:srgbClr val="DCDCDC"/>
+                </a:solidFill>
+                <a:latin typeface="Consolas"/>
+              </a:rPr>
+              <a:t> </a:t>
+            </a:r>
+            <a:r>
+              <a:rPr sz="1600">
+                <a:solidFill>
+                  <a:srgbClr val="4EC9B0"/>
+                </a:solidFill>
+                <a:latin typeface="Consolas"/>
+              </a:rPr>
+              <a:t>Self</a:t>
+            </a:r>
+            <a:r>
+              <a:rPr sz="1600">
+                <a:solidFill>
+                  <a:srgbClr val="DCDCDC"/>
+                </a:solidFill>
+                <a:latin typeface="Consolas"/>
+              </a:rPr>
+              <a:t> </a:t>
+            </a:r>
+            <a:r>
+              <a:rPr sz="1600">
+                <a:solidFill>
+                  <a:srgbClr val="DCDCDC"/>
+                </a:solidFill>
+                <a:latin typeface="Consolas"/>
+              </a:rPr>
+              <a:t>{</a:t>
+            </a:r>
           </a:p>
           <a:p>
             <a:pPr>
@@ -4768,160 +4498,7 @@
                 </a:solidFill>
                 <a:latin typeface="Consolas"/>
               </a:rPr>
-              <a:t>    </a:t>
-            </a:r>
-            <a:r>
-              <a:rPr sz="1600">
-                <a:solidFill>
-                  <a:srgbClr val="C586C0"/>
-                </a:solidFill>
-                <a:latin typeface="Consolas"/>
-              </a:rPr>
-              <a:t>fn</a:t>
-            </a:r>
-            <a:r>
-              <a:rPr sz="1600">
-                <a:solidFill>
-                  <a:srgbClr val="DCDCDC"/>
-                </a:solidFill>
-                <a:latin typeface="Consolas"/>
-              </a:rPr>
-              <a:t> </a:t>
-            </a:r>
-            <a:r>
-              <a:rPr sz="1600">
-                <a:solidFill>
-                  <a:srgbClr val="DCDCAA"/>
-                </a:solidFill>
-                <a:latin typeface="Consolas"/>
-              </a:rPr>
-              <a:t>union</a:t>
-            </a:r>
-            <a:r>
-              <a:rPr sz="1600">
-                <a:solidFill>
-                  <a:srgbClr val="DCDCDC"/>
-                </a:solidFill>
-                <a:latin typeface="Consolas"/>
-              </a:rPr>
-              <a:t>(</a:t>
-            </a:r>
-            <a:r>
-              <a:rPr sz="1600">
-                <a:solidFill>
-                  <a:srgbClr val="DCDCDC"/>
-                </a:solidFill>
-                <a:latin typeface="Consolas"/>
-              </a:rPr>
-              <a:t>&amp;</a:t>
-            </a:r>
-            <a:r>
-              <a:rPr sz="1600">
-                <a:solidFill>
-                  <a:srgbClr val="4EC9B0"/>
-                </a:solidFill>
-                <a:latin typeface="Consolas"/>
-              </a:rPr>
-              <a:t>self</a:t>
-            </a:r>
-            <a:r>
-              <a:rPr sz="1600">
-                <a:solidFill>
-                  <a:srgbClr val="DCDCDC"/>
-                </a:solidFill>
-                <a:latin typeface="Consolas"/>
-              </a:rPr>
-              <a:t>,</a:t>
-            </a:r>
-            <a:r>
-              <a:rPr sz="1600">
-                <a:solidFill>
-                  <a:srgbClr val="DCDCDC"/>
-                </a:solidFill>
-                <a:latin typeface="Consolas"/>
-              </a:rPr>
-              <a:t> </a:t>
-            </a:r>
-            <a:r>
-              <a:rPr sz="1600">
-                <a:solidFill>
-                  <a:srgbClr val="DCDCDC"/>
-                </a:solidFill>
-                <a:latin typeface="Consolas"/>
-              </a:rPr>
-              <a:t>other</a:t>
-            </a:r>
-            <a:r>
-              <a:rPr sz="1600">
-                <a:solidFill>
-                  <a:srgbClr val="DCDCDC"/>
-                </a:solidFill>
-                <a:latin typeface="Consolas"/>
-              </a:rPr>
-              <a:t>:</a:t>
-            </a:r>
-            <a:r>
-              <a:rPr sz="1600">
-                <a:solidFill>
-                  <a:srgbClr val="DCDCDC"/>
-                </a:solidFill>
-                <a:latin typeface="Consolas"/>
-              </a:rPr>
-              <a:t> </a:t>
-            </a:r>
-            <a:r>
-              <a:rPr sz="1600">
-                <a:solidFill>
-                  <a:srgbClr val="C586C0"/>
-                </a:solidFill>
-                <a:latin typeface="Consolas"/>
-              </a:rPr>
-              <a:t>&amp;</a:t>
-            </a:r>
-            <a:r>
-              <a:rPr sz="1600">
-                <a:solidFill>
-                  <a:srgbClr val="4EC9B0"/>
-                </a:solidFill>
-                <a:latin typeface="Consolas"/>
-              </a:rPr>
-              <a:t>Self</a:t>
-            </a:r>
-            <a:r>
-              <a:rPr sz="1600">
-                <a:solidFill>
-                  <a:srgbClr val="DCDCDC"/>
-                </a:solidFill>
-                <a:latin typeface="Consolas"/>
-              </a:rPr>
-              <a:t>)</a:t>
-            </a:r>
-            <a:r>
-              <a:rPr sz="1600">
-                <a:solidFill>
-                  <a:srgbClr val="DCDCDC"/>
-                </a:solidFill>
-                <a:latin typeface="Consolas"/>
-              </a:rPr>
-              <a:t> </a:t>
-            </a:r>
-            <a:r>
-              <a:rPr sz="1600">
-                <a:solidFill>
-                  <a:srgbClr val="DCDCDC"/>
-                </a:solidFill>
-                <a:latin typeface="Consolas"/>
-              </a:rPr>
-              <a:t>-&gt;</a:t>
-            </a:r>
-            <a:r>
-              <a:rPr sz="1600">
-                <a:solidFill>
-                  <a:srgbClr val="DCDCDC"/>
-                </a:solidFill>
-                <a:latin typeface="Consolas"/>
-              </a:rPr>
-              <a:t> </a:t>
+              <a:t>        </a:t>
             </a:r>
             <a:r>
               <a:rPr sz="1600">
@@ -4970,70 +4547,25 @@
                 </a:solidFill>
                 <a:latin typeface="Consolas"/>
               </a:rPr>
-              <a:t>        </a:t>
-            </a:r>
-            <a:r>
-              <a:rPr sz="1600">
-                <a:solidFill>
-                  <a:srgbClr val="C586C0"/>
-                </a:solidFill>
-                <a:latin typeface="Consolas"/>
-              </a:rPr>
-              <a:t>let</a:t>
-            </a:r>
-            <a:r>
-              <a:rPr sz="1600">
-                <a:solidFill>
-                  <a:srgbClr val="DCDCDC"/>
-                </a:solidFill>
-                <a:latin typeface="Consolas"/>
-              </a:rPr>
-              <a:t> </a:t>
-            </a:r>
-            <a:r>
-              <a:rPr sz="1600">
-                <a:solidFill>
-                  <a:srgbClr val="C586C0"/>
-                </a:solidFill>
-                <a:latin typeface="Consolas"/>
-              </a:rPr>
-              <a:t>mut</a:t>
-            </a:r>
-            <a:r>
-              <a:rPr sz="1600">
-                <a:solidFill>
-                  <a:srgbClr val="DCDCDC"/>
-                </a:solidFill>
-                <a:latin typeface="Consolas"/>
-              </a:rPr>
-              <a:t> </a:t>
-            </a:r>
-            <a:r>
-              <a:rPr sz="1600">
-                <a:solidFill>
-                  <a:srgbClr val="DCDCDC"/>
-                </a:solidFill>
-                <a:latin typeface="Consolas"/>
-              </a:rPr>
-              <a:t>out</a:t>
-            </a:r>
-            <a:r>
-              <a:rPr sz="1600">
-                <a:solidFill>
-                  <a:srgbClr val="DCDCDC"/>
-                </a:solidFill>
-                <a:latin typeface="Consolas"/>
-              </a:rPr>
-              <a:t> </a:t>
-            </a:r>
-            <a:r>
-              <a:rPr sz="1600">
-                <a:solidFill>
-                  <a:srgbClr val="DCDCDC"/>
-                </a:solidFill>
-                <a:latin typeface="Consolas"/>
-              </a:rPr>
-              <a:t>=</a:t>
+              <a:t>            </a:t>
+            </a:r>
+            <a:r>
+              <a:rPr sz="1600">
+                <a:solidFill>
+                  <a:srgbClr val="DCDCDC"/>
+                </a:solidFill>
+                <a:latin typeface="Consolas"/>
+              </a:rPr>
+              <a:t>values</a:t>
+            </a:r>
+            <a:r>
+              <a:rPr sz="1600">
+                <a:solidFill>
+                  <a:srgbClr val="DCDCDC"/>
+                </a:solidFill>
+                <a:latin typeface="Consolas"/>
+              </a:rPr>
+              <a:t>:</a:t>
             </a:r>
             <a:r>
               <a:rPr sz="1600">
@@ -5051,7 +4583,7 @@
                 </a:solidFill>
                 <a:latin typeface="Consolas"/>
               </a:rPr>
-              <a:t>self</a:t>
+              <a:t>values</a:t>
             </a:r>
             <a:r>
               <a:rPr sz="1600">
@@ -5069,7 +4601,25 @@
                 </a:solidFill>
                 <a:latin typeface="Consolas"/>
               </a:rPr>
-              <a:t>values</a:t>
+              <a:t>iter</a:t>
+            </a:r>
+            <a:r>
+              <a:rPr sz="1600">
+                <a:solidFill>
+                  <a:srgbClr val="DCDCDC"/>
+                </a:solidFill>
+                <a:latin typeface="Consolas"/>
+              </a:rPr>
+              <a:t>(</a:t>
+            </a:r>
+            <a:r>
+              <a:rPr sz="1600">
+                <a:solidFill>
+                  <a:srgbClr val="DCDCDC"/>
+                </a:solidFill>
+                <a:latin typeface="Consolas"/>
+              </a:rPr>
+              <a:t>)</a:t>
             </a:r>
             <a:r>
               <a:rPr sz="1600">
@@ -5087,7 +4637,7 @@
                 </a:solidFill>
                 <a:latin typeface="Consolas"/>
               </a:rPr>
-              <a:t>clone</a:t>
+              <a:t>copied</a:t>
             </a:r>
             <a:r>
               <a:rPr sz="1600">
@@ -5114,7 +4664,43 @@
                 </a:solidFill>
                 <a:latin typeface="Consolas"/>
               </a:rPr>
-              <a:t>;</a:t>
+              <a:t>.</a:t>
+            </a:r>
+            <a:r>
+              <a:rPr sz="1600">
+                <a:solidFill>
+                  <a:srgbClr val="DCDCDC"/>
+                </a:solidFill>
+                <a:latin typeface="Consolas"/>
+              </a:rPr>
+              <a:t>collect</a:t>
+            </a:r>
+            <a:r>
+              <a:rPr sz="1600">
+                <a:solidFill>
+                  <a:srgbClr val="DCDCDC"/>
+                </a:solidFill>
+                <a:latin typeface="Consolas"/>
+              </a:rPr>
+              <a:t>(</a:t>
+            </a:r>
+            <a:r>
+              <a:rPr sz="1600">
+                <a:solidFill>
+                  <a:srgbClr val="DCDCDC"/>
+                </a:solidFill>
+                <a:latin typeface="Consolas"/>
+              </a:rPr>
+              <a:t>)</a:t>
+            </a:r>
+            <a:r>
+              <a:rPr sz="1600">
+                <a:solidFill>
+                  <a:srgbClr val="DCDCDC"/>
+                </a:solidFill>
+                <a:latin typeface="Consolas"/>
+              </a:rPr>
+              <a:t>,</a:t>
             </a:r>
           </a:p>
           <a:p>
@@ -5145,151 +4731,7 @@
                 </a:solidFill>
                 <a:latin typeface="Consolas"/>
               </a:rPr>
-              <a:t>out</a:t>
-            </a:r>
-            <a:r>
-              <a:rPr sz="1600">
-                <a:solidFill>
-                  <a:srgbClr val="DCDCDC"/>
-                </a:solidFill>
-                <a:latin typeface="Consolas"/>
-              </a:rPr>
-              <a:t>.</a:t>
-            </a:r>
-            <a:r>
-              <a:rPr sz="1600">
-                <a:solidFill>
-                  <a:srgbClr val="DCDCDC"/>
-                </a:solidFill>
-                <a:latin typeface="Consolas"/>
-              </a:rPr>
-              <a:t>extend</a:t>
-            </a:r>
-            <a:r>
-              <a:rPr sz="1600">
-                <a:solidFill>
-                  <a:srgbClr val="DCDCDC"/>
-                </a:solidFill>
-                <a:latin typeface="Consolas"/>
-              </a:rPr>
-              <a:t>(</a:t>
-            </a:r>
-            <a:r>
-              <a:rPr sz="1600">
-                <a:solidFill>
-                  <a:srgbClr val="DCDCDC"/>
-                </a:solidFill>
-                <a:latin typeface="Consolas"/>
-              </a:rPr>
-              <a:t>other</a:t>
-            </a:r>
-            <a:r>
-              <a:rPr sz="1600">
-                <a:solidFill>
-                  <a:srgbClr val="DCDCDC"/>
-                </a:solidFill>
-                <a:latin typeface="Consolas"/>
-              </a:rPr>
-              <a:t>.</a:t>
-            </a:r>
-            <a:r>
-              <a:rPr sz="1600">
-                <a:solidFill>
-                  <a:srgbClr val="DCDCDC"/>
-                </a:solidFill>
-                <a:latin typeface="Consolas"/>
-              </a:rPr>
-              <a:t>values</a:t>
-            </a:r>
-            <a:r>
-              <a:rPr sz="1600">
-                <a:solidFill>
-                  <a:srgbClr val="DCDCDC"/>
-                </a:solidFill>
-                <a:latin typeface="Consolas"/>
-              </a:rPr>
-              <a:t>.</a:t>
-            </a:r>
-            <a:r>
-              <a:rPr sz="1600">
-                <a:solidFill>
-                  <a:srgbClr val="DCDCDC"/>
-                </a:solidFill>
-                <a:latin typeface="Consolas"/>
-              </a:rPr>
-              <a:t>iter</a:t>
-            </a:r>
-            <a:r>
-              <a:rPr sz="1600">
-                <a:solidFill>
-                  <a:srgbClr val="DCDCDC"/>
-                </a:solidFill>
-                <a:latin typeface="Consolas"/>
-              </a:rPr>
-              <a:t>(</a:t>
-            </a:r>
-            <a:r>
-              <a:rPr sz="1600">
-                <a:solidFill>
-                  <a:srgbClr val="DCDCDC"/>
-                </a:solidFill>
-                <a:latin typeface="Consolas"/>
-              </a:rPr>
-              <a:t>)</a:t>
-            </a:r>
-            <a:r>
-              <a:rPr sz="1600">
-                <a:solidFill>
-                  <a:srgbClr val="DCDCDC"/>
-                </a:solidFill>
-                <a:latin typeface="Consolas"/>
-              </a:rPr>
-              <a:t>.</a:t>
-            </a:r>
-            <a:r>
-              <a:rPr sz="1600">
-                <a:solidFill>
-                  <a:srgbClr val="DCDCDC"/>
-                </a:solidFill>
-                <a:latin typeface="Consolas"/>
-              </a:rPr>
-              <a:t>copied</a:t>
-            </a:r>
-            <a:r>
-              <a:rPr sz="1600">
-                <a:solidFill>
-                  <a:srgbClr val="DCDCDC"/>
-                </a:solidFill>
-                <a:latin typeface="Consolas"/>
-              </a:rPr>
-              <a:t>(</a:t>
-            </a:r>
-            <a:r>
-              <a:rPr sz="1600">
-                <a:solidFill>
-                  <a:srgbClr val="DCDCDC"/>
-                </a:solidFill>
-                <a:latin typeface="Consolas"/>
-              </a:rPr>
-              <a:t>)</a:t>
-            </a:r>
-            <a:r>
-              <a:rPr sz="1600">
-                <a:solidFill>
-                  <a:srgbClr val="DCDCDC"/>
-                </a:solidFill>
-                <a:latin typeface="Consolas"/>
-              </a:rPr>
-              <a:t>)</a:t>
-            </a:r>
-            <a:r>
-              <a:rPr sz="1600">
-                <a:solidFill>
-                  <a:srgbClr val="DCDCDC"/>
-                </a:solidFill>
-                <a:latin typeface="Consolas"/>
-              </a:rPr>
-              <a:t>;</a:t>
+              <a:t>}</a:t>
             </a:r>
           </a:p>
           <a:p>
@@ -5311,88 +4753,7 @@
                 </a:solidFill>
                 <a:latin typeface="Consolas"/>
               </a:rPr>
-              <a:t>        </a:t>
-            </a:r>
-            <a:r>
-              <a:rPr sz="1600">
-                <a:solidFill>
-                  <a:srgbClr val="4EC9B0"/>
-                </a:solidFill>
-                <a:latin typeface="Consolas"/>
-              </a:rPr>
-              <a:t>Self</a:t>
-            </a:r>
-            <a:r>
-              <a:rPr sz="1600">
-                <a:solidFill>
-                  <a:srgbClr val="DCDCDC"/>
-                </a:solidFill>
-                <a:latin typeface="Consolas"/>
-              </a:rPr>
-              <a:t> </a:t>
-            </a:r>
-            <a:r>
-              <a:rPr sz="1600">
-                <a:solidFill>
-                  <a:srgbClr val="DCDCDC"/>
-                </a:solidFill>
-                <a:latin typeface="Consolas"/>
-              </a:rPr>
-              <a:t>{</a:t>
-            </a:r>
-            <a:r>
-              <a:rPr sz="1600">
-                <a:solidFill>
-                  <a:srgbClr val="DCDCDC"/>
-                </a:solidFill>
-                <a:latin typeface="Consolas"/>
-              </a:rPr>
-              <a:t> </a:t>
-            </a:r>
-            <a:r>
-              <a:rPr sz="1600">
-                <a:solidFill>
-                  <a:srgbClr val="DCDCDC"/>
-                </a:solidFill>
-                <a:latin typeface="Consolas"/>
-              </a:rPr>
-              <a:t>values</a:t>
-            </a:r>
-            <a:r>
-              <a:rPr sz="1600">
-                <a:solidFill>
-                  <a:srgbClr val="DCDCDC"/>
-                </a:solidFill>
-                <a:latin typeface="Consolas"/>
-              </a:rPr>
-              <a:t>:</a:t>
-            </a:r>
-            <a:r>
-              <a:rPr sz="1600">
-                <a:solidFill>
-                  <a:srgbClr val="DCDCDC"/>
-                </a:solidFill>
-                <a:latin typeface="Consolas"/>
-              </a:rPr>
-              <a:t> </a:t>
-            </a:r>
-            <a:r>
-              <a:rPr sz="1600">
-                <a:solidFill>
-                  <a:srgbClr val="4EC9B0"/>
-                </a:solidFill>
-                <a:latin typeface="Consolas"/>
-              </a:rPr>
-              <a:t>out</a:t>
-            </a:r>
-            <a:r>
-              <a:rPr sz="1600">
-                <a:solidFill>
-                  <a:srgbClr val="DCDCDC"/>
-                </a:solidFill>
-                <a:latin typeface="Consolas"/>
-              </a:rPr>
-              <a:t> </a:t>
+              <a:t>    </a:t>
             </a:r>
             <a:r>
               <a:rPr sz="1600">
@@ -5416,24 +4777,6 @@
                 <a:spcPts val="0"/>
               </a:spcAft>
             </a:pPr>
-            <a:r>
-              <a:rPr sz="1600">
-                <a:solidFill>
-                  <a:srgbClr val="DCDCDC"/>
-                </a:solidFill>
-                <a:latin typeface="Consolas"/>
-              </a:rPr>
-              <a:t>    </a:t>
-            </a:r>
-            <a:r>
-              <a:rPr sz="1600">
-                <a:solidFill>
-                  <a:srgbClr val="DCDCDC"/>
-                </a:solidFill>
-                <a:latin typeface="Consolas"/>
-              </a:rPr>
-              <a:t>}</a:t>
-            </a:r>
           </a:p>
           <a:p>
             <a:pPr>
@@ -5454,7 +4797,16 @@
                 </a:solidFill>
                 <a:latin typeface="Consolas"/>
               </a:rPr>
-              <a:t>}</a:t>
+              <a:t>    </a:t>
+            </a:r>
+            <a:r>
+              <a:rPr sz="1600">
+                <a:solidFill>
+                  <a:srgbClr val="6A9955"/>
+                </a:solidFill>
+                <a:latin typeface="Consolas"/>
+              </a:rPr>
+              <a:t>// Return a new set that is the union of two borrowed sets.</a:t>
             </a:r>
           </a:p>
         </p:txBody>
@@ -5537,8 +4889,8 @@
           <a:noFill/>
         </p:spPr>
         <p:txBody>
-          <a:bodyPr wrap="none">
-            <a:spAutoFit/>
+          <a:bodyPr wrap="square">
+            <a:noAutofit/>
           </a:bodyPr>
           <a:lstStyle/>
           <a:p>
@@ -5553,6 +4905,195 @@
                 <a:spcPts val="0"/>
               </a:spcAft>
             </a:pPr>
+            <a:r>
+              <a:rPr sz="1600">
+                <a:solidFill>
+                  <a:srgbClr val="DCDCDC"/>
+                </a:solidFill>
+                <a:latin typeface="Consolas"/>
+              </a:rPr>
+              <a:t>    </a:t>
+            </a:r>
+            <a:r>
+              <a:rPr sz="1600">
+                <a:solidFill>
+                  <a:srgbClr val="C586C0"/>
+                </a:solidFill>
+                <a:latin typeface="Consolas"/>
+              </a:rPr>
+              <a:t>fn</a:t>
+            </a:r>
+            <a:r>
+              <a:rPr sz="1600">
+                <a:solidFill>
+                  <a:srgbClr val="DCDCDC"/>
+                </a:solidFill>
+                <a:latin typeface="Consolas"/>
+              </a:rPr>
+              <a:t> </a:t>
+            </a:r>
+            <a:r>
+              <a:rPr sz="1600">
+                <a:solidFill>
+                  <a:srgbClr val="DCDCAA"/>
+                </a:solidFill>
+                <a:latin typeface="Consolas"/>
+              </a:rPr>
+              <a:t>union</a:t>
+            </a:r>
+            <a:r>
+              <a:rPr sz="1600">
+                <a:solidFill>
+                  <a:srgbClr val="DCDCDC"/>
+                </a:solidFill>
+                <a:latin typeface="Consolas"/>
+              </a:rPr>
+              <a:t>(</a:t>
+            </a:r>
+            <a:r>
+              <a:rPr sz="1600">
+                <a:solidFill>
+                  <a:srgbClr val="DCDCDC"/>
+                </a:solidFill>
+                <a:latin typeface="Consolas"/>
+              </a:rPr>
+              <a:t>&amp;</a:t>
+            </a:r>
+            <a:r>
+              <a:rPr sz="1600">
+                <a:solidFill>
+                  <a:srgbClr val="4EC9B0"/>
+                </a:solidFill>
+                <a:latin typeface="Consolas"/>
+              </a:rPr>
+              <a:t>self</a:t>
+            </a:r>
+            <a:r>
+              <a:rPr sz="1600">
+                <a:solidFill>
+                  <a:srgbClr val="DCDCDC"/>
+                </a:solidFill>
+                <a:latin typeface="Consolas"/>
+              </a:rPr>
+              <a:t>,</a:t>
+            </a:r>
+            <a:r>
+              <a:rPr sz="1600">
+                <a:solidFill>
+                  <a:srgbClr val="DCDCDC"/>
+                </a:solidFill>
+                <a:latin typeface="Consolas"/>
+              </a:rPr>
+              <a:t> </a:t>
+            </a:r>
+            <a:r>
+              <a:rPr sz="1600">
+                <a:solidFill>
+                  <a:srgbClr val="DCDCDC"/>
+                </a:solidFill>
+                <a:latin typeface="Consolas"/>
+              </a:rPr>
+              <a:t>other</a:t>
+            </a:r>
+            <a:r>
+              <a:rPr sz="1600">
+                <a:solidFill>
+                  <a:srgbClr val="DCDCDC"/>
+                </a:solidFill>
+                <a:latin typeface="Consolas"/>
+              </a:rPr>
+              <a:t>:</a:t>
+            </a:r>
+            <a:r>
+              <a:rPr sz="1600">
+                <a:solidFill>
+                  <a:srgbClr val="DCDCDC"/>
+                </a:solidFill>
+                <a:latin typeface="Consolas"/>
+              </a:rPr>
+              <a:t> </a:t>
+            </a:r>
+            <a:r>
+              <a:rPr sz="1600">
+                <a:solidFill>
+                  <a:srgbClr val="C586C0"/>
+                </a:solidFill>
+                <a:latin typeface="Consolas"/>
+              </a:rPr>
+              <a:t>&amp;</a:t>
+            </a:r>
+            <a:r>
+              <a:rPr sz="1600">
+                <a:solidFill>
+                  <a:srgbClr val="4EC9B0"/>
+                </a:solidFill>
+                <a:latin typeface="Consolas"/>
+              </a:rPr>
+              <a:t>Self</a:t>
+            </a:r>
+            <a:r>
+              <a:rPr sz="1600">
+                <a:solidFill>
+                  <a:srgbClr val="DCDCDC"/>
+                </a:solidFill>
+                <a:latin typeface="Consolas"/>
+              </a:rPr>
+              <a:t>)</a:t>
+            </a:r>
+            <a:r>
+              <a:rPr sz="1600">
+                <a:solidFill>
+                  <a:srgbClr val="DCDCDC"/>
+                </a:solidFill>
+                <a:latin typeface="Consolas"/>
+              </a:rPr>
+              <a:t> </a:t>
+            </a:r>
+            <a:r>
+              <a:rPr sz="1600">
+                <a:solidFill>
+                  <a:srgbClr val="DCDCDC"/>
+                </a:solidFill>
+                <a:latin typeface="Consolas"/>
+              </a:rPr>
+              <a:t>-&gt;</a:t>
+            </a:r>
+            <a:r>
+              <a:rPr sz="1600">
+                <a:solidFill>
+                  <a:srgbClr val="DCDCDC"/>
+                </a:solidFill>
+                <a:latin typeface="Consolas"/>
+              </a:rPr>
+              <a:t> </a:t>
+            </a:r>
+            <a:r>
+              <a:rPr sz="1600">
+                <a:solidFill>
+                  <a:srgbClr val="4EC9B0"/>
+                </a:solidFill>
+                <a:latin typeface="Consolas"/>
+              </a:rPr>
+              <a:t>Self</a:t>
+            </a:r>
+            <a:r>
+              <a:rPr sz="1600">
+                <a:solidFill>
+                  <a:srgbClr val="DCDCDC"/>
+                </a:solidFill>
+                <a:latin typeface="Consolas"/>
+              </a:rPr>
+              <a:t> </a:t>
+            </a:r>
+            <a:r>
+              <a:rPr sz="1600">
+                <a:solidFill>
+                  <a:srgbClr val="DCDCDC"/>
+                </a:solidFill>
+                <a:latin typeface="Consolas"/>
+              </a:rPr>
+              <a:t>{</a:t>
+            </a:r>
           </a:p>
           <a:p>
             <a:pPr>
@@ -5569,11 +5110,38 @@
             <a:r>
               <a:rPr sz="1600">
                 <a:solidFill>
-                  <a:srgbClr val="6A9955"/>
-                </a:solidFill>
-                <a:latin typeface="Consolas"/>
-              </a:rPr>
-              <a:t>// Borrowed blanket-impl variant: any iterator of &amp;RangeSetBlaze&lt;T&gt;</a:t>
+                  <a:srgbClr val="DCDCDC"/>
+                </a:solidFill>
+                <a:latin typeface="Consolas"/>
+              </a:rPr>
+              <a:t>        </a:t>
+            </a:r>
+            <a:r>
+              <a:rPr sz="1600">
+                <a:solidFill>
+                  <a:srgbClr val="4EC9B0"/>
+                </a:solidFill>
+                <a:latin typeface="Consolas"/>
+              </a:rPr>
+              <a:t>Self</a:t>
+            </a:r>
+            <a:r>
+              <a:rPr sz="1600">
+                <a:solidFill>
+                  <a:srgbClr val="DCDCDC"/>
+                </a:solidFill>
+                <a:latin typeface="Consolas"/>
+              </a:rPr>
+              <a:t> </a:t>
+            </a:r>
+            <a:r>
+              <a:rPr sz="1600">
+                <a:solidFill>
+                  <a:srgbClr val="DCDCDC"/>
+                </a:solidFill>
+                <a:latin typeface="Consolas"/>
+              </a:rPr>
+              <a:t>{</a:t>
             </a:r>
           </a:p>
           <a:p>
@@ -5591,11 +5159,218 @@
             <a:r>
               <a:rPr sz="1600">
                 <a:solidFill>
-                  <a:srgbClr val="6A9955"/>
-                </a:solidFill>
-                <a:latin typeface="Consolas"/>
-              </a:rPr>
-              <a:t>// automatically gains `union` without consuming sets.</a:t>
+                  <a:srgbClr val="DCDCDC"/>
+                </a:solidFill>
+                <a:latin typeface="Consolas"/>
+              </a:rPr>
+              <a:t>            </a:t>
+            </a:r>
+            <a:r>
+              <a:rPr sz="1600">
+                <a:solidFill>
+                  <a:srgbClr val="DCDCDC"/>
+                </a:solidFill>
+                <a:latin typeface="Consolas"/>
+              </a:rPr>
+              <a:t>values</a:t>
+            </a:r>
+            <a:r>
+              <a:rPr sz="1600">
+                <a:solidFill>
+                  <a:srgbClr val="DCDCDC"/>
+                </a:solidFill>
+                <a:latin typeface="Consolas"/>
+              </a:rPr>
+              <a:t>:</a:t>
+            </a:r>
+            <a:r>
+              <a:rPr sz="1600">
+                <a:solidFill>
+                  <a:srgbClr val="DCDCDC"/>
+                </a:solidFill>
+                <a:latin typeface="Consolas"/>
+              </a:rPr>
+              <a:t> </a:t>
+            </a:r>
+            <a:r>
+              <a:rPr sz="1600">
+                <a:solidFill>
+                  <a:srgbClr val="4EC9B0"/>
+                </a:solidFill>
+                <a:latin typeface="Consolas"/>
+              </a:rPr>
+              <a:t>self</a:t>
+            </a:r>
+            <a:r>
+              <a:rPr sz="1600">
+                <a:solidFill>
+                  <a:srgbClr val="DCDCDC"/>
+                </a:solidFill>
+                <a:latin typeface="Consolas"/>
+              </a:rPr>
+              <a:t>.</a:t>
+            </a:r>
+            <a:r>
+              <a:rPr sz="1600">
+                <a:solidFill>
+                  <a:srgbClr val="DCDCDC"/>
+                </a:solidFill>
+                <a:latin typeface="Consolas"/>
+              </a:rPr>
+              <a:t>values</a:t>
+            </a:r>
+            <a:r>
+              <a:rPr sz="1600">
+                <a:solidFill>
+                  <a:srgbClr val="DCDCDC"/>
+                </a:solidFill>
+                <a:latin typeface="Consolas"/>
+              </a:rPr>
+              <a:t>.</a:t>
+            </a:r>
+            <a:r>
+              <a:rPr sz="1600">
+                <a:solidFill>
+                  <a:srgbClr val="C586C0"/>
+                </a:solidFill>
+                <a:latin typeface="Consolas"/>
+              </a:rPr>
+              <a:t>union</a:t>
+            </a:r>
+            <a:r>
+              <a:rPr sz="1600">
+                <a:solidFill>
+                  <a:srgbClr val="DCDCDC"/>
+                </a:solidFill>
+                <a:latin typeface="Consolas"/>
+              </a:rPr>
+              <a:t>(</a:t>
+            </a:r>
+            <a:r>
+              <a:rPr sz="1600">
+                <a:solidFill>
+                  <a:srgbClr val="DCDCDC"/>
+                </a:solidFill>
+                <a:latin typeface="Consolas"/>
+              </a:rPr>
+              <a:t>&amp;</a:t>
+            </a:r>
+            <a:r>
+              <a:rPr sz="1600">
+                <a:solidFill>
+                  <a:srgbClr val="DCDCDC"/>
+                </a:solidFill>
+                <a:latin typeface="Consolas"/>
+              </a:rPr>
+              <a:t>other</a:t>
+            </a:r>
+            <a:r>
+              <a:rPr sz="1600">
+                <a:solidFill>
+                  <a:srgbClr val="DCDCDC"/>
+                </a:solidFill>
+                <a:latin typeface="Consolas"/>
+              </a:rPr>
+              <a:t>.</a:t>
+            </a:r>
+            <a:r>
+              <a:rPr sz="1600">
+                <a:solidFill>
+                  <a:srgbClr val="DCDCDC"/>
+                </a:solidFill>
+                <a:latin typeface="Consolas"/>
+              </a:rPr>
+              <a:t>values</a:t>
+            </a:r>
+            <a:r>
+              <a:rPr sz="1600">
+                <a:solidFill>
+                  <a:srgbClr val="DCDCDC"/>
+                </a:solidFill>
+                <a:latin typeface="Consolas"/>
+              </a:rPr>
+              <a:t>)</a:t>
+            </a:r>
+            <a:r>
+              <a:rPr sz="1600">
+                <a:solidFill>
+                  <a:srgbClr val="DCDCDC"/>
+                </a:solidFill>
+                <a:latin typeface="Consolas"/>
+              </a:rPr>
+              <a:t>.</a:t>
+            </a:r>
+            <a:r>
+              <a:rPr sz="1600">
+                <a:solidFill>
+                  <a:srgbClr val="DCDCDC"/>
+                </a:solidFill>
+                <a:latin typeface="Consolas"/>
+              </a:rPr>
+              <a:t>copied</a:t>
+            </a:r>
+            <a:r>
+              <a:rPr sz="1600">
+                <a:solidFill>
+                  <a:srgbClr val="DCDCDC"/>
+                </a:solidFill>
+                <a:latin typeface="Consolas"/>
+              </a:rPr>
+              <a:t>(</a:t>
+            </a:r>
+            <a:r>
+              <a:rPr sz="1600">
+                <a:solidFill>
+                  <a:srgbClr val="DCDCDC"/>
+                </a:solidFill>
+                <a:latin typeface="Consolas"/>
+              </a:rPr>
+              <a:t>)</a:t>
+            </a:r>
+            <a:r>
+              <a:rPr sz="1600">
+                <a:solidFill>
+                  <a:srgbClr val="DCDCDC"/>
+                </a:solidFill>
+                <a:latin typeface="Consolas"/>
+              </a:rPr>
+              <a:t>.</a:t>
+            </a:r>
+            <a:r>
+              <a:rPr sz="1600">
+                <a:solidFill>
+                  <a:srgbClr val="DCDCDC"/>
+                </a:solidFill>
+                <a:latin typeface="Consolas"/>
+              </a:rPr>
+              <a:t>collect</a:t>
+            </a:r>
+            <a:r>
+              <a:rPr sz="1600">
+                <a:solidFill>
+                  <a:srgbClr val="DCDCDC"/>
+                </a:solidFill>
+                <a:latin typeface="Consolas"/>
+              </a:rPr>
+              <a:t>(</a:t>
+            </a:r>
+            <a:r>
+              <a:rPr sz="1600">
+                <a:solidFill>
+                  <a:srgbClr val="DCDCDC"/>
+                </a:solidFill>
+                <a:latin typeface="Consolas"/>
+              </a:rPr>
+              <a:t>)</a:t>
+            </a:r>
+            <a:r>
+              <a:rPr sz="1600">
+                <a:solidFill>
+                  <a:srgbClr val="DCDCDC"/>
+                </a:solidFill>
+                <a:latin typeface="Consolas"/>
+              </a:rPr>
+              <a:t>,</a:t>
             </a:r>
           </a:p>
           <a:p>
@@ -5613,11 +5388,20 @@
             <a:r>
               <a:rPr sz="1600">
                 <a:solidFill>
-                  <a:srgbClr val="6A9955"/>
-                </a:solidFill>
-                <a:latin typeface="Consolas"/>
-              </a:rPr>
-              <a:t>//</a:t>
+                  <a:srgbClr val="DCDCDC"/>
+                </a:solidFill>
+                <a:latin typeface="Consolas"/>
+              </a:rPr>
+              <a:t>        </a:t>
+            </a:r>
+            <a:r>
+              <a:rPr sz="1600">
+                <a:solidFill>
+                  <a:srgbClr val="DCDCDC"/>
+                </a:solidFill>
+                <a:latin typeface="Consolas"/>
+              </a:rPr>
+              <a:t>}</a:t>
             </a:r>
           </a:p>
           <a:p>
@@ -5635,11 +5419,20 @@
             <a:r>
               <a:rPr sz="1600">
                 <a:solidFill>
-                  <a:srgbClr val="6A9955"/>
-                </a:solidFill>
-                <a:latin typeface="Consolas"/>
-              </a:rPr>
-              <a:t>// Faux-inheritance / "is-a" angle:</a:t>
+                  <a:srgbClr val="DCDCDC"/>
+                </a:solidFill>
+                <a:latin typeface="Consolas"/>
+              </a:rPr>
+              <a:t>    </a:t>
+            </a:r>
+            <a:r>
+              <a:rPr sz="1600">
+                <a:solidFill>
+                  <a:srgbClr val="DCDCDC"/>
+                </a:solidFill>
+                <a:latin typeface="Consolas"/>
+              </a:rPr>
+              <a:t>}</a:t>
             </a:r>
           </a:p>
           <a:p>
@@ -5654,15 +5447,6 @@
                 <a:spcPts val="0"/>
               </a:spcAft>
             </a:pPr>
-            <a:r>
-              <a:rPr sz="1600">
-                <a:solidFill>
-                  <a:srgbClr val="6A9955"/>
-                </a:solidFill>
-                <a:latin typeface="Consolas"/>
-              </a:rPr>
-              <a:t>// If a type `I` satisfies `IntoIterator&lt;Item = &amp;RangeSetBlaze&lt;T&gt;&gt;`,</a:t>
-            </a:r>
           </a:p>
           <a:p>
             <a:pPr>
@@ -5679,11 +5463,128 @@
             <a:r>
               <a:rPr sz="1600">
                 <a:solidFill>
-                  <a:srgbClr val="6A9955"/>
-                </a:solidFill>
-                <a:latin typeface="Consolas"/>
-              </a:rPr>
-              <a:t>// then `I` automatically "is a" `IntoIterableOfRangeSetRefs` and gets</a:t>
+                  <a:srgbClr val="DCDCDC"/>
+                </a:solidFill>
+                <a:latin typeface="Consolas"/>
+              </a:rPr>
+              <a:t>    </a:t>
+            </a:r>
+            <a:r>
+              <a:rPr sz="1600">
+                <a:solidFill>
+                  <a:srgbClr val="C586C0"/>
+                </a:solidFill>
+                <a:latin typeface="Consolas"/>
+              </a:rPr>
+              <a:t>fn</a:t>
+            </a:r>
+            <a:r>
+              <a:rPr sz="1600">
+                <a:solidFill>
+                  <a:srgbClr val="DCDCDC"/>
+                </a:solidFill>
+                <a:latin typeface="Consolas"/>
+              </a:rPr>
+              <a:t> </a:t>
+            </a:r>
+            <a:r>
+              <a:rPr sz="1600">
+                <a:solidFill>
+                  <a:srgbClr val="DCDCAA"/>
+                </a:solidFill>
+                <a:latin typeface="Consolas"/>
+              </a:rPr>
+              <a:t>is_empty</a:t>
+            </a:r>
+            <a:r>
+              <a:rPr sz="1600">
+                <a:solidFill>
+                  <a:srgbClr val="DCDCDC"/>
+                </a:solidFill>
+                <a:latin typeface="Consolas"/>
+              </a:rPr>
+              <a:t>(</a:t>
+            </a:r>
+            <a:r>
+              <a:rPr sz="1600">
+                <a:solidFill>
+                  <a:srgbClr val="DCDCDC"/>
+                </a:solidFill>
+                <a:latin typeface="Consolas"/>
+              </a:rPr>
+              <a:t>&amp;</a:t>
+            </a:r>
+            <a:r>
+              <a:rPr sz="1600">
+                <a:solidFill>
+                  <a:srgbClr val="4EC9B0"/>
+                </a:solidFill>
+                <a:latin typeface="Consolas"/>
+              </a:rPr>
+              <a:t>self</a:t>
+            </a:r>
+            <a:r>
+              <a:rPr sz="1600">
+                <a:solidFill>
+                  <a:srgbClr val="DCDCDC"/>
+                </a:solidFill>
+                <a:latin typeface="Consolas"/>
+              </a:rPr>
+              <a:t>)</a:t>
+            </a:r>
+            <a:r>
+              <a:rPr sz="1600">
+                <a:solidFill>
+                  <a:srgbClr val="DCDCDC"/>
+                </a:solidFill>
+                <a:latin typeface="Consolas"/>
+              </a:rPr>
+              <a:t> </a:t>
+            </a:r>
+            <a:r>
+              <a:rPr sz="1600">
+                <a:solidFill>
+                  <a:srgbClr val="DCDCDC"/>
+                </a:solidFill>
+                <a:latin typeface="Consolas"/>
+              </a:rPr>
+              <a:t>-&gt;</a:t>
+            </a:r>
+            <a:r>
+              <a:rPr sz="1600">
+                <a:solidFill>
+                  <a:srgbClr val="DCDCDC"/>
+                </a:solidFill>
+                <a:latin typeface="Consolas"/>
+              </a:rPr>
+              <a:t> </a:t>
+            </a:r>
+            <a:r>
+              <a:rPr sz="1600">
+                <a:solidFill>
+                  <a:srgbClr val="C586C0"/>
+                </a:solidFill>
+                <a:latin typeface="Consolas"/>
+              </a:rPr>
+              <a:t>bool</a:t>
+            </a:r>
+            <a:r>
+              <a:rPr sz="1600">
+                <a:solidFill>
+                  <a:srgbClr val="DCDCDC"/>
+                </a:solidFill>
+                <a:latin typeface="Consolas"/>
+              </a:rPr>
+              <a:t> </a:t>
+            </a:r>
+            <a:r>
+              <a:rPr sz="1600">
+                <a:solidFill>
+                  <a:srgbClr val="DCDCDC"/>
+                </a:solidFill>
+                <a:latin typeface="Consolas"/>
+              </a:rPr>
+              <a:t>{</a:t>
             </a:r>
           </a:p>
           <a:p>
@@ -5701,11 +5602,74 @@
             <a:r>
               <a:rPr sz="1600">
                 <a:solidFill>
-                  <a:srgbClr val="6A9955"/>
-                </a:solidFill>
-                <a:latin typeface="Consolas"/>
-              </a:rPr>
-              <a:t>// the `union` method with no per-type impl.</a:t>
+                  <a:srgbClr val="DCDCDC"/>
+                </a:solidFill>
+                <a:latin typeface="Consolas"/>
+              </a:rPr>
+              <a:t>        </a:t>
+            </a:r>
+            <a:r>
+              <a:rPr sz="1600">
+                <a:solidFill>
+                  <a:srgbClr val="4EC9B0"/>
+                </a:solidFill>
+                <a:latin typeface="Consolas"/>
+              </a:rPr>
+              <a:t>self</a:t>
+            </a:r>
+            <a:r>
+              <a:rPr sz="1600">
+                <a:solidFill>
+                  <a:srgbClr val="DCDCDC"/>
+                </a:solidFill>
+                <a:latin typeface="Consolas"/>
+              </a:rPr>
+              <a:t>.</a:t>
+            </a:r>
+            <a:r>
+              <a:rPr sz="1600">
+                <a:solidFill>
+                  <a:srgbClr val="DCDCDC"/>
+                </a:solidFill>
+                <a:latin typeface="Consolas"/>
+              </a:rPr>
+              <a:t>values</a:t>
+            </a:r>
+            <a:r>
+              <a:rPr sz="1600">
+                <a:solidFill>
+                  <a:srgbClr val="DCDCDC"/>
+                </a:solidFill>
+                <a:latin typeface="Consolas"/>
+              </a:rPr>
+              <a:t>.</a:t>
+            </a:r>
+            <a:r>
+              <a:rPr sz="1600">
+                <a:solidFill>
+                  <a:srgbClr val="DCDCDC"/>
+                </a:solidFill>
+                <a:latin typeface="Consolas"/>
+              </a:rPr>
+              <a:t>is_empty</a:t>
+            </a:r>
+            <a:r>
+              <a:rPr sz="1600">
+                <a:solidFill>
+                  <a:srgbClr val="DCDCDC"/>
+                </a:solidFill>
+                <a:latin typeface="Consolas"/>
+              </a:rPr>
+              <a:t>(</a:t>
+            </a:r>
+            <a:r>
+              <a:rPr sz="1600">
+                <a:solidFill>
+                  <a:srgbClr val="DCDCDC"/>
+                </a:solidFill>
+                <a:latin typeface="Consolas"/>
+              </a:rPr>
+              <a:t>)</a:t>
             </a:r>
           </a:p>
           <a:p>
@@ -5723,335 +5687,20 @@
             <a:r>
               <a:rPr sz="1600">
                 <a:solidFill>
-                  <a:srgbClr val="C586C0"/>
-                </a:solidFill>
-                <a:latin typeface="Consolas"/>
-              </a:rPr>
-              <a:t>trait</a:t>
-            </a:r>
-            <a:r>
-              <a:rPr sz="1600">
-                <a:solidFill>
-                  <a:srgbClr val="DCDCDC"/>
-                </a:solidFill>
-                <a:latin typeface="Consolas"/>
-              </a:rPr>
-              <a:t> </a:t>
-            </a:r>
-            <a:r>
-              <a:rPr sz="1600">
-                <a:solidFill>
-                  <a:srgbClr val="DCDCDC"/>
-                </a:solidFill>
-                <a:latin typeface="Consolas"/>
-              </a:rPr>
-              <a:t>IntoIterableOfRangeSetRefs</a:t>
-            </a:r>
-            <a:r>
-              <a:rPr sz="1600">
-                <a:solidFill>
-                  <a:srgbClr val="DCDCDC"/>
-                </a:solidFill>
-                <a:latin typeface="Consolas"/>
-              </a:rPr>
-              <a:t>&lt;</a:t>
-            </a:r>
-            <a:r>
-              <a:rPr sz="1600">
-                <a:solidFill>
-                  <a:srgbClr val="DCDCDC"/>
-                </a:solidFill>
-                <a:latin typeface="Consolas"/>
-              </a:rPr>
-              <a:t>'</a:t>
-            </a:r>
-            <a:r>
-              <a:rPr sz="1600">
-                <a:solidFill>
-                  <a:srgbClr val="DCDCDC"/>
-                </a:solidFill>
-                <a:latin typeface="Consolas"/>
-              </a:rPr>
-              <a:t>a</a:t>
-            </a:r>
-            <a:r>
-              <a:rPr sz="1600">
-                <a:solidFill>
-                  <a:srgbClr val="DCDCDC"/>
-                </a:solidFill>
-                <a:latin typeface="Consolas"/>
-              </a:rPr>
-              <a:t>,</a:t>
-            </a:r>
-            <a:r>
-              <a:rPr sz="1600">
-                <a:solidFill>
-                  <a:srgbClr val="DCDCDC"/>
-                </a:solidFill>
-                <a:latin typeface="Consolas"/>
-              </a:rPr>
-              <a:t> </a:t>
-            </a:r>
-            <a:r>
-              <a:rPr sz="1600">
-                <a:solidFill>
-                  <a:srgbClr val="DCDCDC"/>
-                </a:solidFill>
-                <a:latin typeface="Consolas"/>
-              </a:rPr>
-              <a:t>T</a:t>
-            </a:r>
-            <a:r>
-              <a:rPr sz="1600">
-                <a:solidFill>
-                  <a:srgbClr val="DCDCDC"/>
-                </a:solidFill>
-                <a:latin typeface="Consolas"/>
-              </a:rPr>
-              <a:t>:</a:t>
-            </a:r>
-            <a:r>
-              <a:rPr sz="1600">
-                <a:solidFill>
-                  <a:srgbClr val="DCDCDC"/>
-                </a:solidFill>
-                <a:latin typeface="Consolas"/>
-              </a:rPr>
-              <a:t> </a:t>
-            </a:r>
-            <a:r>
-              <a:rPr sz="1600">
-                <a:solidFill>
-                  <a:srgbClr val="DCDCDC"/>
-                </a:solidFill>
-                <a:latin typeface="Consolas"/>
-              </a:rPr>
-              <a:t>'</a:t>
-            </a:r>
-            <a:r>
-              <a:rPr sz="1600">
-                <a:solidFill>
-                  <a:srgbClr val="DCDCDC"/>
-                </a:solidFill>
-                <a:latin typeface="Consolas"/>
-              </a:rPr>
-              <a:t>a</a:t>
-            </a:r>
-            <a:r>
-              <a:rPr sz="1600">
-                <a:solidFill>
-                  <a:srgbClr val="DCDCDC"/>
-                </a:solidFill>
-                <a:latin typeface="Consolas"/>
-              </a:rPr>
-              <a:t>&gt;</a:t>
-            </a:r>
-            <a:r>
-              <a:rPr sz="1600">
-                <a:solidFill>
-                  <a:srgbClr val="DCDCDC"/>
-                </a:solidFill>
-                <a:latin typeface="Consolas"/>
-              </a:rPr>
-              <a:t>:</a:t>
-            </a:r>
-            <a:r>
-              <a:rPr sz="1600">
-                <a:solidFill>
-                  <a:srgbClr val="DCDCDC"/>
-                </a:solidFill>
-                <a:latin typeface="Consolas"/>
-              </a:rPr>
-              <a:t> </a:t>
-            </a:r>
-            <a:r>
-              <a:rPr sz="1600">
-                <a:solidFill>
-                  <a:srgbClr val="4EC9B0"/>
-                </a:solidFill>
-                <a:latin typeface="Consolas"/>
-              </a:rPr>
-              <a:t>IntoIterator</a:t>
-            </a:r>
-            <a:r>
-              <a:rPr sz="1600">
-                <a:solidFill>
-                  <a:srgbClr val="DCDCDC"/>
-                </a:solidFill>
-                <a:latin typeface="Consolas"/>
-              </a:rPr>
-              <a:t>&lt;</a:t>
-            </a:r>
-            <a:r>
-              <a:rPr sz="1600">
-                <a:solidFill>
-                  <a:srgbClr val="DCDCDC"/>
-                </a:solidFill>
-                <a:latin typeface="Consolas"/>
-              </a:rPr>
-              <a:t>Item</a:t>
-            </a:r>
-            <a:r>
-              <a:rPr sz="1600">
-                <a:solidFill>
-                  <a:srgbClr val="DCDCDC"/>
-                </a:solidFill>
-                <a:latin typeface="Consolas"/>
-              </a:rPr>
-              <a:t> </a:t>
-            </a:r>
-            <a:r>
-              <a:rPr sz="1600">
-                <a:solidFill>
-                  <a:srgbClr val="DCDCDC"/>
-                </a:solidFill>
-                <a:latin typeface="Consolas"/>
-              </a:rPr>
-              <a:t>=</a:t>
-            </a:r>
-            <a:r>
-              <a:rPr sz="1600">
-                <a:solidFill>
-                  <a:srgbClr val="DCDCDC"/>
-                </a:solidFill>
-                <a:latin typeface="Consolas"/>
-              </a:rPr>
-              <a:t> </a:t>
-            </a:r>
-            <a:r>
-              <a:rPr sz="1600">
-                <a:solidFill>
-                  <a:srgbClr val="DCDCDC"/>
-                </a:solidFill>
-                <a:latin typeface="Consolas"/>
-              </a:rPr>
-              <a:t>&amp;</a:t>
-            </a:r>
-            <a:r>
-              <a:rPr sz="1600">
-                <a:solidFill>
-                  <a:srgbClr val="DCDCDC"/>
-                </a:solidFill>
-                <a:latin typeface="Consolas"/>
-              </a:rPr>
-              <a:t>'</a:t>
-            </a:r>
-            <a:r>
-              <a:rPr sz="1600">
-                <a:solidFill>
-                  <a:srgbClr val="DCDCDC"/>
-                </a:solidFill>
-                <a:latin typeface="Consolas"/>
-              </a:rPr>
-              <a:t>a</a:t>
-            </a:r>
-            <a:r>
-              <a:rPr sz="1600">
-                <a:solidFill>
-                  <a:srgbClr val="DCDCDC"/>
-                </a:solidFill>
-                <a:latin typeface="Consolas"/>
-              </a:rPr>
-              <a:t> </a:t>
-            </a:r>
-            <a:r>
-              <a:rPr sz="1600">
-                <a:solidFill>
-                  <a:srgbClr val="DCDCDC"/>
-                </a:solidFill>
-                <a:latin typeface="Consolas"/>
-              </a:rPr>
-              <a:t>RangeSetBlaze</a:t>
-            </a:r>
-            <a:r>
-              <a:rPr sz="1600">
-                <a:solidFill>
-                  <a:srgbClr val="DCDCDC"/>
-                </a:solidFill>
-                <a:latin typeface="Consolas"/>
-              </a:rPr>
-              <a:t>&lt;</a:t>
-            </a:r>
-            <a:r>
-              <a:rPr sz="1600">
-                <a:solidFill>
-                  <a:srgbClr val="DCDCDC"/>
-                </a:solidFill>
-                <a:latin typeface="Consolas"/>
-              </a:rPr>
-              <a:t>T</a:t>
-            </a:r>
-            <a:r>
-              <a:rPr sz="1600">
-                <a:solidFill>
-                  <a:srgbClr val="DCDCDC"/>
-                </a:solidFill>
-                <a:latin typeface="Consolas"/>
-              </a:rPr>
-              <a:t>&gt;</a:t>
-            </a:r>
-            <a:r>
-              <a:rPr sz="1600">
-                <a:solidFill>
-                  <a:srgbClr val="DCDCDC"/>
-                </a:solidFill>
-                <a:latin typeface="Consolas"/>
-              </a:rPr>
-              <a:t>&gt;</a:t>
-            </a:r>
-            <a:r>
-              <a:rPr sz="1600">
-                <a:solidFill>
-                  <a:srgbClr val="DCDCDC"/>
-                </a:solidFill>
-                <a:latin typeface="Consolas"/>
-              </a:rPr>
-              <a:t> </a:t>
-            </a:r>
-            <a:r>
-              <a:rPr sz="1600">
-                <a:solidFill>
-                  <a:srgbClr val="DCDCDC"/>
-                </a:solidFill>
-                <a:latin typeface="Consolas"/>
-              </a:rPr>
-              <a:t>+</a:t>
-            </a:r>
-            <a:r>
-              <a:rPr sz="1600">
-                <a:solidFill>
-                  <a:srgbClr val="DCDCDC"/>
-                </a:solidFill>
-                <a:latin typeface="Consolas"/>
-              </a:rPr>
-              <a:t> </a:t>
-            </a:r>
-            <a:r>
-              <a:rPr sz="1600">
-                <a:solidFill>
-                  <a:srgbClr val="4EC9B0"/>
-                </a:solidFill>
-                <a:latin typeface="Consolas"/>
-              </a:rPr>
-              <a:t>Sized</a:t>
-            </a:r>
-            <a:r>
-              <a:rPr sz="1600">
-                <a:solidFill>
-                  <a:srgbClr val="DCDCDC"/>
-                </a:solidFill>
-                <a:latin typeface="Consolas"/>
-              </a:rPr>
-              <a:t> </a:t>
-            </a:r>
-            <a:r>
-              <a:rPr sz="1600">
-                <a:solidFill>
-                  <a:srgbClr val="DCDCDC"/>
-                </a:solidFill>
-                <a:latin typeface="Consolas"/>
-              </a:rPr>
-              <a:t>{</a:t>
+                  <a:srgbClr val="DCDCDC"/>
+                </a:solidFill>
+                <a:latin typeface="Consolas"/>
+              </a:rPr>
+              <a:t>    </a:t>
+            </a:r>
+            <a:r>
+              <a:rPr sz="1600">
+                <a:solidFill>
+                  <a:srgbClr val="DCDCDC"/>
+                </a:solidFill>
+                <a:latin typeface="Consolas"/>
+              </a:rPr>
+              <a:t>}</a:t>
             </a:r>
           </a:p>
           <a:p>
@@ -6073,124 +5722,7 @@
                 </a:solidFill>
                 <a:latin typeface="Consolas"/>
               </a:rPr>
-              <a:t>    </a:t>
-            </a:r>
-            <a:r>
-              <a:rPr sz="1600">
-                <a:solidFill>
-                  <a:srgbClr val="C586C0"/>
-                </a:solidFill>
-                <a:latin typeface="Consolas"/>
-              </a:rPr>
-              <a:t>fn</a:t>
-            </a:r>
-            <a:r>
-              <a:rPr sz="1600">
-                <a:solidFill>
-                  <a:srgbClr val="DCDCDC"/>
-                </a:solidFill>
-                <a:latin typeface="Consolas"/>
-              </a:rPr>
-              <a:t> </a:t>
-            </a:r>
-            <a:r>
-              <a:rPr sz="1600">
-                <a:solidFill>
-                  <a:srgbClr val="DCDCAA"/>
-                </a:solidFill>
-                <a:latin typeface="Consolas"/>
-              </a:rPr>
-              <a:t>union</a:t>
-            </a:r>
-            <a:r>
-              <a:rPr sz="1600">
-                <a:solidFill>
-                  <a:srgbClr val="DCDCDC"/>
-                </a:solidFill>
-                <a:latin typeface="Consolas"/>
-              </a:rPr>
-              <a:t>(</a:t>
-            </a:r>
-            <a:r>
-              <a:rPr sz="1600">
-                <a:solidFill>
-                  <a:srgbClr val="4EC9B0"/>
-                </a:solidFill>
-                <a:latin typeface="Consolas"/>
-              </a:rPr>
-              <a:t>self</a:t>
-            </a:r>
-            <a:r>
-              <a:rPr sz="1600">
-                <a:solidFill>
-                  <a:srgbClr val="DCDCDC"/>
-                </a:solidFill>
-                <a:latin typeface="Consolas"/>
-              </a:rPr>
-              <a:t>)</a:t>
-            </a:r>
-            <a:r>
-              <a:rPr sz="1600">
-                <a:solidFill>
-                  <a:srgbClr val="DCDCDC"/>
-                </a:solidFill>
-                <a:latin typeface="Consolas"/>
-              </a:rPr>
-              <a:t> </a:t>
-            </a:r>
-            <a:r>
-              <a:rPr sz="1600">
-                <a:solidFill>
-                  <a:srgbClr val="DCDCDC"/>
-                </a:solidFill>
-                <a:latin typeface="Consolas"/>
-              </a:rPr>
-              <a:t>-&gt;</a:t>
-            </a:r>
-            <a:r>
-              <a:rPr sz="1600">
-                <a:solidFill>
-                  <a:srgbClr val="DCDCDC"/>
-                </a:solidFill>
-                <a:latin typeface="Consolas"/>
-              </a:rPr>
-              <a:t> </a:t>
-            </a:r>
-            <a:r>
-              <a:rPr sz="1600">
-                <a:solidFill>
-                  <a:srgbClr val="4EC9B0"/>
-                </a:solidFill>
-                <a:latin typeface="Consolas"/>
-              </a:rPr>
-              <a:t>RangeSetBlaze</a:t>
-            </a:r>
-            <a:r>
-              <a:rPr sz="1600">
-                <a:solidFill>
-                  <a:srgbClr val="DCDCDC"/>
-                </a:solidFill>
-                <a:latin typeface="Consolas"/>
-              </a:rPr>
-              <a:t>&lt;</a:t>
-            </a:r>
-            <a:r>
-              <a:rPr sz="1600">
-                <a:solidFill>
-                  <a:srgbClr val="DCDCDC"/>
-                </a:solidFill>
-                <a:latin typeface="Consolas"/>
-              </a:rPr>
-              <a:t>T</a:t>
-            </a:r>
-            <a:r>
-              <a:rPr sz="1600">
-                <a:solidFill>
-                  <a:srgbClr val="DCDCDC"/>
-                </a:solidFill>
-                <a:latin typeface="Consolas"/>
-              </a:rPr>
-              <a:t>&gt;</a:t>
+              <a:t>}</a:t>
             </a:r>
           </a:p>
           <a:p>
@@ -6205,24 +5737,6 @@
                 <a:spcPts val="0"/>
               </a:spcAft>
             </a:pPr>
-            <a:r>
-              <a:rPr sz="1600">
-                <a:solidFill>
-                  <a:srgbClr val="DCDCDC"/>
-                </a:solidFill>
-                <a:latin typeface="Consolas"/>
-              </a:rPr>
-              <a:t>    </a:t>
-            </a:r>
-            <a:r>
-              <a:rPr sz="1600">
-                <a:solidFill>
-                  <a:srgbClr val="C586C0"/>
-                </a:solidFill>
-                <a:latin typeface="Consolas"/>
-              </a:rPr>
-              <a:t>where</a:t>
-            </a:r>
           </a:p>
           <a:p>
             <a:pPr>
@@ -6239,137 +5753,11 @@
             <a:r>
               <a:rPr sz="1600">
                 <a:solidFill>
-                  <a:srgbClr val="DCDCDC"/>
-                </a:solidFill>
-                <a:latin typeface="Consolas"/>
-              </a:rPr>
-              <a:t>        </a:t>
-            </a:r>
-            <a:r>
-              <a:rPr sz="1600">
-                <a:solidFill>
-                  <a:srgbClr val="DCDCDC"/>
-                </a:solidFill>
-                <a:latin typeface="Consolas"/>
-              </a:rPr>
-              <a:t>T</a:t>
-            </a:r>
-            <a:r>
-              <a:rPr sz="1600">
-                <a:solidFill>
-                  <a:srgbClr val="DCDCDC"/>
-                </a:solidFill>
-                <a:latin typeface="Consolas"/>
-              </a:rPr>
-              <a:t>:</a:t>
-            </a:r>
-            <a:r>
-              <a:rPr sz="1600">
-                <a:solidFill>
-                  <a:srgbClr val="DCDCDC"/>
-                </a:solidFill>
-                <a:latin typeface="Consolas"/>
-              </a:rPr>
-              <a:t> </a:t>
-            </a:r>
-            <a:r>
-              <a:rPr sz="1600">
-                <a:solidFill>
-                  <a:srgbClr val="4EC9B0"/>
-                </a:solidFill>
-                <a:latin typeface="Consolas"/>
-              </a:rPr>
-              <a:t>Ord</a:t>
-            </a:r>
-            <a:r>
-              <a:rPr sz="1600">
-                <a:solidFill>
-                  <a:srgbClr val="DCDCDC"/>
-                </a:solidFill>
-                <a:latin typeface="Consolas"/>
-              </a:rPr>
-              <a:t> </a:t>
-            </a:r>
-            <a:r>
-              <a:rPr sz="1600">
-                <a:solidFill>
-                  <a:srgbClr val="DCDCDC"/>
-                </a:solidFill>
-                <a:latin typeface="Consolas"/>
-              </a:rPr>
-              <a:t>+</a:t>
-            </a:r>
-            <a:r>
-              <a:rPr sz="1600">
-                <a:solidFill>
-                  <a:srgbClr val="DCDCDC"/>
-                </a:solidFill>
-                <a:latin typeface="Consolas"/>
-              </a:rPr>
-              <a:t> </a:t>
-            </a:r>
-            <a:r>
-              <a:rPr sz="1600">
-                <a:solidFill>
-                  <a:srgbClr val="4EC9B0"/>
-                </a:solidFill>
-                <a:latin typeface="Consolas"/>
-              </a:rPr>
-              <a:t>Copy</a:t>
-            </a:r>
-            <a:r>
-              <a:rPr sz="1600">
-                <a:solidFill>
-                  <a:srgbClr val="DCDCDC"/>
-                </a:solidFill>
-                <a:latin typeface="Consolas"/>
-              </a:rPr>
-              <a:t> </a:t>
-            </a:r>
-            <a:r>
-              <a:rPr sz="1600">
-                <a:solidFill>
-                  <a:srgbClr val="DCDCDC"/>
-                </a:solidFill>
-                <a:latin typeface="Consolas"/>
-              </a:rPr>
-              <a:t>+</a:t>
-            </a:r>
-            <a:r>
-              <a:rPr sz="1600">
-                <a:solidFill>
-                  <a:srgbClr val="DCDCDC"/>
-                </a:solidFill>
-                <a:latin typeface="Consolas"/>
-              </a:rPr>
-              <a:t> </a:t>
-            </a:r>
-            <a:r>
-              <a:rPr sz="1600">
-                <a:solidFill>
-                  <a:srgbClr val="DCDCDC"/>
-                </a:solidFill>
-                <a:latin typeface="Consolas"/>
-              </a:rPr>
-              <a:t>'</a:t>
-            </a:r>
-            <a:r>
-              <a:rPr sz="1600">
-                <a:solidFill>
-                  <a:srgbClr val="DCDCDC"/>
-                </a:solidFill>
-                <a:latin typeface="Consolas"/>
-              </a:rPr>
-              <a:t>a</a:t>
-            </a:r>
-            <a:r>
-              <a:rPr sz="1600">
-                <a:solidFill>
-                  <a:srgbClr val="DCDCDC"/>
-                </a:solidFill>
-                <a:latin typeface="Consolas"/>
-              </a:rPr>
-              <a:t>,</a:t>
+                  <a:srgbClr val="6A9955"/>
+                </a:solidFill>
+                <a:latin typeface="Consolas"/>
+              </a:rPr>
+              <a:t>// A RangeSetCollection is any type that can be turned into an iterator</a:t>
             </a:r>
           </a:p>
           <a:p>
@@ -6387,20 +5775,11 @@
             <a:r>
               <a:rPr sz="1600">
                 <a:solidFill>
-                  <a:srgbClr val="DCDCDC"/>
-                </a:solidFill>
-                <a:latin typeface="Consolas"/>
-              </a:rPr>
-              <a:t>    </a:t>
-            </a:r>
-            <a:r>
-              <a:rPr sz="1600">
-                <a:solidFill>
-                  <a:srgbClr val="DCDCDC"/>
-                </a:solidFill>
-                <a:latin typeface="Consolas"/>
-              </a:rPr>
-              <a:t>{</a:t>
+                  <a:srgbClr val="6A9955"/>
+                </a:solidFill>
+                <a:latin typeface="Consolas"/>
+              </a:rPr>
+              <a:t>// over borrowed RangeSetBlaze values.</a:t>
             </a:r>
           </a:p>
           <a:p>
@@ -6418,137 +5797,11 @@
             <a:r>
               <a:rPr sz="1600">
                 <a:solidFill>
-                  <a:srgbClr val="DCDCDC"/>
-                </a:solidFill>
-                <a:latin typeface="Consolas"/>
-              </a:rPr>
-              <a:t>        </a:t>
-            </a:r>
-            <a:r>
-              <a:rPr sz="1600">
-                <a:solidFill>
-                  <a:srgbClr val="C586C0"/>
-                </a:solidFill>
-                <a:latin typeface="Consolas"/>
-              </a:rPr>
-              <a:t>let</a:t>
-            </a:r>
-            <a:r>
-              <a:rPr sz="1600">
-                <a:solidFill>
-                  <a:srgbClr val="DCDCDC"/>
-                </a:solidFill>
-                <a:latin typeface="Consolas"/>
-              </a:rPr>
-              <a:t> </a:t>
-            </a:r>
-            <a:r>
-              <a:rPr sz="1600">
-                <a:solidFill>
-                  <a:srgbClr val="C586C0"/>
-                </a:solidFill>
-                <a:latin typeface="Consolas"/>
-              </a:rPr>
-              <a:t>mut</a:t>
-            </a:r>
-            <a:r>
-              <a:rPr sz="1600">
-                <a:solidFill>
-                  <a:srgbClr val="DCDCDC"/>
-                </a:solidFill>
-                <a:latin typeface="Consolas"/>
-              </a:rPr>
-              <a:t> </a:t>
-            </a:r>
-            <a:r>
-              <a:rPr sz="1600">
-                <a:solidFill>
-                  <a:srgbClr val="DCDCDC"/>
-                </a:solidFill>
-                <a:latin typeface="Consolas"/>
-              </a:rPr>
-              <a:t>result</a:t>
-            </a:r>
-            <a:r>
-              <a:rPr sz="1600">
-                <a:solidFill>
-                  <a:srgbClr val="DCDCDC"/>
-                </a:solidFill>
-                <a:latin typeface="Consolas"/>
-              </a:rPr>
-              <a:t> </a:t>
-            </a:r>
-            <a:r>
-              <a:rPr sz="1600">
-                <a:solidFill>
-                  <a:srgbClr val="DCDCDC"/>
-                </a:solidFill>
-                <a:latin typeface="Consolas"/>
-              </a:rPr>
-              <a:t>=</a:t>
-            </a:r>
-            <a:r>
-              <a:rPr sz="1600">
-                <a:solidFill>
-                  <a:srgbClr val="DCDCDC"/>
-                </a:solidFill>
-                <a:latin typeface="Consolas"/>
-              </a:rPr>
-              <a:t> </a:t>
-            </a:r>
-            <a:r>
-              <a:rPr sz="1600">
-                <a:solidFill>
-                  <a:srgbClr val="DCDCDC"/>
-                </a:solidFill>
-                <a:latin typeface="Consolas"/>
-              </a:rPr>
-              <a:t>RangeSetBlaze</a:t>
-            </a:r>
-            <a:r>
-              <a:rPr sz="1600">
-                <a:solidFill>
-                  <a:srgbClr val="DCDCDC"/>
-                </a:solidFill>
-                <a:latin typeface="Consolas"/>
-              </a:rPr>
-              <a:t>::</a:t>
-            </a:r>
-            <a:r>
-              <a:rPr sz="1600">
-                <a:solidFill>
-                  <a:srgbClr val="DCDCDC"/>
-                </a:solidFill>
-                <a:latin typeface="Consolas"/>
-              </a:rPr>
-              <a:t>new</a:t>
-            </a:r>
-            <a:r>
-              <a:rPr sz="1600">
-                <a:solidFill>
-                  <a:srgbClr val="DCDCDC"/>
-                </a:solidFill>
-                <a:latin typeface="Consolas"/>
-              </a:rPr>
-              <a:t>(</a:t>
-            </a:r>
-            <a:r>
-              <a:rPr sz="1600">
-                <a:solidFill>
-                  <a:srgbClr val="DCDCDC"/>
-                </a:solidFill>
-                <a:latin typeface="Consolas"/>
-              </a:rPr>
-              <a:t>)</a:t>
-            </a:r>
-            <a:r>
-              <a:rPr sz="1600">
-                <a:solidFill>
-                  <a:srgbClr val="DCDCDC"/>
-                </a:solidFill>
-                <a:latin typeface="Consolas"/>
-              </a:rPr>
-              <a:t>;</a:t>
+                  <a:srgbClr val="6A9955"/>
+                </a:solidFill>
+                <a:latin typeface="Consolas"/>
+              </a:rPr>
+              <a:t>//</a:t>
             </a:r>
           </a:p>
           <a:p>
@@ -6566,92 +5819,11 @@
             <a:r>
               <a:rPr sz="1600">
                 <a:solidFill>
-                  <a:srgbClr val="DCDCDC"/>
-                </a:solidFill>
-                <a:latin typeface="Consolas"/>
-              </a:rPr>
-              <a:t>        </a:t>
-            </a:r>
-            <a:r>
-              <a:rPr sz="1600">
-                <a:solidFill>
-                  <a:srgbClr val="C586C0"/>
-                </a:solidFill>
-                <a:latin typeface="Consolas"/>
-              </a:rPr>
-              <a:t>for</a:t>
-            </a:r>
-            <a:r>
-              <a:rPr sz="1600">
-                <a:solidFill>
-                  <a:srgbClr val="DCDCDC"/>
-                </a:solidFill>
-                <a:latin typeface="Consolas"/>
-              </a:rPr>
-              <a:t> </a:t>
-            </a:r>
-            <a:r>
-              <a:rPr sz="1600">
-                <a:solidFill>
-                  <a:srgbClr val="DCDCDC"/>
-                </a:solidFill>
-                <a:latin typeface="Consolas"/>
-              </a:rPr>
-              <a:t>set</a:t>
-            </a:r>
-            <a:r>
-              <a:rPr sz="1600">
-                <a:solidFill>
-                  <a:srgbClr val="DCDCDC"/>
-                </a:solidFill>
-                <a:latin typeface="Consolas"/>
-              </a:rPr>
-              <a:t> </a:t>
-            </a:r>
-            <a:r>
-              <a:rPr sz="1600">
-                <a:solidFill>
-                  <a:srgbClr val="C586C0"/>
-                </a:solidFill>
-                <a:latin typeface="Consolas"/>
-              </a:rPr>
-              <a:t>in</a:t>
-            </a:r>
-            <a:r>
-              <a:rPr sz="1600">
-                <a:solidFill>
-                  <a:srgbClr val="DCDCDC"/>
-                </a:solidFill>
-                <a:latin typeface="Consolas"/>
-              </a:rPr>
-              <a:t> </a:t>
-            </a:r>
-            <a:r>
-              <a:rPr sz="1600">
-                <a:solidFill>
-                  <a:srgbClr val="4EC9B0"/>
-                </a:solidFill>
-                <a:latin typeface="Consolas"/>
-              </a:rPr>
-              <a:t>self</a:t>
-            </a:r>
-            <a:r>
-              <a:rPr sz="1600">
-                <a:solidFill>
-                  <a:srgbClr val="DCDCDC"/>
-                </a:solidFill>
-                <a:latin typeface="Consolas"/>
-              </a:rPr>
-              <a:t> </a:t>
-            </a:r>
-            <a:r>
-              <a:rPr sz="1600">
-                <a:solidFill>
-                  <a:srgbClr val="DCDCDC"/>
-                </a:solidFill>
-                <a:latin typeface="Consolas"/>
-              </a:rPr>
-              <a:t>{</a:t>
+                  <a:srgbClr val="6A9955"/>
+                </a:solidFill>
+                <a:latin typeface="Consolas"/>
+              </a:rPr>
+              <a:t>// TECHNIQUE NAME: "blanket implementation".</a:t>
             </a:r>
           </a:p>
           <a:p>
@@ -6669,110 +5841,11 @@
             <a:r>
               <a:rPr sz="1600">
                 <a:solidFill>
-                  <a:srgbClr val="DCDCDC"/>
-                </a:solidFill>
-                <a:latin typeface="Consolas"/>
-              </a:rPr>
-              <a:t>            </a:t>
-            </a:r>
-            <a:r>
-              <a:rPr sz="1600">
-                <a:solidFill>
-                  <a:srgbClr val="DCDCDC"/>
-                </a:solidFill>
-                <a:latin typeface="Consolas"/>
-              </a:rPr>
-              <a:t>result</a:t>
-            </a:r>
-            <a:r>
-              <a:rPr sz="1600">
-                <a:solidFill>
-                  <a:srgbClr val="DCDCDC"/>
-                </a:solidFill>
-                <a:latin typeface="Consolas"/>
-              </a:rPr>
-              <a:t> </a:t>
-            </a:r>
-            <a:r>
-              <a:rPr sz="1600">
-                <a:solidFill>
-                  <a:srgbClr val="DCDCDC"/>
-                </a:solidFill>
-                <a:latin typeface="Consolas"/>
-              </a:rPr>
-              <a:t>=</a:t>
-            </a:r>
-            <a:r>
-              <a:rPr sz="1600">
-                <a:solidFill>
-                  <a:srgbClr val="DCDCDC"/>
-                </a:solidFill>
-                <a:latin typeface="Consolas"/>
-              </a:rPr>
-              <a:t> </a:t>
-            </a:r>
-            <a:r>
-              <a:rPr sz="1600">
-                <a:solidFill>
-                  <a:srgbClr val="DCDCDC"/>
-                </a:solidFill>
-                <a:latin typeface="Consolas"/>
-              </a:rPr>
-              <a:t>result</a:t>
-            </a:r>
-            <a:r>
-              <a:rPr sz="1600">
-                <a:solidFill>
-                  <a:srgbClr val="DCDCDC"/>
-                </a:solidFill>
-                <a:latin typeface="Consolas"/>
-              </a:rPr>
-              <a:t>.</a:t>
-            </a:r>
-            <a:r>
-              <a:rPr sz="1600">
-                <a:solidFill>
-                  <a:srgbClr val="C586C0"/>
-                </a:solidFill>
-                <a:latin typeface="Consolas"/>
-              </a:rPr>
-              <a:t>union</a:t>
-            </a:r>
-            <a:r>
-              <a:rPr sz="1600">
-                <a:solidFill>
-                  <a:srgbClr val="DCDCDC"/>
-                </a:solidFill>
-                <a:latin typeface="Consolas"/>
-              </a:rPr>
-              <a:t>(</a:t>
-            </a:r>
-            <a:r>
-              <a:rPr sz="1600">
-                <a:solidFill>
-                  <a:srgbClr val="DCDCDC"/>
-                </a:solidFill>
-                <a:latin typeface="Consolas"/>
-              </a:rPr>
-              <a:t>set</a:t>
-            </a:r>
-            <a:r>
-              <a:rPr sz="1600">
-                <a:solidFill>
-                  <a:srgbClr val="DCDCDC"/>
-                </a:solidFill>
-                <a:latin typeface="Consolas"/>
-              </a:rPr>
-              <a:t>)</a:t>
-            </a:r>
-            <a:r>
-              <a:rPr sz="1600">
-                <a:solidFill>
-                  <a:srgbClr val="DCDCDC"/>
-                </a:solidFill>
-                <a:latin typeface="Consolas"/>
-              </a:rPr>
-              <a:t>;</a:t>
+                  <a:srgbClr val="6A9955"/>
+                </a:solidFill>
+                <a:latin typeface="Consolas"/>
+              </a:rPr>
+              <a:t>// One impl applies to every type that matches the bound.</a:t>
             </a:r>
           </a:p>
           <a:p>
@@ -6790,20 +5863,209 @@
             <a:r>
               <a:rPr sz="1600">
                 <a:solidFill>
-                  <a:srgbClr val="DCDCDC"/>
-                </a:solidFill>
-                <a:latin typeface="Consolas"/>
-              </a:rPr>
-              <a:t>        </a:t>
-            </a:r>
-            <a:r>
-              <a:rPr sz="1600">
-                <a:solidFill>
-                  <a:srgbClr val="DCDCDC"/>
-                </a:solidFill>
-                <a:latin typeface="Consolas"/>
-              </a:rPr>
-              <a:t>}</a:t>
+                  <a:srgbClr val="C586C0"/>
+                </a:solidFill>
+                <a:latin typeface="Consolas"/>
+              </a:rPr>
+              <a:t>trait</a:t>
+            </a:r>
+            <a:r>
+              <a:rPr sz="1600">
+                <a:solidFill>
+                  <a:srgbClr val="DCDCDC"/>
+                </a:solidFill>
+                <a:latin typeface="Consolas"/>
+              </a:rPr>
+              <a:t> </a:t>
+            </a:r>
+            <a:r>
+              <a:rPr sz="1600">
+                <a:solidFill>
+                  <a:srgbClr val="DCDCDC"/>
+                </a:solidFill>
+                <a:latin typeface="Consolas"/>
+              </a:rPr>
+              <a:t>RangeSetCollection</a:t>
+            </a:r>
+            <a:r>
+              <a:rPr sz="1600">
+                <a:solidFill>
+                  <a:srgbClr val="DCDCDC"/>
+                </a:solidFill>
+                <a:latin typeface="Consolas"/>
+              </a:rPr>
+              <a:t>&lt;</a:t>
+            </a:r>
+            <a:r>
+              <a:rPr sz="1600">
+                <a:solidFill>
+                  <a:srgbClr val="DCDCDC"/>
+                </a:solidFill>
+                <a:latin typeface="Consolas"/>
+              </a:rPr>
+              <a:t>'</a:t>
+            </a:r>
+            <a:r>
+              <a:rPr sz="1600">
+                <a:solidFill>
+                  <a:srgbClr val="DCDCDC"/>
+                </a:solidFill>
+                <a:latin typeface="Consolas"/>
+              </a:rPr>
+              <a:t>a</a:t>
+            </a:r>
+            <a:r>
+              <a:rPr sz="1600">
+                <a:solidFill>
+                  <a:srgbClr val="DCDCDC"/>
+                </a:solidFill>
+                <a:latin typeface="Consolas"/>
+              </a:rPr>
+              <a:t>&gt;</a:t>
+            </a:r>
+            <a:r>
+              <a:rPr sz="1600">
+                <a:solidFill>
+                  <a:srgbClr val="DCDCDC"/>
+                </a:solidFill>
+                <a:latin typeface="Consolas"/>
+              </a:rPr>
+              <a:t>:</a:t>
+            </a:r>
+            <a:r>
+              <a:rPr sz="1600">
+                <a:solidFill>
+                  <a:srgbClr val="DCDCDC"/>
+                </a:solidFill>
+                <a:latin typeface="Consolas"/>
+              </a:rPr>
+              <a:t> </a:t>
+            </a:r>
+            <a:r>
+              <a:rPr sz="1600">
+                <a:solidFill>
+                  <a:srgbClr val="4EC9B0"/>
+                </a:solidFill>
+                <a:latin typeface="Consolas"/>
+              </a:rPr>
+              <a:t>IntoIterator</a:t>
+            </a:r>
+            <a:r>
+              <a:rPr sz="1600">
+                <a:solidFill>
+                  <a:srgbClr val="DCDCDC"/>
+                </a:solidFill>
+                <a:latin typeface="Consolas"/>
+              </a:rPr>
+              <a:t>&lt;</a:t>
+            </a:r>
+            <a:r>
+              <a:rPr sz="1600">
+                <a:solidFill>
+                  <a:srgbClr val="DCDCDC"/>
+                </a:solidFill>
+                <a:latin typeface="Consolas"/>
+              </a:rPr>
+              <a:t>Item</a:t>
+            </a:r>
+            <a:r>
+              <a:rPr sz="1600">
+                <a:solidFill>
+                  <a:srgbClr val="DCDCDC"/>
+                </a:solidFill>
+                <a:latin typeface="Consolas"/>
+              </a:rPr>
+              <a:t> </a:t>
+            </a:r>
+            <a:r>
+              <a:rPr sz="1600">
+                <a:solidFill>
+                  <a:srgbClr val="DCDCDC"/>
+                </a:solidFill>
+                <a:latin typeface="Consolas"/>
+              </a:rPr>
+              <a:t>=</a:t>
+            </a:r>
+            <a:r>
+              <a:rPr sz="1600">
+                <a:solidFill>
+                  <a:srgbClr val="DCDCDC"/>
+                </a:solidFill>
+                <a:latin typeface="Consolas"/>
+              </a:rPr>
+              <a:t> </a:t>
+            </a:r>
+            <a:r>
+              <a:rPr sz="1600">
+                <a:solidFill>
+                  <a:srgbClr val="DCDCDC"/>
+                </a:solidFill>
+                <a:latin typeface="Consolas"/>
+              </a:rPr>
+              <a:t>&amp;</a:t>
+            </a:r>
+            <a:r>
+              <a:rPr sz="1600">
+                <a:solidFill>
+                  <a:srgbClr val="DCDCDC"/>
+                </a:solidFill>
+                <a:latin typeface="Consolas"/>
+              </a:rPr>
+              <a:t>'</a:t>
+            </a:r>
+            <a:r>
+              <a:rPr sz="1600">
+                <a:solidFill>
+                  <a:srgbClr val="DCDCDC"/>
+                </a:solidFill>
+                <a:latin typeface="Consolas"/>
+              </a:rPr>
+              <a:t>a</a:t>
+            </a:r>
+            <a:r>
+              <a:rPr sz="1600">
+                <a:solidFill>
+                  <a:srgbClr val="DCDCDC"/>
+                </a:solidFill>
+                <a:latin typeface="Consolas"/>
+              </a:rPr>
+              <a:t> </a:t>
+            </a:r>
+            <a:r>
+              <a:rPr sz="1600">
+                <a:solidFill>
+                  <a:srgbClr val="DCDCDC"/>
+                </a:solidFill>
+                <a:latin typeface="Consolas"/>
+              </a:rPr>
+              <a:t>RangeSetBlaze</a:t>
+            </a:r>
+            <a:r>
+              <a:rPr sz="1600">
+                <a:solidFill>
+                  <a:srgbClr val="DCDCDC"/>
+                </a:solidFill>
+                <a:latin typeface="Consolas"/>
+              </a:rPr>
+              <a:t>&gt;</a:t>
+            </a:r>
+            <a:r>
+              <a:rPr sz="1600">
+                <a:solidFill>
+                  <a:srgbClr val="DCDCDC"/>
+                </a:solidFill>
+                <a:latin typeface="Consolas"/>
+              </a:rPr>
+              <a:t> </a:t>
+            </a:r>
+            <a:r>
+              <a:rPr sz="1600">
+                <a:solidFill>
+                  <a:srgbClr val="DCDCDC"/>
+                </a:solidFill>
+                <a:latin typeface="Consolas"/>
+              </a:rPr>
+              <a:t>{</a:t>
             </a:r>
           </a:p>
           <a:p>
@@ -6825,16 +6087,97 @@
                 </a:solidFill>
                 <a:latin typeface="Consolas"/>
               </a:rPr>
-              <a:t>        </a:t>
-            </a:r>
-            <a:r>
-              <a:rPr sz="1600">
-                <a:solidFill>
-                  <a:srgbClr val="DCDCDC"/>
-                </a:solidFill>
-                <a:latin typeface="Consolas"/>
-              </a:rPr>
-              <a:t>result</a:t>
+              <a:t>    </a:t>
+            </a:r>
+            <a:r>
+              <a:rPr sz="1600">
+                <a:solidFill>
+                  <a:srgbClr val="C586C0"/>
+                </a:solidFill>
+                <a:latin typeface="Consolas"/>
+              </a:rPr>
+              <a:t>fn</a:t>
+            </a:r>
+            <a:r>
+              <a:rPr sz="1600">
+                <a:solidFill>
+                  <a:srgbClr val="DCDCDC"/>
+                </a:solidFill>
+                <a:latin typeface="Consolas"/>
+              </a:rPr>
+              <a:t> </a:t>
+            </a:r>
+            <a:r>
+              <a:rPr sz="1600">
+                <a:solidFill>
+                  <a:srgbClr val="DCDCAA"/>
+                </a:solidFill>
+                <a:latin typeface="Consolas"/>
+              </a:rPr>
+              <a:t>union</a:t>
+            </a:r>
+            <a:r>
+              <a:rPr sz="1600">
+                <a:solidFill>
+                  <a:srgbClr val="DCDCDC"/>
+                </a:solidFill>
+                <a:latin typeface="Consolas"/>
+              </a:rPr>
+              <a:t>(</a:t>
+            </a:r>
+            <a:r>
+              <a:rPr sz="1600">
+                <a:solidFill>
+                  <a:srgbClr val="4EC9B0"/>
+                </a:solidFill>
+                <a:latin typeface="Consolas"/>
+              </a:rPr>
+              <a:t>self</a:t>
+            </a:r>
+            <a:r>
+              <a:rPr sz="1600">
+                <a:solidFill>
+                  <a:srgbClr val="DCDCDC"/>
+                </a:solidFill>
+                <a:latin typeface="Consolas"/>
+              </a:rPr>
+              <a:t>)</a:t>
+            </a:r>
+            <a:r>
+              <a:rPr sz="1600">
+                <a:solidFill>
+                  <a:srgbClr val="DCDCDC"/>
+                </a:solidFill>
+                <a:latin typeface="Consolas"/>
+              </a:rPr>
+              <a:t> </a:t>
+            </a:r>
+            <a:r>
+              <a:rPr sz="1600">
+                <a:solidFill>
+                  <a:srgbClr val="DCDCDC"/>
+                </a:solidFill>
+                <a:latin typeface="Consolas"/>
+              </a:rPr>
+              <a:t>-&gt;</a:t>
+            </a:r>
+            <a:r>
+              <a:rPr sz="1600">
+                <a:solidFill>
+                  <a:srgbClr val="DCDCDC"/>
+                </a:solidFill>
+                <a:latin typeface="Consolas"/>
+              </a:rPr>
+              <a:t> </a:t>
+            </a:r>
+            <a:r>
+              <a:rPr sz="1600">
+                <a:solidFill>
+                  <a:srgbClr val="4EC9B0"/>
+                </a:solidFill>
+                <a:latin typeface="Consolas"/>
+              </a:rPr>
+              <a:t>RangeSetBlaze</a:t>
             </a:r>
           </a:p>
           <a:p>
@@ -6861,11 +6204,11 @@
             <a:r>
               <a:rPr sz="1600">
                 <a:solidFill>
-                  <a:srgbClr val="DCDCDC"/>
-                </a:solidFill>
-                <a:latin typeface="Consolas"/>
-              </a:rPr>
-              <a:t>}</a:t>
+                  <a:srgbClr val="C586C0"/>
+                </a:solidFill>
+                <a:latin typeface="Consolas"/>
+              </a:rPr>
+              <a:t>where</a:t>
             </a:r>
           </a:p>
           <a:p>
@@ -6887,7 +6230,52 @@
                 </a:solidFill>
                 <a:latin typeface="Consolas"/>
               </a:rPr>
-              <a:t>}</a:t>
+              <a:t>        </a:t>
+            </a:r>
+            <a:r>
+              <a:rPr sz="1600">
+                <a:solidFill>
+                  <a:srgbClr val="4EC9B0"/>
+                </a:solidFill>
+                <a:latin typeface="Consolas"/>
+              </a:rPr>
+              <a:t>Self</a:t>
+            </a:r>
+            <a:r>
+              <a:rPr sz="1600">
+                <a:solidFill>
+                  <a:srgbClr val="DCDCDC"/>
+                </a:solidFill>
+                <a:latin typeface="Consolas"/>
+              </a:rPr>
+              <a:t>:</a:t>
+            </a:r>
+            <a:r>
+              <a:rPr sz="1600">
+                <a:solidFill>
+                  <a:srgbClr val="DCDCDC"/>
+                </a:solidFill>
+                <a:latin typeface="Consolas"/>
+              </a:rPr>
+              <a:t> </a:t>
+            </a:r>
+            <a:r>
+              <a:rPr sz="1600">
+                <a:solidFill>
+                  <a:srgbClr val="4EC9B0"/>
+                </a:solidFill>
+                <a:latin typeface="Consolas"/>
+              </a:rPr>
+              <a:t>Sized</a:t>
+            </a:r>
+            <a:r>
+              <a:rPr sz="1600">
+                <a:solidFill>
+                  <a:srgbClr val="DCDCDC"/>
+                </a:solidFill>
+                <a:latin typeface="Consolas"/>
+              </a:rPr>
+              <a:t>,</a:t>
             </a:r>
           </a:p>
           <a:p>
@@ -6902,6 +6290,24 @@
                 <a:spcPts val="0"/>
               </a:spcAft>
             </a:pPr>
+            <a:r>
+              <a:rPr sz="1600">
+                <a:solidFill>
+                  <a:srgbClr val="DCDCDC"/>
+                </a:solidFill>
+                <a:latin typeface="Consolas"/>
+              </a:rPr>
+              <a:t>    </a:t>
+            </a:r>
+            <a:r>
+              <a:rPr sz="1600">
+                <a:solidFill>
+                  <a:srgbClr val="DCDCDC"/>
+                </a:solidFill>
+                <a:latin typeface="Consolas"/>
+              </a:rPr>
+              <a:t>{</a:t>
+            </a:r>
           </a:p>
           <a:p>
             <a:pPr>
@@ -6918,11 +6324,137 @@
             <a:r>
               <a:rPr sz="1600">
                 <a:solidFill>
-                  <a:srgbClr val="6A9955"/>
-                </a:solidFill>
-                <a:latin typeface="Consolas"/>
-              </a:rPr>
-              <a:t>// Any type that can be turned into an iterator of &amp;RangeSetBlaze&lt;T&gt;</a:t>
+                  <a:srgbClr val="DCDCDC"/>
+                </a:solidFill>
+                <a:latin typeface="Consolas"/>
+              </a:rPr>
+              <a:t>        </a:t>
+            </a:r>
+            <a:r>
+              <a:rPr sz="1600">
+                <a:solidFill>
+                  <a:srgbClr val="C586C0"/>
+                </a:solidFill>
+                <a:latin typeface="Consolas"/>
+              </a:rPr>
+              <a:t>let</a:t>
+            </a:r>
+            <a:r>
+              <a:rPr sz="1600">
+                <a:solidFill>
+                  <a:srgbClr val="DCDCDC"/>
+                </a:solidFill>
+                <a:latin typeface="Consolas"/>
+              </a:rPr>
+              <a:t> </a:t>
+            </a:r>
+            <a:r>
+              <a:rPr sz="1600">
+                <a:solidFill>
+                  <a:srgbClr val="C586C0"/>
+                </a:solidFill>
+                <a:latin typeface="Consolas"/>
+              </a:rPr>
+              <a:t>mut</a:t>
+            </a:r>
+            <a:r>
+              <a:rPr sz="1600">
+                <a:solidFill>
+                  <a:srgbClr val="DCDCDC"/>
+                </a:solidFill>
+                <a:latin typeface="Consolas"/>
+              </a:rPr>
+              <a:t> </a:t>
+            </a:r>
+            <a:r>
+              <a:rPr sz="1600">
+                <a:solidFill>
+                  <a:srgbClr val="DCDCDC"/>
+                </a:solidFill>
+                <a:latin typeface="Consolas"/>
+              </a:rPr>
+              <a:t>result</a:t>
+            </a:r>
+            <a:r>
+              <a:rPr sz="1600">
+                <a:solidFill>
+                  <a:srgbClr val="DCDCDC"/>
+                </a:solidFill>
+                <a:latin typeface="Consolas"/>
+              </a:rPr>
+              <a:t> </a:t>
+            </a:r>
+            <a:r>
+              <a:rPr sz="1600">
+                <a:solidFill>
+                  <a:srgbClr val="DCDCDC"/>
+                </a:solidFill>
+                <a:latin typeface="Consolas"/>
+              </a:rPr>
+              <a:t>=</a:t>
+            </a:r>
+            <a:r>
+              <a:rPr sz="1600">
+                <a:solidFill>
+                  <a:srgbClr val="DCDCDC"/>
+                </a:solidFill>
+                <a:latin typeface="Consolas"/>
+              </a:rPr>
+              <a:t> </a:t>
+            </a:r>
+            <a:r>
+              <a:rPr sz="1600">
+                <a:solidFill>
+                  <a:srgbClr val="DCDCDC"/>
+                </a:solidFill>
+                <a:latin typeface="Consolas"/>
+              </a:rPr>
+              <a:t>RangeSetBlaze</a:t>
+            </a:r>
+            <a:r>
+              <a:rPr sz="1600">
+                <a:solidFill>
+                  <a:srgbClr val="DCDCDC"/>
+                </a:solidFill>
+                <a:latin typeface="Consolas"/>
+              </a:rPr>
+              <a:t>::</a:t>
+            </a:r>
+            <a:r>
+              <a:rPr sz="1600">
+                <a:solidFill>
+                  <a:srgbClr val="DCDCDC"/>
+                </a:solidFill>
+                <a:latin typeface="Consolas"/>
+              </a:rPr>
+              <a:t>new</a:t>
+            </a:r>
+            <a:r>
+              <a:rPr sz="1600">
+                <a:solidFill>
+                  <a:srgbClr val="DCDCDC"/>
+                </a:solidFill>
+                <a:latin typeface="Consolas"/>
+              </a:rPr>
+              <a:t>(</a:t>
+            </a:r>
+            <a:r>
+              <a:rPr sz="1600">
+                <a:solidFill>
+                  <a:srgbClr val="DCDCDC"/>
+                </a:solidFill>
+                <a:latin typeface="Consolas"/>
+              </a:rPr>
+              <a:t>)</a:t>
+            </a:r>
+            <a:r>
+              <a:rPr sz="1600">
+                <a:solidFill>
+                  <a:srgbClr val="DCDCDC"/>
+                </a:solidFill>
+                <a:latin typeface="Consolas"/>
+              </a:rPr>
+              <a:t>;</a:t>
             </a:r>
           </a:p>
           <a:p>
@@ -6940,11 +6472,92 @@
             <a:r>
               <a:rPr sz="1600">
                 <a:solidFill>
-                  <a:srgbClr val="6A9955"/>
-                </a:solidFill>
-                <a:latin typeface="Consolas"/>
-              </a:rPr>
-              <a:t>// automatically is-a IntoIterableOfRangeSetRefs.</a:t>
+                  <a:srgbClr val="DCDCDC"/>
+                </a:solidFill>
+                <a:latin typeface="Consolas"/>
+              </a:rPr>
+              <a:t>        </a:t>
+            </a:r>
+            <a:r>
+              <a:rPr sz="1600">
+                <a:solidFill>
+                  <a:srgbClr val="C586C0"/>
+                </a:solidFill>
+                <a:latin typeface="Consolas"/>
+              </a:rPr>
+              <a:t>for</a:t>
+            </a:r>
+            <a:r>
+              <a:rPr sz="1600">
+                <a:solidFill>
+                  <a:srgbClr val="DCDCDC"/>
+                </a:solidFill>
+                <a:latin typeface="Consolas"/>
+              </a:rPr>
+              <a:t> </a:t>
+            </a:r>
+            <a:r>
+              <a:rPr sz="1600">
+                <a:solidFill>
+                  <a:srgbClr val="DCDCDC"/>
+                </a:solidFill>
+                <a:latin typeface="Consolas"/>
+              </a:rPr>
+              <a:t>set</a:t>
+            </a:r>
+            <a:r>
+              <a:rPr sz="1600">
+                <a:solidFill>
+                  <a:srgbClr val="DCDCDC"/>
+                </a:solidFill>
+                <a:latin typeface="Consolas"/>
+              </a:rPr>
+              <a:t> </a:t>
+            </a:r>
+            <a:r>
+              <a:rPr sz="1600">
+                <a:solidFill>
+                  <a:srgbClr val="C586C0"/>
+                </a:solidFill>
+                <a:latin typeface="Consolas"/>
+              </a:rPr>
+              <a:t>in</a:t>
+            </a:r>
+            <a:r>
+              <a:rPr sz="1600">
+                <a:solidFill>
+                  <a:srgbClr val="DCDCDC"/>
+                </a:solidFill>
+                <a:latin typeface="Consolas"/>
+              </a:rPr>
+              <a:t> </a:t>
+            </a:r>
+            <a:r>
+              <a:rPr sz="1600">
+                <a:solidFill>
+                  <a:srgbClr val="4EC9B0"/>
+                </a:solidFill>
+                <a:latin typeface="Consolas"/>
+              </a:rPr>
+              <a:t>self</a:t>
+            </a:r>
+            <a:r>
+              <a:rPr sz="1600">
+                <a:solidFill>
+                  <a:srgbClr val="DCDCDC"/>
+                </a:solidFill>
+                <a:latin typeface="Consolas"/>
+              </a:rPr>
+              <a:t> </a:t>
+            </a:r>
+            <a:r>
+              <a:rPr sz="1600">
+                <a:solidFill>
+                  <a:srgbClr val="DCDCDC"/>
+                </a:solidFill>
+                <a:latin typeface="Consolas"/>
+              </a:rPr>
+              <a:t>{</a:t>
             </a:r>
           </a:p>
           <a:p>
@@ -6962,38 +6575,101 @@
             <a:r>
               <a:rPr sz="1600">
                 <a:solidFill>
+                  <a:srgbClr val="DCDCDC"/>
+                </a:solidFill>
+                <a:latin typeface="Consolas"/>
+              </a:rPr>
+              <a:t>            </a:t>
+            </a:r>
+            <a:r>
+              <a:rPr sz="1600">
+                <a:solidFill>
+                  <a:srgbClr val="DCDCDC"/>
+                </a:solidFill>
+                <a:latin typeface="Consolas"/>
+              </a:rPr>
+              <a:t>result</a:t>
+            </a:r>
+            <a:r>
+              <a:rPr sz="1600">
+                <a:solidFill>
+                  <a:srgbClr val="DCDCDC"/>
+                </a:solidFill>
+                <a:latin typeface="Consolas"/>
+              </a:rPr>
+              <a:t> </a:t>
+            </a:r>
+            <a:r>
+              <a:rPr sz="1600">
+                <a:solidFill>
+                  <a:srgbClr val="DCDCDC"/>
+                </a:solidFill>
+                <a:latin typeface="Consolas"/>
+              </a:rPr>
+              <a:t>=</a:t>
+            </a:r>
+            <a:r>
+              <a:rPr sz="1600">
+                <a:solidFill>
+                  <a:srgbClr val="DCDCDC"/>
+                </a:solidFill>
+                <a:latin typeface="Consolas"/>
+              </a:rPr>
+              <a:t> </a:t>
+            </a:r>
+            <a:r>
+              <a:rPr sz="1600">
+                <a:solidFill>
+                  <a:srgbClr val="DCDCDC"/>
+                </a:solidFill>
+                <a:latin typeface="Consolas"/>
+              </a:rPr>
+              <a:t>RangeSetBlaze</a:t>
+            </a:r>
+            <a:r>
+              <a:rPr sz="1600">
+                <a:solidFill>
+                  <a:srgbClr val="DCDCDC"/>
+                </a:solidFill>
+                <a:latin typeface="Consolas"/>
+              </a:rPr>
+              <a:t>::</a:t>
+            </a:r>
+            <a:r>
+              <a:rPr sz="1600">
+                <a:solidFill>
                   <a:srgbClr val="C586C0"/>
                 </a:solidFill>
                 <a:latin typeface="Consolas"/>
               </a:rPr>
-              <a:t>impl</a:t>
-            </a:r>
-            <a:r>
-              <a:rPr sz="1600">
-                <a:solidFill>
-                  <a:srgbClr val="DCDCDC"/>
-                </a:solidFill>
-                <a:latin typeface="Consolas"/>
-              </a:rPr>
-              <a:t>&lt;</a:t>
-            </a:r>
-            <a:r>
-              <a:rPr sz="1600">
-                <a:solidFill>
-                  <a:srgbClr val="DCDCDC"/>
-                </a:solidFill>
-                <a:latin typeface="Consolas"/>
-              </a:rPr>
-              <a:t>'</a:t>
-            </a:r>
-            <a:r>
-              <a:rPr sz="1600">
-                <a:solidFill>
-                  <a:srgbClr val="DCDCDC"/>
-                </a:solidFill>
-                <a:latin typeface="Consolas"/>
-              </a:rPr>
-              <a:t>a</a:t>
+              <a:t>union</a:t>
+            </a:r>
+            <a:r>
+              <a:rPr sz="1600">
+                <a:solidFill>
+                  <a:srgbClr val="DCDCDC"/>
+                </a:solidFill>
+                <a:latin typeface="Consolas"/>
+              </a:rPr>
+              <a:t>(</a:t>
+            </a:r>
+            <a:r>
+              <a:rPr sz="1600">
+                <a:solidFill>
+                  <a:srgbClr val="DCDCDC"/>
+                </a:solidFill>
+                <a:latin typeface="Consolas"/>
+              </a:rPr>
+              <a:t>&amp;</a:t>
+            </a:r>
+            <a:r>
+              <a:rPr sz="1600">
+                <a:solidFill>
+                  <a:srgbClr val="DCDCDC"/>
+                </a:solidFill>
+                <a:latin typeface="Consolas"/>
+              </a:rPr>
+              <a:t>result</a:t>
             </a:r>
             <a:r>
               <a:rPr sz="1600">
@@ -7020,412 +6696,25 @@
                 </a:solidFill>
                 <a:latin typeface="Consolas"/>
               </a:rPr>
-              <a:t>T</a:t>
-            </a:r>
-            <a:r>
-              <a:rPr sz="1600">
-                <a:solidFill>
-                  <a:srgbClr val="DCDCDC"/>
-                </a:solidFill>
-                <a:latin typeface="Consolas"/>
-              </a:rPr>
-              <a:t>:</a:t>
-            </a:r>
-            <a:r>
-              <a:rPr sz="1600">
-                <a:solidFill>
-                  <a:srgbClr val="DCDCDC"/>
-                </a:solidFill>
-                <a:latin typeface="Consolas"/>
-              </a:rPr>
-              <a:t> </a:t>
-            </a:r>
-            <a:r>
-              <a:rPr sz="1600">
-                <a:solidFill>
-                  <a:srgbClr val="DCDCDC"/>
-                </a:solidFill>
-                <a:latin typeface="Consolas"/>
-              </a:rPr>
-              <a:t>'</a:t>
-            </a:r>
-            <a:r>
-              <a:rPr sz="1600">
-                <a:solidFill>
-                  <a:srgbClr val="DCDCDC"/>
-                </a:solidFill>
-                <a:latin typeface="Consolas"/>
-              </a:rPr>
-              <a:t>a</a:t>
-            </a:r>
-            <a:r>
-              <a:rPr sz="1600">
-                <a:solidFill>
-                  <a:srgbClr val="DCDCDC"/>
-                </a:solidFill>
-                <a:latin typeface="Consolas"/>
-              </a:rPr>
-              <a:t>,</a:t>
-            </a:r>
-            <a:r>
-              <a:rPr sz="1600">
-                <a:solidFill>
-                  <a:srgbClr val="DCDCDC"/>
-                </a:solidFill>
-                <a:latin typeface="Consolas"/>
-              </a:rPr>
-              <a:t> </a:t>
-            </a:r>
-            <a:r>
-              <a:rPr sz="1600">
-                <a:solidFill>
-                  <a:srgbClr val="DCDCDC"/>
-                </a:solidFill>
-                <a:latin typeface="Consolas"/>
-              </a:rPr>
-              <a:t>I</a:t>
-            </a:r>
-            <a:r>
-              <a:rPr sz="1600">
-                <a:solidFill>
-                  <a:srgbClr val="DCDCDC"/>
-                </a:solidFill>
-                <a:latin typeface="Consolas"/>
-              </a:rPr>
-              <a:t>&gt;</a:t>
-            </a:r>
-            <a:r>
-              <a:rPr sz="1600">
-                <a:solidFill>
-                  <a:srgbClr val="DCDCDC"/>
-                </a:solidFill>
-                <a:latin typeface="Consolas"/>
-              </a:rPr>
-              <a:t> </a:t>
-            </a:r>
-            <a:r>
-              <a:rPr sz="1600">
-                <a:solidFill>
-                  <a:srgbClr val="DCDCDC"/>
-                </a:solidFill>
-                <a:latin typeface="Consolas"/>
-              </a:rPr>
-              <a:t>IntoIterableOfRangeSetRefs</a:t>
-            </a:r>
-            <a:r>
-              <a:rPr sz="1600">
-                <a:solidFill>
-                  <a:srgbClr val="DCDCDC"/>
-                </a:solidFill>
-                <a:latin typeface="Consolas"/>
-              </a:rPr>
-              <a:t>&lt;</a:t>
-            </a:r>
-            <a:r>
-              <a:rPr sz="1600">
-                <a:solidFill>
-                  <a:srgbClr val="DCDCDC"/>
-                </a:solidFill>
-                <a:latin typeface="Consolas"/>
-              </a:rPr>
-              <a:t>'</a:t>
-            </a:r>
-            <a:r>
-              <a:rPr sz="1600">
-                <a:solidFill>
-                  <a:srgbClr val="DCDCDC"/>
-                </a:solidFill>
-                <a:latin typeface="Consolas"/>
-              </a:rPr>
-              <a:t>a</a:t>
-            </a:r>
-            <a:r>
-              <a:rPr sz="1600">
-                <a:solidFill>
-                  <a:srgbClr val="DCDCDC"/>
-                </a:solidFill>
-                <a:latin typeface="Consolas"/>
-              </a:rPr>
-              <a:t>,</a:t>
-            </a:r>
-            <a:r>
-              <a:rPr sz="1600">
-                <a:solidFill>
-                  <a:srgbClr val="DCDCDC"/>
-                </a:solidFill>
-                <a:latin typeface="Consolas"/>
-              </a:rPr>
-              <a:t> </a:t>
-            </a:r>
-            <a:r>
-              <a:rPr sz="1600">
-                <a:solidFill>
-                  <a:srgbClr val="DCDCDC"/>
-                </a:solidFill>
-                <a:latin typeface="Consolas"/>
-              </a:rPr>
-              <a:t>T</a:t>
-            </a:r>
-            <a:r>
-              <a:rPr sz="1600">
-                <a:solidFill>
-                  <a:srgbClr val="DCDCDC"/>
-                </a:solidFill>
-                <a:latin typeface="Consolas"/>
-              </a:rPr>
-              <a:t>&gt;</a:t>
-            </a:r>
-            <a:r>
-              <a:rPr sz="1600">
-                <a:solidFill>
-                  <a:srgbClr val="DCDCDC"/>
-                </a:solidFill>
-                <a:latin typeface="Consolas"/>
-              </a:rPr>
-              <a:t> </a:t>
-            </a:r>
-            <a:r>
-              <a:rPr sz="1600">
-                <a:solidFill>
-                  <a:srgbClr val="C586C0"/>
-                </a:solidFill>
-                <a:latin typeface="Consolas"/>
-              </a:rPr>
-              <a:t>for</a:t>
-            </a:r>
-            <a:r>
-              <a:rPr sz="1600">
-                <a:solidFill>
-                  <a:srgbClr val="DCDCDC"/>
-                </a:solidFill>
-                <a:latin typeface="Consolas"/>
-              </a:rPr>
-              <a:t> </a:t>
-            </a:r>
-            <a:r>
-              <a:rPr sz="1600">
-                <a:solidFill>
-                  <a:srgbClr val="DCDCDC"/>
-                </a:solidFill>
-                <a:latin typeface="Consolas"/>
-              </a:rPr>
-              <a:t>I</a:t>
-            </a:r>
-            <a:r>
-              <a:rPr sz="1600">
-                <a:solidFill>
-                  <a:srgbClr val="DCDCDC"/>
-                </a:solidFill>
-                <a:latin typeface="Consolas"/>
-              </a:rPr>
-              <a:t> </a:t>
-            </a:r>
-            <a:r>
-              <a:rPr sz="1600">
-                <a:solidFill>
-                  <a:srgbClr val="C586C0"/>
-                </a:solidFill>
-                <a:latin typeface="Consolas"/>
-              </a:rPr>
-              <a:t>where</a:t>
-            </a:r>
-            <a:r>
-              <a:rPr sz="1600">
-                <a:solidFill>
-                  <a:srgbClr val="DCDCDC"/>
-                </a:solidFill>
-                <a:latin typeface="Consolas"/>
-              </a:rPr>
-              <a:t> </a:t>
-            </a:r>
-            <a:r>
-              <a:rPr sz="1600">
-                <a:solidFill>
-                  <a:srgbClr val="DCDCDC"/>
-                </a:solidFill>
-                <a:latin typeface="Consolas"/>
-              </a:rPr>
-              <a:t>I</a:t>
-            </a:r>
-            <a:r>
-              <a:rPr sz="1600">
-                <a:solidFill>
-                  <a:srgbClr val="DCDCDC"/>
-                </a:solidFill>
-                <a:latin typeface="Consolas"/>
-              </a:rPr>
-              <a:t>:</a:t>
-            </a:r>
-            <a:r>
-              <a:rPr sz="1600">
-                <a:solidFill>
-                  <a:srgbClr val="DCDCDC"/>
-                </a:solidFill>
-                <a:latin typeface="Consolas"/>
-              </a:rPr>
-              <a:t> </a:t>
-            </a:r>
-            <a:r>
-              <a:rPr sz="1600">
-                <a:solidFill>
-                  <a:srgbClr val="4EC9B0"/>
-                </a:solidFill>
-                <a:latin typeface="Consolas"/>
-              </a:rPr>
-              <a:t>IntoIterator</a:t>
-            </a:r>
-            <a:r>
-              <a:rPr sz="1600">
-                <a:solidFill>
-                  <a:srgbClr val="DCDCDC"/>
-                </a:solidFill>
-                <a:latin typeface="Consolas"/>
-              </a:rPr>
-              <a:t>&lt;</a:t>
-            </a:r>
-            <a:r>
-              <a:rPr sz="1600">
-                <a:solidFill>
-                  <a:srgbClr val="DCDCDC"/>
-                </a:solidFill>
-                <a:latin typeface="Consolas"/>
-              </a:rPr>
-              <a:t>Item</a:t>
-            </a:r>
-            <a:r>
-              <a:rPr sz="1600">
-                <a:solidFill>
-                  <a:srgbClr val="DCDCDC"/>
-                </a:solidFill>
-                <a:latin typeface="Consolas"/>
-              </a:rPr>
-              <a:t> </a:t>
-            </a:r>
-            <a:r>
-              <a:rPr sz="1600">
-                <a:solidFill>
-                  <a:srgbClr val="DCDCDC"/>
-                </a:solidFill>
-                <a:latin typeface="Consolas"/>
-              </a:rPr>
-              <a:t>=</a:t>
-            </a:r>
-            <a:r>
-              <a:rPr sz="1600">
-                <a:solidFill>
-                  <a:srgbClr val="DCDCDC"/>
-                </a:solidFill>
-                <a:latin typeface="Consolas"/>
-              </a:rPr>
-              <a:t> </a:t>
-            </a:r>
-            <a:r>
-              <a:rPr sz="1600">
-                <a:solidFill>
-                  <a:srgbClr val="DCDCDC"/>
-                </a:solidFill>
-                <a:latin typeface="Consolas"/>
-              </a:rPr>
-              <a:t>&amp;</a:t>
-            </a:r>
-            <a:r>
-              <a:rPr sz="1600">
-                <a:solidFill>
-                  <a:srgbClr val="DCDCDC"/>
-                </a:solidFill>
-                <a:latin typeface="Consolas"/>
-              </a:rPr>
-              <a:t>'</a:t>
-            </a:r>
-            <a:r>
-              <a:rPr sz="1600">
-                <a:solidFill>
-                  <a:srgbClr val="DCDCDC"/>
-                </a:solidFill>
-                <a:latin typeface="Consolas"/>
-              </a:rPr>
-              <a:t>a</a:t>
-            </a:r>
-            <a:r>
-              <a:rPr sz="1600">
-                <a:solidFill>
-                  <a:srgbClr val="DCDCDC"/>
-                </a:solidFill>
-                <a:latin typeface="Consolas"/>
-              </a:rPr>
-              <a:t> </a:t>
-            </a:r>
-            <a:r>
-              <a:rPr sz="1600">
-                <a:solidFill>
-                  <a:srgbClr val="DCDCDC"/>
-                </a:solidFill>
-                <a:latin typeface="Consolas"/>
-              </a:rPr>
-              <a:t>RangeSetBlaze</a:t>
-            </a:r>
-            <a:r>
-              <a:rPr sz="1600">
-                <a:solidFill>
-                  <a:srgbClr val="DCDCDC"/>
-                </a:solidFill>
-                <a:latin typeface="Consolas"/>
-              </a:rPr>
-              <a:t>&lt;</a:t>
-            </a:r>
-            <a:r>
-              <a:rPr sz="1600">
-                <a:solidFill>
-                  <a:srgbClr val="DCDCDC"/>
-                </a:solidFill>
-                <a:latin typeface="Consolas"/>
-              </a:rPr>
-              <a:t>T</a:t>
-            </a:r>
-            <a:r>
-              <a:rPr sz="1600">
-                <a:solidFill>
-                  <a:srgbClr val="DCDCDC"/>
-                </a:solidFill>
-                <a:latin typeface="Consolas"/>
-              </a:rPr>
-              <a:t>&gt;</a:t>
-            </a:r>
-            <a:r>
-              <a:rPr sz="1600">
-                <a:solidFill>
-                  <a:srgbClr val="DCDCDC"/>
-                </a:solidFill>
-                <a:latin typeface="Consolas"/>
-              </a:rPr>
-              <a:t>&gt;</a:t>
-            </a:r>
-            <a:r>
-              <a:rPr sz="1600">
-                <a:solidFill>
-                  <a:srgbClr val="DCDCDC"/>
-                </a:solidFill>
-                <a:latin typeface="Consolas"/>
-              </a:rPr>
-              <a:t> </a:t>
-            </a:r>
-            <a:r>
-              <a:rPr sz="1600">
-                <a:solidFill>
-                  <a:srgbClr val="DCDCDC"/>
-                </a:solidFill>
-                <a:latin typeface="Consolas"/>
-              </a:rPr>
-              <a:t>{</a:t>
-            </a:r>
-            <a:r>
-              <a:rPr sz="1600">
-                <a:solidFill>
-                  <a:srgbClr val="DCDCDC"/>
-                </a:solidFill>
-                <a:latin typeface="Consolas"/>
-              </a:rPr>
-              <a:t>}</a:t>
+              <a:t>set</a:t>
+            </a:r>
+            <a:r>
+              <a:rPr sz="1600">
+                <a:solidFill>
+                  <a:srgbClr val="DCDCDC"/>
+                </a:solidFill>
+                <a:latin typeface="Consolas"/>
+              </a:rPr>
+              <a:t>)</a:t>
+            </a:r>
+            <a:r>
+              <a:rPr sz="1600">
+                <a:solidFill>
+                  <a:srgbClr val="DCDCDC"/>
+                </a:solidFill>
+                <a:latin typeface="Consolas"/>
+              </a:rPr>
+              <a:t>;</a:t>
             </a:r>
           </a:p>
           <a:p>
@@ -7440,6 +6729,24 @@
                 <a:spcPts val="0"/>
               </a:spcAft>
             </a:pPr>
+            <a:r>
+              <a:rPr sz="1600">
+                <a:solidFill>
+                  <a:srgbClr val="DCDCDC"/>
+                </a:solidFill>
+                <a:latin typeface="Consolas"/>
+              </a:rPr>
+              <a:t>        </a:t>
+            </a:r>
+            <a:r>
+              <a:rPr sz="1600">
+                <a:solidFill>
+                  <a:srgbClr val="DCDCDC"/>
+                </a:solidFill>
+                <a:latin typeface="Consolas"/>
+              </a:rPr>
+              <a:t>}</a:t>
+            </a:r>
           </a:p>
           <a:p>
             <a:pPr>
@@ -7456,65 +6763,20 @@
             <a:r>
               <a:rPr sz="1600">
                 <a:solidFill>
-                  <a:srgbClr val="C586C0"/>
-                </a:solidFill>
-                <a:latin typeface="Consolas"/>
-              </a:rPr>
-              <a:t>fn</a:t>
-            </a:r>
-            <a:r>
-              <a:rPr sz="1600">
-                <a:solidFill>
-                  <a:srgbClr val="DCDCDC"/>
-                </a:solidFill>
-                <a:latin typeface="Consolas"/>
-              </a:rPr>
-              <a:t> </a:t>
-            </a:r>
-            <a:r>
-              <a:rPr sz="1600">
-                <a:solidFill>
-                  <a:srgbClr val="DCDCAA"/>
-                </a:solidFill>
-                <a:latin typeface="Consolas"/>
-              </a:rPr>
-              <a:t>main</a:t>
-            </a:r>
-            <a:r>
-              <a:rPr sz="1600">
-                <a:solidFill>
-                  <a:srgbClr val="DCDCDC"/>
-                </a:solidFill>
-                <a:latin typeface="Consolas"/>
-              </a:rPr>
-              <a:t>(</a:t>
-            </a:r>
-            <a:r>
-              <a:rPr sz="1600">
-                <a:solidFill>
-                  <a:srgbClr val="DCDCDC"/>
-                </a:solidFill>
-                <a:latin typeface="Consolas"/>
-              </a:rPr>
-              <a:t>)</a:t>
-            </a:r>
-            <a:r>
-              <a:rPr sz="1600">
-                <a:solidFill>
-                  <a:srgbClr val="DCDCDC"/>
-                </a:solidFill>
-                <a:latin typeface="Consolas"/>
-              </a:rPr>
-              <a:t> </a:t>
-            </a:r>
-            <a:r>
-              <a:rPr sz="1600">
-                <a:solidFill>
-                  <a:srgbClr val="DCDCDC"/>
-                </a:solidFill>
-                <a:latin typeface="Consolas"/>
-              </a:rPr>
-              <a:t>{</a:t>
+                  <a:srgbClr val="DCDCDC"/>
+                </a:solidFill>
+                <a:latin typeface="Consolas"/>
+              </a:rPr>
+              <a:t>        </a:t>
+            </a:r>
+            <a:r>
+              <a:rPr sz="1600">
+                <a:solidFill>
+                  <a:srgbClr val="DCDCDC"/>
+                </a:solidFill>
+                <a:latin typeface="Consolas"/>
+              </a:rPr>
+              <a:t>result</a:t>
             </a:r>
           </a:p>
         </p:txBody>
@@ -7597,8 +6859,8 @@
           <a:noFill/>
         </p:spPr>
         <p:txBody>
-          <a:bodyPr wrap="none">
-            <a:spAutoFit/>
+          <a:bodyPr wrap="square">
+            <a:noAutofit/>
           </a:bodyPr>
           <a:lstStyle/>
           <a:p>
@@ -7625,200 +6887,11 @@
             <a:r>
               <a:rPr sz="1600">
                 <a:solidFill>
-                  <a:srgbClr val="C586C0"/>
-                </a:solidFill>
-                <a:latin typeface="Consolas"/>
-              </a:rPr>
-              <a:t>let</a:t>
-            </a:r>
-            <a:r>
-              <a:rPr sz="1600">
-                <a:solidFill>
-                  <a:srgbClr val="DCDCDC"/>
-                </a:solidFill>
-                <a:latin typeface="Consolas"/>
-              </a:rPr>
-              <a:t> </a:t>
-            </a:r>
-            <a:r>
-              <a:rPr sz="1600">
-                <a:solidFill>
-                  <a:srgbClr val="DCDCDC"/>
-                </a:solidFill>
-                <a:latin typeface="Consolas"/>
-              </a:rPr>
-              <a:t>a</a:t>
-            </a:r>
-            <a:r>
-              <a:rPr sz="1600">
-                <a:solidFill>
-                  <a:srgbClr val="DCDCDC"/>
-                </a:solidFill>
-                <a:latin typeface="Consolas"/>
-              </a:rPr>
-              <a:t> </a:t>
-            </a:r>
-            <a:r>
-              <a:rPr sz="1600">
-                <a:solidFill>
-                  <a:srgbClr val="DCDCDC"/>
-                </a:solidFill>
-                <a:latin typeface="Consolas"/>
-              </a:rPr>
-              <a:t>=</a:t>
-            </a:r>
-            <a:r>
-              <a:rPr sz="1600">
-                <a:solidFill>
-                  <a:srgbClr val="DCDCDC"/>
-                </a:solidFill>
-                <a:latin typeface="Consolas"/>
-              </a:rPr>
-              <a:t> </a:t>
-            </a:r>
-            <a:r>
-              <a:rPr sz="1600">
-                <a:solidFill>
-                  <a:srgbClr val="DCDCDC"/>
-                </a:solidFill>
-                <a:latin typeface="Consolas"/>
-              </a:rPr>
-              <a:t>RangeSetBlaze</a:t>
-            </a:r>
-            <a:r>
-              <a:rPr sz="1600">
-                <a:solidFill>
-                  <a:srgbClr val="DCDCDC"/>
-                </a:solidFill>
-                <a:latin typeface="Consolas"/>
-              </a:rPr>
-              <a:t>::</a:t>
-            </a:r>
-            <a:r>
-              <a:rPr sz="1600">
-                <a:solidFill>
-                  <a:srgbClr val="DCDCDC"/>
-                </a:solidFill>
-                <a:latin typeface="Consolas"/>
-              </a:rPr>
-              <a:t>from_values</a:t>
-            </a:r>
-            <a:r>
-              <a:rPr sz="1600">
-                <a:solidFill>
-                  <a:srgbClr val="DCDCDC"/>
-                </a:solidFill>
-                <a:latin typeface="Consolas"/>
-              </a:rPr>
-              <a:t>(</a:t>
-            </a:r>
-            <a:r>
-              <a:rPr sz="1600">
-                <a:solidFill>
-                  <a:srgbClr val="DCDCDC"/>
-                </a:solidFill>
-                <a:latin typeface="Consolas"/>
-              </a:rPr>
-              <a:t>&amp;</a:t>
-            </a:r>
-            <a:r>
-              <a:rPr sz="1600">
-                <a:solidFill>
-                  <a:srgbClr val="DCDCDC"/>
-                </a:solidFill>
-                <a:latin typeface="Consolas"/>
-              </a:rPr>
-              <a:t>[</a:t>
-            </a:r>
-            <a:r>
-              <a:rPr sz="1600">
-                <a:solidFill>
-                  <a:srgbClr val="B5CEA8"/>
-                </a:solidFill>
-                <a:latin typeface="Consolas"/>
-              </a:rPr>
-              <a:t>1</a:t>
-            </a:r>
-            <a:r>
-              <a:rPr sz="1600">
-                <a:solidFill>
-                  <a:srgbClr val="DCDCDC"/>
-                </a:solidFill>
-                <a:latin typeface="Consolas"/>
-              </a:rPr>
-              <a:t>,</a:t>
-            </a:r>
-            <a:r>
-              <a:rPr sz="1600">
-                <a:solidFill>
-                  <a:srgbClr val="DCDCDC"/>
-                </a:solidFill>
-                <a:latin typeface="Consolas"/>
-              </a:rPr>
-              <a:t> </a:t>
-            </a:r>
-            <a:r>
-              <a:rPr sz="1600">
-                <a:solidFill>
-                  <a:srgbClr val="B5CEA8"/>
-                </a:solidFill>
-                <a:latin typeface="Consolas"/>
-              </a:rPr>
-              <a:t>2</a:t>
-            </a:r>
-            <a:r>
-              <a:rPr sz="1600">
-                <a:solidFill>
-                  <a:srgbClr val="DCDCDC"/>
-                </a:solidFill>
-                <a:latin typeface="Consolas"/>
-              </a:rPr>
-              <a:t>,</a:t>
-            </a:r>
-            <a:r>
-              <a:rPr sz="1600">
-                <a:solidFill>
-                  <a:srgbClr val="DCDCDC"/>
-                </a:solidFill>
-                <a:latin typeface="Consolas"/>
-              </a:rPr>
-              <a:t> </a:t>
-            </a:r>
-            <a:r>
-              <a:rPr sz="1600">
-                <a:solidFill>
-                  <a:srgbClr val="B5CEA8"/>
-                </a:solidFill>
-                <a:latin typeface="Consolas"/>
-              </a:rPr>
-              <a:t>3</a:t>
-            </a:r>
-            <a:r>
-              <a:rPr sz="1600">
-                <a:solidFill>
-                  <a:srgbClr val="DCDCDC"/>
-                </a:solidFill>
-                <a:latin typeface="Consolas"/>
-              </a:rPr>
-              <a:t>]</a:t>
-            </a:r>
-            <a:r>
-              <a:rPr sz="1600">
-                <a:solidFill>
-                  <a:srgbClr val="DCDCDC"/>
-                </a:solidFill>
-                <a:latin typeface="Consolas"/>
-              </a:rPr>
-              <a:t>)</a:t>
-            </a:r>
-            <a:r>
-              <a:rPr sz="1600">
-                <a:solidFill>
-                  <a:srgbClr val="DCDCDC"/>
-                </a:solidFill>
-                <a:latin typeface="Consolas"/>
-              </a:rPr>
-              <a:t>;</a:t>
+                  <a:srgbClr val="DCDCDC"/>
+                </a:solidFill>
+                <a:latin typeface="Consolas"/>
+              </a:rPr>
+              <a:t>}</a:t>
             </a:r>
           </a:p>
           <a:p>
@@ -7840,205 +6913,7 @@
                 </a:solidFill>
                 <a:latin typeface="Consolas"/>
               </a:rPr>
-              <a:t>    </a:t>
-            </a:r>
-            <a:r>
-              <a:rPr sz="1600">
-                <a:solidFill>
-                  <a:srgbClr val="C586C0"/>
-                </a:solidFill>
-                <a:latin typeface="Consolas"/>
-              </a:rPr>
-              <a:t>let</a:t>
-            </a:r>
-            <a:r>
-              <a:rPr sz="1600">
-                <a:solidFill>
-                  <a:srgbClr val="DCDCDC"/>
-                </a:solidFill>
-                <a:latin typeface="Consolas"/>
-              </a:rPr>
-              <a:t> </a:t>
-            </a:r>
-            <a:r>
-              <a:rPr sz="1600">
-                <a:solidFill>
-                  <a:srgbClr val="DCDCDC"/>
-                </a:solidFill>
-                <a:latin typeface="Consolas"/>
-              </a:rPr>
-              <a:t>b</a:t>
-            </a:r>
-            <a:r>
-              <a:rPr sz="1600">
-                <a:solidFill>
-                  <a:srgbClr val="DCDCDC"/>
-                </a:solidFill>
-                <a:latin typeface="Consolas"/>
-              </a:rPr>
-              <a:t> </a:t>
-            </a:r>
-            <a:r>
-              <a:rPr sz="1600">
-                <a:solidFill>
-                  <a:srgbClr val="DCDCDC"/>
-                </a:solidFill>
-                <a:latin typeface="Consolas"/>
-              </a:rPr>
-              <a:t>=</a:t>
-            </a:r>
-            <a:r>
-              <a:rPr sz="1600">
-                <a:solidFill>
-                  <a:srgbClr val="DCDCDC"/>
-                </a:solidFill>
-                <a:latin typeface="Consolas"/>
-              </a:rPr>
-              <a:t> </a:t>
-            </a:r>
-            <a:r>
-              <a:rPr sz="1600">
-                <a:solidFill>
-                  <a:srgbClr val="DCDCDC"/>
-                </a:solidFill>
-                <a:latin typeface="Consolas"/>
-              </a:rPr>
-              <a:t>RangeSetBlaze</a:t>
-            </a:r>
-            <a:r>
-              <a:rPr sz="1600">
-                <a:solidFill>
-                  <a:srgbClr val="DCDCDC"/>
-                </a:solidFill>
-                <a:latin typeface="Consolas"/>
-              </a:rPr>
-              <a:t>::</a:t>
-            </a:r>
-            <a:r>
-              <a:rPr sz="1600">
-                <a:solidFill>
-                  <a:srgbClr val="DCDCDC"/>
-                </a:solidFill>
-                <a:latin typeface="Consolas"/>
-              </a:rPr>
-              <a:t>from_values</a:t>
-            </a:r>
-            <a:r>
-              <a:rPr sz="1600">
-                <a:solidFill>
-                  <a:srgbClr val="DCDCDC"/>
-                </a:solidFill>
-                <a:latin typeface="Consolas"/>
-              </a:rPr>
-              <a:t>(</a:t>
-            </a:r>
-            <a:r>
-              <a:rPr sz="1600">
-                <a:solidFill>
-                  <a:srgbClr val="DCDCDC"/>
-                </a:solidFill>
-                <a:latin typeface="Consolas"/>
-              </a:rPr>
-              <a:t>&amp;</a:t>
-            </a:r>
-            <a:r>
-              <a:rPr sz="1600">
-                <a:solidFill>
-                  <a:srgbClr val="DCDCDC"/>
-                </a:solidFill>
-                <a:latin typeface="Consolas"/>
-              </a:rPr>
-              <a:t>[</a:t>
-            </a:r>
-            <a:r>
-              <a:rPr sz="1600">
-                <a:solidFill>
-                  <a:srgbClr val="B5CEA8"/>
-                </a:solidFill>
-                <a:latin typeface="Consolas"/>
-              </a:rPr>
-              <a:t>3</a:t>
-            </a:r>
-            <a:r>
-              <a:rPr sz="1600">
-                <a:solidFill>
-                  <a:srgbClr val="DCDCDC"/>
-                </a:solidFill>
-                <a:latin typeface="Consolas"/>
-              </a:rPr>
-              <a:t>,</a:t>
-            </a:r>
-            <a:r>
-              <a:rPr sz="1600">
-                <a:solidFill>
-                  <a:srgbClr val="DCDCDC"/>
-                </a:solidFill>
-                <a:latin typeface="Consolas"/>
-              </a:rPr>
-              <a:t> </a:t>
-            </a:r>
-            <a:r>
-              <a:rPr sz="1600">
-                <a:solidFill>
-                  <a:srgbClr val="B5CEA8"/>
-                </a:solidFill>
-                <a:latin typeface="Consolas"/>
-              </a:rPr>
-              <a:t>4</a:t>
-            </a:r>
-            <a:r>
-              <a:rPr sz="1600">
-                <a:solidFill>
-                  <a:srgbClr val="DCDCDC"/>
-                </a:solidFill>
-                <a:latin typeface="Consolas"/>
-              </a:rPr>
-              <a:t>,</a:t>
-            </a:r>
-            <a:r>
-              <a:rPr sz="1600">
-                <a:solidFill>
-                  <a:srgbClr val="DCDCDC"/>
-                </a:solidFill>
-                <a:latin typeface="Consolas"/>
-              </a:rPr>
-              <a:t> </a:t>
-            </a:r>
-            <a:r>
-              <a:rPr sz="1600">
-                <a:solidFill>
-                  <a:srgbClr val="B5CEA8"/>
-                </a:solidFill>
-                <a:latin typeface="Consolas"/>
-              </a:rPr>
-              <a:t>5</a:t>
-            </a:r>
-            <a:r>
-              <a:rPr sz="1600">
-                <a:solidFill>
-                  <a:srgbClr val="DCDCDC"/>
-                </a:solidFill>
-                <a:latin typeface="Consolas"/>
-              </a:rPr>
-              <a:t>]</a:t>
-            </a:r>
-            <a:r>
-              <a:rPr sz="1600">
-                <a:solidFill>
-                  <a:srgbClr val="DCDCDC"/>
-                </a:solidFill>
-                <a:latin typeface="Consolas"/>
-              </a:rPr>
-              <a:t>)</a:t>
-            </a:r>
-            <a:r>
-              <a:rPr sz="1600">
-                <a:solidFill>
-                  <a:srgbClr val="DCDCDC"/>
-                </a:solidFill>
-                <a:latin typeface="Consolas"/>
-              </a:rPr>
-              <a:t>;</a:t>
+              <a:t>}</a:t>
             </a:r>
           </a:p>
           <a:p>
@@ -8053,213 +6928,6 @@
                 <a:spcPts val="0"/>
               </a:spcAft>
             </a:pPr>
-            <a:r>
-              <a:rPr sz="1600">
-                <a:solidFill>
-                  <a:srgbClr val="DCDCDC"/>
-                </a:solidFill>
-                <a:latin typeface="Consolas"/>
-              </a:rPr>
-              <a:t>    </a:t>
-            </a:r>
-            <a:r>
-              <a:rPr sz="1600">
-                <a:solidFill>
-                  <a:srgbClr val="C586C0"/>
-                </a:solidFill>
-                <a:latin typeface="Consolas"/>
-              </a:rPr>
-              <a:t>let</a:t>
-            </a:r>
-            <a:r>
-              <a:rPr sz="1600">
-                <a:solidFill>
-                  <a:srgbClr val="DCDCDC"/>
-                </a:solidFill>
-                <a:latin typeface="Consolas"/>
-              </a:rPr>
-              <a:t> </a:t>
-            </a:r>
-            <a:r>
-              <a:rPr sz="1600">
-                <a:solidFill>
-                  <a:srgbClr val="DCDCDC"/>
-                </a:solidFill>
-                <a:latin typeface="Consolas"/>
-              </a:rPr>
-              <a:t>c</a:t>
-            </a:r>
-            <a:r>
-              <a:rPr sz="1600">
-                <a:solidFill>
-                  <a:srgbClr val="DCDCDC"/>
-                </a:solidFill>
-                <a:latin typeface="Consolas"/>
-              </a:rPr>
-              <a:t> </a:t>
-            </a:r>
-            <a:r>
-              <a:rPr sz="1600">
-                <a:solidFill>
-                  <a:srgbClr val="DCDCDC"/>
-                </a:solidFill>
-                <a:latin typeface="Consolas"/>
-              </a:rPr>
-              <a:t>=</a:t>
-            </a:r>
-            <a:r>
-              <a:rPr sz="1600">
-                <a:solidFill>
-                  <a:srgbClr val="DCDCDC"/>
-                </a:solidFill>
-                <a:latin typeface="Consolas"/>
-              </a:rPr>
-              <a:t> </a:t>
-            </a:r>
-            <a:r>
-              <a:rPr sz="1600">
-                <a:solidFill>
-                  <a:srgbClr val="DCDCDC"/>
-                </a:solidFill>
-                <a:latin typeface="Consolas"/>
-              </a:rPr>
-              <a:t>RangeSetBlaze</a:t>
-            </a:r>
-            <a:r>
-              <a:rPr sz="1600">
-                <a:solidFill>
-                  <a:srgbClr val="DCDCDC"/>
-                </a:solidFill>
-                <a:latin typeface="Consolas"/>
-              </a:rPr>
-              <a:t>::</a:t>
-            </a:r>
-            <a:r>
-              <a:rPr sz="1600">
-                <a:solidFill>
-                  <a:srgbClr val="DCDCDC"/>
-                </a:solidFill>
-                <a:latin typeface="Consolas"/>
-              </a:rPr>
-              <a:t>from_values</a:t>
-            </a:r>
-            <a:r>
-              <a:rPr sz="1600">
-                <a:solidFill>
-                  <a:srgbClr val="DCDCDC"/>
-                </a:solidFill>
-                <a:latin typeface="Consolas"/>
-              </a:rPr>
-              <a:t>(</a:t>
-            </a:r>
-            <a:r>
-              <a:rPr sz="1600">
-                <a:solidFill>
-                  <a:srgbClr val="DCDCDC"/>
-                </a:solidFill>
-                <a:latin typeface="Consolas"/>
-              </a:rPr>
-              <a:t>&amp;</a:t>
-            </a:r>
-            <a:r>
-              <a:rPr sz="1600">
-                <a:solidFill>
-                  <a:srgbClr val="DCDCDC"/>
-                </a:solidFill>
-                <a:latin typeface="Consolas"/>
-              </a:rPr>
-              <a:t>[</a:t>
-            </a:r>
-            <a:r>
-              <a:rPr sz="1600">
-                <a:solidFill>
-                  <a:srgbClr val="B5CEA8"/>
-                </a:solidFill>
-                <a:latin typeface="Consolas"/>
-              </a:rPr>
-              <a:t>5</a:t>
-            </a:r>
-            <a:r>
-              <a:rPr sz="1600">
-                <a:solidFill>
-                  <a:srgbClr val="DCDCDC"/>
-                </a:solidFill>
-                <a:latin typeface="Consolas"/>
-              </a:rPr>
-              <a:t>,</a:t>
-            </a:r>
-            <a:r>
-              <a:rPr sz="1600">
-                <a:solidFill>
-                  <a:srgbClr val="DCDCDC"/>
-                </a:solidFill>
-                <a:latin typeface="Consolas"/>
-              </a:rPr>
-              <a:t> </a:t>
-            </a:r>
-            <a:r>
-              <a:rPr sz="1600">
-                <a:solidFill>
-                  <a:srgbClr val="B5CEA8"/>
-                </a:solidFill>
-                <a:latin typeface="Consolas"/>
-              </a:rPr>
-              <a:t>7</a:t>
-            </a:r>
-            <a:r>
-              <a:rPr sz="1600">
-                <a:solidFill>
-                  <a:srgbClr val="DCDCDC"/>
-                </a:solidFill>
-                <a:latin typeface="Consolas"/>
-              </a:rPr>
-              <a:t>,</a:t>
-            </a:r>
-            <a:r>
-              <a:rPr sz="1600">
-                <a:solidFill>
-                  <a:srgbClr val="DCDCDC"/>
-                </a:solidFill>
-                <a:latin typeface="Consolas"/>
-              </a:rPr>
-              <a:t> </a:t>
-            </a:r>
-            <a:r>
-              <a:rPr sz="1600">
-                <a:solidFill>
-                  <a:srgbClr val="B5CEA8"/>
-                </a:solidFill>
-                <a:latin typeface="Consolas"/>
-              </a:rPr>
-              <a:t>9</a:t>
-            </a:r>
-            <a:r>
-              <a:rPr sz="1600">
-                <a:solidFill>
-                  <a:srgbClr val="DCDCDC"/>
-                </a:solidFill>
-                <a:latin typeface="Consolas"/>
-              </a:rPr>
-              <a:t>]</a:t>
-            </a:r>
-            <a:r>
-              <a:rPr sz="1600">
-                <a:solidFill>
-                  <a:srgbClr val="DCDCDC"/>
-                </a:solidFill>
-                <a:latin typeface="Consolas"/>
-              </a:rPr>
-              <a:t>)</a:t>
-            </a:r>
-            <a:r>
-              <a:rPr sz="1600">
-                <a:solidFill>
-                  <a:srgbClr val="DCDCDC"/>
-                </a:solidFill>
-                <a:latin typeface="Consolas"/>
-              </a:rPr>
-              <a:t>;</a:t>
-            </a:r>
           </a:p>
           <a:p>
             <a:pPr>
@@ -8273,6 +6941,15 @@
                 <a:spcPts val="0"/>
               </a:spcAft>
             </a:pPr>
+            <a:r>
+              <a:rPr sz="1600">
+                <a:solidFill>
+                  <a:srgbClr val="6A9955"/>
+                </a:solidFill>
+                <a:latin typeface="Consolas"/>
+              </a:rPr>
+              <a:t>// Blanket implementation:</a:t>
+            </a:r>
           </a:p>
           <a:p>
             <a:pPr>
@@ -8289,245 +6966,11 @@
             <a:r>
               <a:rPr sz="1600">
                 <a:solidFill>
-                  <a:srgbClr val="DCDCDC"/>
-                </a:solidFill>
-                <a:latin typeface="Consolas"/>
-              </a:rPr>
-              <a:t>    </a:t>
-            </a:r>
-            <a:r>
-              <a:rPr sz="1600">
-                <a:solidFill>
-                  <a:srgbClr val="DCDCAA"/>
-                </a:solidFill>
-                <a:latin typeface="Consolas"/>
-              </a:rPr>
-              <a:t>println!</a:t>
-            </a:r>
-            <a:r>
-              <a:rPr sz="1600">
-                <a:solidFill>
-                  <a:srgbClr val="DCDCDC"/>
-                </a:solidFill>
-                <a:latin typeface="Consolas"/>
-              </a:rPr>
-              <a:t>(</a:t>
-            </a:r>
-            <a:r>
-              <a:rPr sz="1600">
-                <a:solidFill>
-                  <a:srgbClr val="CE9178"/>
-                </a:solidFill>
-                <a:latin typeface="Consolas"/>
-              </a:rPr>
-              <a:t>"</a:t>
-            </a:r>
-            <a:r>
-              <a:rPr sz="1600">
-                <a:solidFill>
-                  <a:srgbClr val="CE9178"/>
-                </a:solidFill>
-                <a:latin typeface="Consolas"/>
-              </a:rPr>
-              <a:t>union (Vec refs): {:?}</a:t>
-            </a:r>
-            <a:r>
-              <a:rPr sz="1600">
-                <a:solidFill>
-                  <a:srgbClr val="CE9178"/>
-                </a:solidFill>
-                <a:latin typeface="Consolas"/>
-              </a:rPr>
-              <a:t>"</a:t>
-            </a:r>
-            <a:r>
-              <a:rPr sz="1600">
-                <a:solidFill>
-                  <a:srgbClr val="DCDCDC"/>
-                </a:solidFill>
-                <a:latin typeface="Consolas"/>
-              </a:rPr>
-              <a:t>,</a:t>
-            </a:r>
-            <a:r>
-              <a:rPr sz="1600">
-                <a:solidFill>
-                  <a:srgbClr val="DCDCDC"/>
-                </a:solidFill>
-                <a:latin typeface="Consolas"/>
-              </a:rPr>
-              <a:t> </a:t>
-            </a:r>
-            <a:r>
-              <a:rPr sz="1600">
-                <a:solidFill>
-                  <a:srgbClr val="DCDCAA"/>
-                </a:solidFill>
-                <a:latin typeface="Consolas"/>
-              </a:rPr>
-              <a:t>vec!</a:t>
-            </a:r>
-            <a:r>
-              <a:rPr sz="1600">
-                <a:solidFill>
-                  <a:srgbClr val="DCDCDC"/>
-                </a:solidFill>
-                <a:latin typeface="Consolas"/>
-              </a:rPr>
-              <a:t>[</a:t>
-            </a:r>
-            <a:r>
-              <a:rPr sz="1600">
-                <a:solidFill>
-                  <a:srgbClr val="DCDCDC"/>
-                </a:solidFill>
-                <a:latin typeface="Consolas"/>
-              </a:rPr>
-              <a:t>&amp;</a:t>
-            </a:r>
-            <a:r>
-              <a:rPr sz="1600">
-                <a:solidFill>
-                  <a:srgbClr val="DCDCDC"/>
-                </a:solidFill>
-                <a:latin typeface="Consolas"/>
-              </a:rPr>
-              <a:t>a</a:t>
-            </a:r>
-            <a:r>
-              <a:rPr sz="1600">
-                <a:solidFill>
-                  <a:srgbClr val="DCDCDC"/>
-                </a:solidFill>
-                <a:latin typeface="Consolas"/>
-              </a:rPr>
-              <a:t>,</a:t>
-            </a:r>
-            <a:r>
-              <a:rPr sz="1600">
-                <a:solidFill>
-                  <a:srgbClr val="DCDCDC"/>
-                </a:solidFill>
-                <a:latin typeface="Consolas"/>
-              </a:rPr>
-              <a:t> </a:t>
-            </a:r>
-            <a:r>
-              <a:rPr sz="1600">
-                <a:solidFill>
-                  <a:srgbClr val="DCDCDC"/>
-                </a:solidFill>
-                <a:latin typeface="Consolas"/>
-              </a:rPr>
-              <a:t>&amp;</a:t>
-            </a:r>
-            <a:r>
-              <a:rPr sz="1600">
-                <a:solidFill>
-                  <a:srgbClr val="DCDCDC"/>
-                </a:solidFill>
-                <a:latin typeface="Consolas"/>
-              </a:rPr>
-              <a:t>b</a:t>
-            </a:r>
-            <a:r>
-              <a:rPr sz="1600">
-                <a:solidFill>
-                  <a:srgbClr val="DCDCDC"/>
-                </a:solidFill>
-                <a:latin typeface="Consolas"/>
-              </a:rPr>
-              <a:t>,</a:t>
-            </a:r>
-            <a:r>
-              <a:rPr sz="1600">
-                <a:solidFill>
-                  <a:srgbClr val="DCDCDC"/>
-                </a:solidFill>
-                <a:latin typeface="Consolas"/>
-              </a:rPr>
-              <a:t> </a:t>
-            </a:r>
-            <a:r>
-              <a:rPr sz="1600">
-                <a:solidFill>
-                  <a:srgbClr val="DCDCDC"/>
-                </a:solidFill>
-                <a:latin typeface="Consolas"/>
-              </a:rPr>
-              <a:t>&amp;</a:t>
-            </a:r>
-            <a:r>
-              <a:rPr sz="1600">
-                <a:solidFill>
-                  <a:srgbClr val="DCDCDC"/>
-                </a:solidFill>
-                <a:latin typeface="Consolas"/>
-              </a:rPr>
-              <a:t>c</a:t>
-            </a:r>
-            <a:r>
-              <a:rPr sz="1600">
-                <a:solidFill>
-                  <a:srgbClr val="DCDCDC"/>
-                </a:solidFill>
-                <a:latin typeface="Consolas"/>
-              </a:rPr>
-              <a:t>]</a:t>
-            </a:r>
-            <a:r>
-              <a:rPr sz="1600">
-                <a:solidFill>
-                  <a:srgbClr val="DCDCDC"/>
-                </a:solidFill>
-                <a:latin typeface="Consolas"/>
-              </a:rPr>
-              <a:t>.</a:t>
-            </a:r>
-            <a:r>
-              <a:rPr sz="1600">
-                <a:solidFill>
-                  <a:srgbClr val="C586C0"/>
-                </a:solidFill>
-                <a:latin typeface="Consolas"/>
-              </a:rPr>
-              <a:t>union</a:t>
-            </a:r>
-            <a:r>
-              <a:rPr sz="1600">
-                <a:solidFill>
-                  <a:srgbClr val="DCDCDC"/>
-                </a:solidFill>
-                <a:latin typeface="Consolas"/>
-              </a:rPr>
-              <a:t>(</a:t>
-            </a:r>
-            <a:r>
-              <a:rPr sz="1600">
-                <a:solidFill>
-                  <a:srgbClr val="DCDCDC"/>
-                </a:solidFill>
-                <a:latin typeface="Consolas"/>
-              </a:rPr>
-              <a:t>)</a:t>
-            </a:r>
-            <a:r>
-              <a:rPr sz="1600">
-                <a:solidFill>
-                  <a:srgbClr val="DCDCDC"/>
-                </a:solidFill>
-                <a:latin typeface="Consolas"/>
-              </a:rPr>
-              <a:t>)</a:t>
-            </a:r>
-            <a:r>
-              <a:rPr sz="1600">
-                <a:solidFill>
-                  <a:srgbClr val="DCDCDC"/>
-                </a:solidFill>
-                <a:latin typeface="Consolas"/>
-              </a:rPr>
-              <a:t>;</a:t>
+                  <a:srgbClr val="6A9955"/>
+                </a:solidFill>
+                <a:latin typeface="Consolas"/>
+              </a:rPr>
+              <a:t>// Any type that can be turned into an iterator over &amp;RangeSetBlaze</a:t>
             </a:r>
           </a:p>
           <a:p>
@@ -8545,6 +6988,481 @@
             <a:r>
               <a:rPr sz="1600">
                 <a:solidFill>
+                  <a:srgbClr val="6A9955"/>
+                </a:solidFill>
+                <a:latin typeface="Consolas"/>
+              </a:rPr>
+              <a:t>// automatically implements RangeSetCollection.</a:t>
+            </a:r>
+          </a:p>
+          <a:p>
+            <a:pPr>
+              <a:lnSpc>
+                <a:spcPct val="95000"/>
+              </a:lnSpc>
+              <a:spcBef>
+                <a:spcPts val="0"/>
+              </a:spcBef>
+              <a:spcAft>
+                <a:spcPts val="0"/>
+              </a:spcAft>
+            </a:pPr>
+            <a:r>
+              <a:rPr sz="1600">
+                <a:solidFill>
+                  <a:srgbClr val="C586C0"/>
+                </a:solidFill>
+                <a:latin typeface="Consolas"/>
+              </a:rPr>
+              <a:t>impl</a:t>
+            </a:r>
+            <a:r>
+              <a:rPr sz="1600">
+                <a:solidFill>
+                  <a:srgbClr val="DCDCDC"/>
+                </a:solidFill>
+                <a:latin typeface="Consolas"/>
+              </a:rPr>
+              <a:t>&lt;</a:t>
+            </a:r>
+            <a:r>
+              <a:rPr sz="1600">
+                <a:solidFill>
+                  <a:srgbClr val="DCDCDC"/>
+                </a:solidFill>
+                <a:latin typeface="Consolas"/>
+              </a:rPr>
+              <a:t>'</a:t>
+            </a:r>
+            <a:r>
+              <a:rPr sz="1600">
+                <a:solidFill>
+                  <a:srgbClr val="DCDCDC"/>
+                </a:solidFill>
+                <a:latin typeface="Consolas"/>
+              </a:rPr>
+              <a:t>a</a:t>
+            </a:r>
+            <a:r>
+              <a:rPr sz="1600">
+                <a:solidFill>
+                  <a:srgbClr val="DCDCDC"/>
+                </a:solidFill>
+                <a:latin typeface="Consolas"/>
+              </a:rPr>
+              <a:t>,</a:t>
+            </a:r>
+            <a:r>
+              <a:rPr sz="1600">
+                <a:solidFill>
+                  <a:srgbClr val="DCDCDC"/>
+                </a:solidFill>
+                <a:latin typeface="Consolas"/>
+              </a:rPr>
+              <a:t> </a:t>
+            </a:r>
+            <a:r>
+              <a:rPr sz="1600">
+                <a:solidFill>
+                  <a:srgbClr val="DCDCDC"/>
+                </a:solidFill>
+                <a:latin typeface="Consolas"/>
+              </a:rPr>
+              <a:t>I</a:t>
+            </a:r>
+            <a:r>
+              <a:rPr sz="1600">
+                <a:solidFill>
+                  <a:srgbClr val="DCDCDC"/>
+                </a:solidFill>
+                <a:latin typeface="Consolas"/>
+              </a:rPr>
+              <a:t>&gt;</a:t>
+            </a:r>
+            <a:r>
+              <a:rPr sz="1600">
+                <a:solidFill>
+                  <a:srgbClr val="DCDCDC"/>
+                </a:solidFill>
+                <a:latin typeface="Consolas"/>
+              </a:rPr>
+              <a:t> </a:t>
+            </a:r>
+            <a:r>
+              <a:rPr sz="1600">
+                <a:solidFill>
+                  <a:srgbClr val="DCDCDC"/>
+                </a:solidFill>
+                <a:latin typeface="Consolas"/>
+              </a:rPr>
+              <a:t>RangeSetCollection</a:t>
+            </a:r>
+            <a:r>
+              <a:rPr sz="1600">
+                <a:solidFill>
+                  <a:srgbClr val="DCDCDC"/>
+                </a:solidFill>
+                <a:latin typeface="Consolas"/>
+              </a:rPr>
+              <a:t>&lt;</a:t>
+            </a:r>
+            <a:r>
+              <a:rPr sz="1600">
+                <a:solidFill>
+                  <a:srgbClr val="DCDCDC"/>
+                </a:solidFill>
+                <a:latin typeface="Consolas"/>
+              </a:rPr>
+              <a:t>'</a:t>
+            </a:r>
+            <a:r>
+              <a:rPr sz="1600">
+                <a:solidFill>
+                  <a:srgbClr val="DCDCDC"/>
+                </a:solidFill>
+                <a:latin typeface="Consolas"/>
+              </a:rPr>
+              <a:t>a</a:t>
+            </a:r>
+            <a:r>
+              <a:rPr sz="1600">
+                <a:solidFill>
+                  <a:srgbClr val="DCDCDC"/>
+                </a:solidFill>
+                <a:latin typeface="Consolas"/>
+              </a:rPr>
+              <a:t>&gt;</a:t>
+            </a:r>
+            <a:r>
+              <a:rPr sz="1600">
+                <a:solidFill>
+                  <a:srgbClr val="DCDCDC"/>
+                </a:solidFill>
+                <a:latin typeface="Consolas"/>
+              </a:rPr>
+              <a:t> </a:t>
+            </a:r>
+            <a:r>
+              <a:rPr sz="1600">
+                <a:solidFill>
+                  <a:srgbClr val="C586C0"/>
+                </a:solidFill>
+                <a:latin typeface="Consolas"/>
+              </a:rPr>
+              <a:t>for</a:t>
+            </a:r>
+            <a:r>
+              <a:rPr sz="1600">
+                <a:solidFill>
+                  <a:srgbClr val="DCDCDC"/>
+                </a:solidFill>
+                <a:latin typeface="Consolas"/>
+              </a:rPr>
+              <a:t> </a:t>
+            </a:r>
+            <a:r>
+              <a:rPr sz="1600">
+                <a:solidFill>
+                  <a:srgbClr val="DCDCDC"/>
+                </a:solidFill>
+                <a:latin typeface="Consolas"/>
+              </a:rPr>
+              <a:t>I</a:t>
+            </a:r>
+            <a:r>
+              <a:rPr sz="1600">
+                <a:solidFill>
+                  <a:srgbClr val="DCDCDC"/>
+                </a:solidFill>
+                <a:latin typeface="Consolas"/>
+              </a:rPr>
+              <a:t> </a:t>
+            </a:r>
+            <a:r>
+              <a:rPr sz="1600">
+                <a:solidFill>
+                  <a:srgbClr val="C586C0"/>
+                </a:solidFill>
+                <a:latin typeface="Consolas"/>
+              </a:rPr>
+              <a:t>where</a:t>
+            </a:r>
+            <a:r>
+              <a:rPr sz="1600">
+                <a:solidFill>
+                  <a:srgbClr val="DCDCDC"/>
+                </a:solidFill>
+                <a:latin typeface="Consolas"/>
+              </a:rPr>
+              <a:t> </a:t>
+            </a:r>
+            <a:r>
+              <a:rPr sz="1600">
+                <a:solidFill>
+                  <a:srgbClr val="DCDCDC"/>
+                </a:solidFill>
+                <a:latin typeface="Consolas"/>
+              </a:rPr>
+              <a:t>I</a:t>
+            </a:r>
+            <a:r>
+              <a:rPr sz="1600">
+                <a:solidFill>
+                  <a:srgbClr val="DCDCDC"/>
+                </a:solidFill>
+                <a:latin typeface="Consolas"/>
+              </a:rPr>
+              <a:t>:</a:t>
+            </a:r>
+            <a:r>
+              <a:rPr sz="1600">
+                <a:solidFill>
+                  <a:srgbClr val="DCDCDC"/>
+                </a:solidFill>
+                <a:latin typeface="Consolas"/>
+              </a:rPr>
+              <a:t> </a:t>
+            </a:r>
+            <a:r>
+              <a:rPr sz="1600">
+                <a:solidFill>
+                  <a:srgbClr val="4EC9B0"/>
+                </a:solidFill>
+                <a:latin typeface="Consolas"/>
+              </a:rPr>
+              <a:t>IntoIterator</a:t>
+            </a:r>
+            <a:r>
+              <a:rPr sz="1600">
+                <a:solidFill>
+                  <a:srgbClr val="DCDCDC"/>
+                </a:solidFill>
+                <a:latin typeface="Consolas"/>
+              </a:rPr>
+              <a:t>&lt;</a:t>
+            </a:r>
+            <a:r>
+              <a:rPr sz="1600">
+                <a:solidFill>
+                  <a:srgbClr val="DCDCDC"/>
+                </a:solidFill>
+                <a:latin typeface="Consolas"/>
+              </a:rPr>
+              <a:t>Item</a:t>
+            </a:r>
+            <a:r>
+              <a:rPr sz="1600">
+                <a:solidFill>
+                  <a:srgbClr val="DCDCDC"/>
+                </a:solidFill>
+                <a:latin typeface="Consolas"/>
+              </a:rPr>
+              <a:t> </a:t>
+            </a:r>
+            <a:r>
+              <a:rPr sz="1600">
+                <a:solidFill>
+                  <a:srgbClr val="DCDCDC"/>
+                </a:solidFill>
+                <a:latin typeface="Consolas"/>
+              </a:rPr>
+              <a:t>=</a:t>
+            </a:r>
+            <a:r>
+              <a:rPr sz="1600">
+                <a:solidFill>
+                  <a:srgbClr val="DCDCDC"/>
+                </a:solidFill>
+                <a:latin typeface="Consolas"/>
+              </a:rPr>
+              <a:t> </a:t>
+            </a:r>
+            <a:r>
+              <a:rPr sz="1600">
+                <a:solidFill>
+                  <a:srgbClr val="DCDCDC"/>
+                </a:solidFill>
+                <a:latin typeface="Consolas"/>
+              </a:rPr>
+              <a:t>&amp;</a:t>
+            </a:r>
+            <a:r>
+              <a:rPr sz="1600">
+                <a:solidFill>
+                  <a:srgbClr val="DCDCDC"/>
+                </a:solidFill>
+                <a:latin typeface="Consolas"/>
+              </a:rPr>
+              <a:t>'</a:t>
+            </a:r>
+            <a:r>
+              <a:rPr sz="1600">
+                <a:solidFill>
+                  <a:srgbClr val="DCDCDC"/>
+                </a:solidFill>
+                <a:latin typeface="Consolas"/>
+              </a:rPr>
+              <a:t>a</a:t>
+            </a:r>
+            <a:r>
+              <a:rPr sz="1600">
+                <a:solidFill>
+                  <a:srgbClr val="DCDCDC"/>
+                </a:solidFill>
+                <a:latin typeface="Consolas"/>
+              </a:rPr>
+              <a:t> </a:t>
+            </a:r>
+            <a:r>
+              <a:rPr sz="1600">
+                <a:solidFill>
+                  <a:srgbClr val="DCDCDC"/>
+                </a:solidFill>
+                <a:latin typeface="Consolas"/>
+              </a:rPr>
+              <a:t>RangeSetBlaze</a:t>
+            </a:r>
+            <a:r>
+              <a:rPr sz="1600">
+                <a:solidFill>
+                  <a:srgbClr val="DCDCDC"/>
+                </a:solidFill>
+                <a:latin typeface="Consolas"/>
+              </a:rPr>
+              <a:t>&gt;</a:t>
+            </a:r>
+            <a:r>
+              <a:rPr sz="1600">
+                <a:solidFill>
+                  <a:srgbClr val="DCDCDC"/>
+                </a:solidFill>
+                <a:latin typeface="Consolas"/>
+              </a:rPr>
+              <a:t> </a:t>
+            </a:r>
+            <a:r>
+              <a:rPr sz="1600">
+                <a:solidFill>
+                  <a:srgbClr val="DCDCDC"/>
+                </a:solidFill>
+                <a:latin typeface="Consolas"/>
+              </a:rPr>
+              <a:t>{</a:t>
+            </a:r>
+            <a:r>
+              <a:rPr sz="1600">
+                <a:solidFill>
+                  <a:srgbClr val="DCDCDC"/>
+                </a:solidFill>
+                <a:latin typeface="Consolas"/>
+              </a:rPr>
+              <a:t>}</a:t>
+            </a:r>
+          </a:p>
+          <a:p>
+            <a:pPr>
+              <a:lnSpc>
+                <a:spcPct val="95000"/>
+              </a:lnSpc>
+              <a:spcBef>
+                <a:spcPts val="0"/>
+              </a:spcBef>
+              <a:spcAft>
+                <a:spcPts val="0"/>
+              </a:spcAft>
+            </a:pPr>
+          </a:p>
+          <a:p>
+            <a:pPr>
+              <a:lnSpc>
+                <a:spcPct val="95000"/>
+              </a:lnSpc>
+              <a:spcBef>
+                <a:spcPts val="0"/>
+              </a:spcBef>
+              <a:spcAft>
+                <a:spcPts val="0"/>
+              </a:spcAft>
+            </a:pPr>
+            <a:r>
+              <a:rPr sz="1600">
+                <a:solidFill>
+                  <a:srgbClr val="C586C0"/>
+                </a:solidFill>
+                <a:latin typeface="Consolas"/>
+              </a:rPr>
+              <a:t>fn</a:t>
+            </a:r>
+            <a:r>
+              <a:rPr sz="1600">
+                <a:solidFill>
+                  <a:srgbClr val="DCDCDC"/>
+                </a:solidFill>
+                <a:latin typeface="Consolas"/>
+              </a:rPr>
+              <a:t> </a:t>
+            </a:r>
+            <a:r>
+              <a:rPr sz="1600">
+                <a:solidFill>
+                  <a:srgbClr val="DCDCAA"/>
+                </a:solidFill>
+                <a:latin typeface="Consolas"/>
+              </a:rPr>
+              <a:t>main</a:t>
+            </a:r>
+            <a:r>
+              <a:rPr sz="1600">
+                <a:solidFill>
+                  <a:srgbClr val="DCDCDC"/>
+                </a:solidFill>
+                <a:latin typeface="Consolas"/>
+              </a:rPr>
+              <a:t>(</a:t>
+            </a:r>
+            <a:r>
+              <a:rPr sz="1600">
+                <a:solidFill>
+                  <a:srgbClr val="DCDCDC"/>
+                </a:solidFill>
+                <a:latin typeface="Consolas"/>
+              </a:rPr>
+              <a:t>)</a:t>
+            </a:r>
+            <a:r>
+              <a:rPr sz="1600">
+                <a:solidFill>
+                  <a:srgbClr val="DCDCDC"/>
+                </a:solidFill>
+                <a:latin typeface="Consolas"/>
+              </a:rPr>
+              <a:t> </a:t>
+            </a:r>
+            <a:r>
+              <a:rPr sz="1600">
+                <a:solidFill>
+                  <a:srgbClr val="DCDCDC"/>
+                </a:solidFill>
+                <a:latin typeface="Consolas"/>
+              </a:rPr>
+              <a:t>{</a:t>
+            </a:r>
+          </a:p>
+          <a:p>
+            <a:pPr>
+              <a:lnSpc>
+                <a:spcPct val="95000"/>
+              </a:lnSpc>
+              <a:spcBef>
+                <a:spcPts val="0"/>
+              </a:spcBef>
+              <a:spcAft>
+                <a:spcPts val="0"/>
+              </a:spcAft>
+            </a:pPr>
+            <a:r>
+              <a:rPr sz="1600">
+                <a:solidFill>
                   <a:srgbClr val="DCDCDC"/>
                 </a:solidFill>
                 <a:latin typeface="Consolas"/>
@@ -8554,11 +7472,1043 @@
             <a:r>
               <a:rPr sz="1600">
                 <a:solidFill>
+                  <a:srgbClr val="C586C0"/>
+                </a:solidFill>
+                <a:latin typeface="Consolas"/>
+              </a:rPr>
+              <a:t>let</a:t>
+            </a:r>
+            <a:r>
+              <a:rPr sz="1600">
+                <a:solidFill>
+                  <a:srgbClr val="DCDCDC"/>
+                </a:solidFill>
+                <a:latin typeface="Consolas"/>
+              </a:rPr>
+              <a:t> </a:t>
+            </a:r>
+            <a:r>
+              <a:rPr sz="1600">
+                <a:solidFill>
+                  <a:srgbClr val="DCDCDC"/>
+                </a:solidFill>
+                <a:latin typeface="Consolas"/>
+              </a:rPr>
+              <a:t>a</a:t>
+            </a:r>
+            <a:r>
+              <a:rPr sz="1600">
+                <a:solidFill>
+                  <a:srgbClr val="DCDCDC"/>
+                </a:solidFill>
+                <a:latin typeface="Consolas"/>
+              </a:rPr>
+              <a:t> </a:t>
+            </a:r>
+            <a:r>
+              <a:rPr sz="1600">
+                <a:solidFill>
+                  <a:srgbClr val="DCDCDC"/>
+                </a:solidFill>
+                <a:latin typeface="Consolas"/>
+              </a:rPr>
+              <a:t>=</a:t>
+            </a:r>
+            <a:r>
+              <a:rPr sz="1600">
+                <a:solidFill>
+                  <a:srgbClr val="DCDCDC"/>
+                </a:solidFill>
+                <a:latin typeface="Consolas"/>
+              </a:rPr>
+              <a:t> </a:t>
+            </a:r>
+            <a:r>
+              <a:rPr sz="1600">
+                <a:solidFill>
+                  <a:srgbClr val="DCDCDC"/>
+                </a:solidFill>
+                <a:latin typeface="Consolas"/>
+              </a:rPr>
+              <a:t>RangeSetBlaze</a:t>
+            </a:r>
+            <a:r>
+              <a:rPr sz="1600">
+                <a:solidFill>
+                  <a:srgbClr val="DCDCDC"/>
+                </a:solidFill>
+                <a:latin typeface="Consolas"/>
+              </a:rPr>
+              <a:t>::</a:t>
+            </a:r>
+            <a:r>
+              <a:rPr sz="1600">
+                <a:solidFill>
+                  <a:srgbClr val="DCDCDC"/>
+                </a:solidFill>
+                <a:latin typeface="Consolas"/>
+              </a:rPr>
+              <a:t>from_slice</a:t>
+            </a:r>
+            <a:r>
+              <a:rPr sz="1600">
+                <a:solidFill>
+                  <a:srgbClr val="DCDCDC"/>
+                </a:solidFill>
+                <a:latin typeface="Consolas"/>
+              </a:rPr>
+              <a:t>(</a:t>
+            </a:r>
+            <a:r>
+              <a:rPr sz="1600">
+                <a:solidFill>
+                  <a:srgbClr val="DCDCDC"/>
+                </a:solidFill>
+                <a:latin typeface="Consolas"/>
+              </a:rPr>
+              <a:t>&amp;</a:t>
+            </a:r>
+            <a:r>
+              <a:rPr sz="1600">
+                <a:solidFill>
+                  <a:srgbClr val="DCDCDC"/>
+                </a:solidFill>
+                <a:latin typeface="Consolas"/>
+              </a:rPr>
+              <a:t>[</a:t>
+            </a:r>
+            <a:r>
+              <a:rPr sz="1600">
+                <a:solidFill>
+                  <a:srgbClr val="B5CEA8"/>
+                </a:solidFill>
+                <a:latin typeface="Consolas"/>
+              </a:rPr>
+              <a:t>1</a:t>
+            </a:r>
+            <a:r>
+              <a:rPr sz="1600">
+                <a:solidFill>
+                  <a:srgbClr val="DCDCDC"/>
+                </a:solidFill>
+                <a:latin typeface="Consolas"/>
+              </a:rPr>
+              <a:t>,</a:t>
+            </a:r>
+            <a:r>
+              <a:rPr sz="1600">
+                <a:solidFill>
+                  <a:srgbClr val="DCDCDC"/>
+                </a:solidFill>
+                <a:latin typeface="Consolas"/>
+              </a:rPr>
+              <a:t> </a:t>
+            </a:r>
+            <a:r>
+              <a:rPr sz="1600">
+                <a:solidFill>
+                  <a:srgbClr val="B5CEA8"/>
+                </a:solidFill>
+                <a:latin typeface="Consolas"/>
+              </a:rPr>
+              <a:t>2</a:t>
+            </a:r>
+            <a:r>
+              <a:rPr sz="1600">
+                <a:solidFill>
+                  <a:srgbClr val="DCDCDC"/>
+                </a:solidFill>
+                <a:latin typeface="Consolas"/>
+              </a:rPr>
+              <a:t>,</a:t>
+            </a:r>
+            <a:r>
+              <a:rPr sz="1600">
+                <a:solidFill>
+                  <a:srgbClr val="DCDCDC"/>
+                </a:solidFill>
+                <a:latin typeface="Consolas"/>
+              </a:rPr>
+              <a:t> </a:t>
+            </a:r>
+            <a:r>
+              <a:rPr sz="1600">
+                <a:solidFill>
+                  <a:srgbClr val="B5CEA8"/>
+                </a:solidFill>
+                <a:latin typeface="Consolas"/>
+              </a:rPr>
+              <a:t>3</a:t>
+            </a:r>
+            <a:r>
+              <a:rPr sz="1600">
+                <a:solidFill>
+                  <a:srgbClr val="DCDCDC"/>
+                </a:solidFill>
+                <a:latin typeface="Consolas"/>
+              </a:rPr>
+              <a:t>]</a:t>
+            </a:r>
+            <a:r>
+              <a:rPr sz="1600">
+                <a:solidFill>
+                  <a:srgbClr val="DCDCDC"/>
+                </a:solidFill>
+                <a:latin typeface="Consolas"/>
+              </a:rPr>
+              <a:t>)</a:t>
+            </a:r>
+            <a:r>
+              <a:rPr sz="1600">
+                <a:solidFill>
+                  <a:srgbClr val="DCDCDC"/>
+                </a:solidFill>
+                <a:latin typeface="Consolas"/>
+              </a:rPr>
+              <a:t>;</a:t>
+            </a:r>
+          </a:p>
+          <a:p>
+            <a:pPr>
+              <a:lnSpc>
+                <a:spcPct val="95000"/>
+              </a:lnSpc>
+              <a:spcBef>
+                <a:spcPts val="0"/>
+              </a:spcBef>
+              <a:spcAft>
+                <a:spcPts val="0"/>
+              </a:spcAft>
+            </a:pPr>
+            <a:r>
+              <a:rPr sz="1600">
+                <a:solidFill>
+                  <a:srgbClr val="DCDCDC"/>
+                </a:solidFill>
+                <a:latin typeface="Consolas"/>
+              </a:rPr>
+              <a:t>    </a:t>
+            </a:r>
+            <a:r>
+              <a:rPr sz="1600">
+                <a:solidFill>
+                  <a:srgbClr val="C586C0"/>
+                </a:solidFill>
+                <a:latin typeface="Consolas"/>
+              </a:rPr>
+              <a:t>let</a:t>
+            </a:r>
+            <a:r>
+              <a:rPr sz="1600">
+                <a:solidFill>
+                  <a:srgbClr val="DCDCDC"/>
+                </a:solidFill>
+                <a:latin typeface="Consolas"/>
+              </a:rPr>
+              <a:t> </a:t>
+            </a:r>
+            <a:r>
+              <a:rPr sz="1600">
+                <a:solidFill>
+                  <a:srgbClr val="DCDCDC"/>
+                </a:solidFill>
+                <a:latin typeface="Consolas"/>
+              </a:rPr>
+              <a:t>b</a:t>
+            </a:r>
+            <a:r>
+              <a:rPr sz="1600">
+                <a:solidFill>
+                  <a:srgbClr val="DCDCDC"/>
+                </a:solidFill>
+                <a:latin typeface="Consolas"/>
+              </a:rPr>
+              <a:t> </a:t>
+            </a:r>
+            <a:r>
+              <a:rPr sz="1600">
+                <a:solidFill>
+                  <a:srgbClr val="DCDCDC"/>
+                </a:solidFill>
+                <a:latin typeface="Consolas"/>
+              </a:rPr>
+              <a:t>=</a:t>
+            </a:r>
+            <a:r>
+              <a:rPr sz="1600">
+                <a:solidFill>
+                  <a:srgbClr val="DCDCDC"/>
+                </a:solidFill>
+                <a:latin typeface="Consolas"/>
+              </a:rPr>
+              <a:t> </a:t>
+            </a:r>
+            <a:r>
+              <a:rPr sz="1600">
+                <a:solidFill>
+                  <a:srgbClr val="DCDCDC"/>
+                </a:solidFill>
+                <a:latin typeface="Consolas"/>
+              </a:rPr>
+              <a:t>RangeSetBlaze</a:t>
+            </a:r>
+            <a:r>
+              <a:rPr sz="1600">
+                <a:solidFill>
+                  <a:srgbClr val="DCDCDC"/>
+                </a:solidFill>
+                <a:latin typeface="Consolas"/>
+              </a:rPr>
+              <a:t>::</a:t>
+            </a:r>
+            <a:r>
+              <a:rPr sz="1600">
+                <a:solidFill>
+                  <a:srgbClr val="DCDCDC"/>
+                </a:solidFill>
+                <a:latin typeface="Consolas"/>
+              </a:rPr>
+              <a:t>from_slice</a:t>
+            </a:r>
+            <a:r>
+              <a:rPr sz="1600">
+                <a:solidFill>
+                  <a:srgbClr val="DCDCDC"/>
+                </a:solidFill>
+                <a:latin typeface="Consolas"/>
+              </a:rPr>
+              <a:t>(</a:t>
+            </a:r>
+            <a:r>
+              <a:rPr sz="1600">
+                <a:solidFill>
+                  <a:srgbClr val="DCDCDC"/>
+                </a:solidFill>
+                <a:latin typeface="Consolas"/>
+              </a:rPr>
+              <a:t>&amp;</a:t>
+            </a:r>
+            <a:r>
+              <a:rPr sz="1600">
+                <a:solidFill>
+                  <a:srgbClr val="DCDCDC"/>
+                </a:solidFill>
+                <a:latin typeface="Consolas"/>
+              </a:rPr>
+              <a:t>[</a:t>
+            </a:r>
+            <a:r>
+              <a:rPr sz="1600">
+                <a:solidFill>
+                  <a:srgbClr val="B5CEA8"/>
+                </a:solidFill>
+                <a:latin typeface="Consolas"/>
+              </a:rPr>
+              <a:t>3</a:t>
+            </a:r>
+            <a:r>
+              <a:rPr sz="1600">
+                <a:solidFill>
+                  <a:srgbClr val="DCDCDC"/>
+                </a:solidFill>
+                <a:latin typeface="Consolas"/>
+              </a:rPr>
+              <a:t>,</a:t>
+            </a:r>
+            <a:r>
+              <a:rPr sz="1600">
+                <a:solidFill>
+                  <a:srgbClr val="DCDCDC"/>
+                </a:solidFill>
+                <a:latin typeface="Consolas"/>
+              </a:rPr>
+              <a:t> </a:t>
+            </a:r>
+            <a:r>
+              <a:rPr sz="1600">
+                <a:solidFill>
+                  <a:srgbClr val="B5CEA8"/>
+                </a:solidFill>
+                <a:latin typeface="Consolas"/>
+              </a:rPr>
+              <a:t>4</a:t>
+            </a:r>
+            <a:r>
+              <a:rPr sz="1600">
+                <a:solidFill>
+                  <a:srgbClr val="DCDCDC"/>
+                </a:solidFill>
+                <a:latin typeface="Consolas"/>
+              </a:rPr>
+              <a:t>,</a:t>
+            </a:r>
+            <a:r>
+              <a:rPr sz="1600">
+                <a:solidFill>
+                  <a:srgbClr val="DCDCDC"/>
+                </a:solidFill>
+                <a:latin typeface="Consolas"/>
+              </a:rPr>
+              <a:t> </a:t>
+            </a:r>
+            <a:r>
+              <a:rPr sz="1600">
+                <a:solidFill>
+                  <a:srgbClr val="B5CEA8"/>
+                </a:solidFill>
+                <a:latin typeface="Consolas"/>
+              </a:rPr>
+              <a:t>5</a:t>
+            </a:r>
+            <a:r>
+              <a:rPr sz="1600">
+                <a:solidFill>
+                  <a:srgbClr val="DCDCDC"/>
+                </a:solidFill>
+                <a:latin typeface="Consolas"/>
+              </a:rPr>
+              <a:t>]</a:t>
+            </a:r>
+            <a:r>
+              <a:rPr sz="1600">
+                <a:solidFill>
+                  <a:srgbClr val="DCDCDC"/>
+                </a:solidFill>
+                <a:latin typeface="Consolas"/>
+              </a:rPr>
+              <a:t>)</a:t>
+            </a:r>
+            <a:r>
+              <a:rPr sz="1600">
+                <a:solidFill>
+                  <a:srgbClr val="DCDCDC"/>
+                </a:solidFill>
+                <a:latin typeface="Consolas"/>
+              </a:rPr>
+              <a:t>;</a:t>
+            </a:r>
+          </a:p>
+          <a:p>
+            <a:pPr>
+              <a:lnSpc>
+                <a:spcPct val="95000"/>
+              </a:lnSpc>
+              <a:spcBef>
+                <a:spcPts val="0"/>
+              </a:spcBef>
+              <a:spcAft>
+                <a:spcPts val="0"/>
+              </a:spcAft>
+            </a:pPr>
+            <a:r>
+              <a:rPr sz="1600">
+                <a:solidFill>
+                  <a:srgbClr val="DCDCDC"/>
+                </a:solidFill>
+                <a:latin typeface="Consolas"/>
+              </a:rPr>
+              <a:t>    </a:t>
+            </a:r>
+            <a:r>
+              <a:rPr sz="1600">
+                <a:solidFill>
+                  <a:srgbClr val="C586C0"/>
+                </a:solidFill>
+                <a:latin typeface="Consolas"/>
+              </a:rPr>
+              <a:t>let</a:t>
+            </a:r>
+            <a:r>
+              <a:rPr sz="1600">
+                <a:solidFill>
+                  <a:srgbClr val="DCDCDC"/>
+                </a:solidFill>
+                <a:latin typeface="Consolas"/>
+              </a:rPr>
+              <a:t> </a:t>
+            </a:r>
+            <a:r>
+              <a:rPr sz="1600">
+                <a:solidFill>
+                  <a:srgbClr val="DCDCDC"/>
+                </a:solidFill>
+                <a:latin typeface="Consolas"/>
+              </a:rPr>
+              <a:t>c</a:t>
+            </a:r>
+            <a:r>
+              <a:rPr sz="1600">
+                <a:solidFill>
+                  <a:srgbClr val="DCDCDC"/>
+                </a:solidFill>
+                <a:latin typeface="Consolas"/>
+              </a:rPr>
+              <a:t> </a:t>
+            </a:r>
+            <a:r>
+              <a:rPr sz="1600">
+                <a:solidFill>
+                  <a:srgbClr val="DCDCDC"/>
+                </a:solidFill>
+                <a:latin typeface="Consolas"/>
+              </a:rPr>
+              <a:t>=</a:t>
+            </a:r>
+            <a:r>
+              <a:rPr sz="1600">
+                <a:solidFill>
+                  <a:srgbClr val="DCDCDC"/>
+                </a:solidFill>
+                <a:latin typeface="Consolas"/>
+              </a:rPr>
+              <a:t> </a:t>
+            </a:r>
+            <a:r>
+              <a:rPr sz="1600">
+                <a:solidFill>
+                  <a:srgbClr val="DCDCDC"/>
+                </a:solidFill>
+                <a:latin typeface="Consolas"/>
+              </a:rPr>
+              <a:t>RangeSetBlaze</a:t>
+            </a:r>
+            <a:r>
+              <a:rPr sz="1600">
+                <a:solidFill>
+                  <a:srgbClr val="DCDCDC"/>
+                </a:solidFill>
+                <a:latin typeface="Consolas"/>
+              </a:rPr>
+              <a:t>::</a:t>
+            </a:r>
+            <a:r>
+              <a:rPr sz="1600">
+                <a:solidFill>
+                  <a:srgbClr val="DCDCDC"/>
+                </a:solidFill>
+                <a:latin typeface="Consolas"/>
+              </a:rPr>
+              <a:t>from_slice</a:t>
+            </a:r>
+            <a:r>
+              <a:rPr sz="1600">
+                <a:solidFill>
+                  <a:srgbClr val="DCDCDC"/>
+                </a:solidFill>
+                <a:latin typeface="Consolas"/>
+              </a:rPr>
+              <a:t>(</a:t>
+            </a:r>
+            <a:r>
+              <a:rPr sz="1600">
+                <a:solidFill>
+                  <a:srgbClr val="DCDCDC"/>
+                </a:solidFill>
+                <a:latin typeface="Consolas"/>
+              </a:rPr>
+              <a:t>&amp;</a:t>
+            </a:r>
+            <a:r>
+              <a:rPr sz="1600">
+                <a:solidFill>
+                  <a:srgbClr val="DCDCDC"/>
+                </a:solidFill>
+                <a:latin typeface="Consolas"/>
+              </a:rPr>
+              <a:t>[</a:t>
+            </a:r>
+            <a:r>
+              <a:rPr sz="1600">
+                <a:solidFill>
+                  <a:srgbClr val="B5CEA8"/>
+                </a:solidFill>
+                <a:latin typeface="Consolas"/>
+              </a:rPr>
+              <a:t>5</a:t>
+            </a:r>
+            <a:r>
+              <a:rPr sz="1600">
+                <a:solidFill>
+                  <a:srgbClr val="DCDCDC"/>
+                </a:solidFill>
+                <a:latin typeface="Consolas"/>
+              </a:rPr>
+              <a:t>,</a:t>
+            </a:r>
+            <a:r>
+              <a:rPr sz="1600">
+                <a:solidFill>
+                  <a:srgbClr val="DCDCDC"/>
+                </a:solidFill>
+                <a:latin typeface="Consolas"/>
+              </a:rPr>
+              <a:t> </a:t>
+            </a:r>
+            <a:r>
+              <a:rPr sz="1600">
+                <a:solidFill>
+                  <a:srgbClr val="B5CEA8"/>
+                </a:solidFill>
+                <a:latin typeface="Consolas"/>
+              </a:rPr>
+              <a:t>7</a:t>
+            </a:r>
+            <a:r>
+              <a:rPr sz="1600">
+                <a:solidFill>
+                  <a:srgbClr val="DCDCDC"/>
+                </a:solidFill>
+                <a:latin typeface="Consolas"/>
+              </a:rPr>
+              <a:t>,</a:t>
+            </a:r>
+            <a:r>
+              <a:rPr sz="1600">
+                <a:solidFill>
+                  <a:srgbClr val="DCDCDC"/>
+                </a:solidFill>
+                <a:latin typeface="Consolas"/>
+              </a:rPr>
+              <a:t> </a:t>
+            </a:r>
+            <a:r>
+              <a:rPr sz="1600">
+                <a:solidFill>
+                  <a:srgbClr val="B5CEA8"/>
+                </a:solidFill>
+                <a:latin typeface="Consolas"/>
+              </a:rPr>
+              <a:t>9</a:t>
+            </a:r>
+            <a:r>
+              <a:rPr sz="1600">
+                <a:solidFill>
+                  <a:srgbClr val="DCDCDC"/>
+                </a:solidFill>
+                <a:latin typeface="Consolas"/>
+              </a:rPr>
+              <a:t>]</a:t>
+            </a:r>
+            <a:r>
+              <a:rPr sz="1600">
+                <a:solidFill>
+                  <a:srgbClr val="DCDCDC"/>
+                </a:solidFill>
+                <a:latin typeface="Consolas"/>
+              </a:rPr>
+              <a:t>)</a:t>
+            </a:r>
+            <a:r>
+              <a:rPr sz="1600">
+                <a:solidFill>
+                  <a:srgbClr val="DCDCDC"/>
+                </a:solidFill>
+                <a:latin typeface="Consolas"/>
+              </a:rPr>
+              <a:t>;</a:t>
+            </a:r>
+          </a:p>
+          <a:p>
+            <a:pPr>
+              <a:lnSpc>
+                <a:spcPct val="95000"/>
+              </a:lnSpc>
+              <a:spcBef>
+                <a:spcPts val="0"/>
+              </a:spcBef>
+              <a:spcAft>
+                <a:spcPts val="0"/>
+              </a:spcAft>
+            </a:pPr>
+          </a:p>
+          <a:p>
+            <a:pPr>
+              <a:lnSpc>
+                <a:spcPct val="95000"/>
+              </a:lnSpc>
+              <a:spcBef>
+                <a:spcPts val="0"/>
+              </a:spcBef>
+              <a:spcAft>
+                <a:spcPts val="0"/>
+              </a:spcAft>
+            </a:pPr>
+            <a:r>
+              <a:rPr sz="1600">
+                <a:solidFill>
+                  <a:srgbClr val="DCDCDC"/>
+                </a:solidFill>
+                <a:latin typeface="Consolas"/>
+              </a:rPr>
+              <a:t>    </a:t>
+            </a:r>
+            <a:r>
+              <a:rPr sz="1600">
+                <a:solidFill>
+                  <a:srgbClr val="C586C0"/>
+                </a:solidFill>
+                <a:latin typeface="Consolas"/>
+              </a:rPr>
+              <a:t>let</a:t>
+            </a:r>
+            <a:r>
+              <a:rPr sz="1600">
+                <a:solidFill>
+                  <a:srgbClr val="DCDCDC"/>
+                </a:solidFill>
+                <a:latin typeface="Consolas"/>
+              </a:rPr>
+              <a:t> </a:t>
+            </a:r>
+            <a:r>
+              <a:rPr sz="1600">
+                <a:solidFill>
+                  <a:srgbClr val="DCDCDC"/>
+                </a:solidFill>
+                <a:latin typeface="Consolas"/>
+              </a:rPr>
+              <a:t>expected</a:t>
+            </a:r>
+            <a:r>
+              <a:rPr sz="1600">
+                <a:solidFill>
+                  <a:srgbClr val="DCDCDC"/>
+                </a:solidFill>
+                <a:latin typeface="Consolas"/>
+              </a:rPr>
+              <a:t> </a:t>
+            </a:r>
+            <a:r>
+              <a:rPr sz="1600">
+                <a:solidFill>
+                  <a:srgbClr val="DCDCDC"/>
+                </a:solidFill>
+                <a:latin typeface="Consolas"/>
+              </a:rPr>
+              <a:t>=</a:t>
+            </a:r>
+            <a:r>
+              <a:rPr sz="1600">
+                <a:solidFill>
+                  <a:srgbClr val="DCDCDC"/>
+                </a:solidFill>
+                <a:latin typeface="Consolas"/>
+              </a:rPr>
+              <a:t> </a:t>
+            </a:r>
+            <a:r>
+              <a:rPr sz="1600">
+                <a:solidFill>
+                  <a:srgbClr val="DCDCDC"/>
+                </a:solidFill>
+                <a:latin typeface="Consolas"/>
+              </a:rPr>
+              <a:t>RangeSetBlaze</a:t>
+            </a:r>
+            <a:r>
+              <a:rPr sz="1600">
+                <a:solidFill>
+                  <a:srgbClr val="DCDCDC"/>
+                </a:solidFill>
+                <a:latin typeface="Consolas"/>
+              </a:rPr>
+              <a:t>::</a:t>
+            </a:r>
+            <a:r>
+              <a:rPr sz="1600">
+                <a:solidFill>
+                  <a:srgbClr val="DCDCDC"/>
+                </a:solidFill>
+                <a:latin typeface="Consolas"/>
+              </a:rPr>
+              <a:t>from_slice</a:t>
+            </a:r>
+            <a:r>
+              <a:rPr sz="1600">
+                <a:solidFill>
+                  <a:srgbClr val="DCDCDC"/>
+                </a:solidFill>
+                <a:latin typeface="Consolas"/>
+              </a:rPr>
+              <a:t>(</a:t>
+            </a:r>
+            <a:r>
+              <a:rPr sz="1600">
+                <a:solidFill>
+                  <a:srgbClr val="DCDCDC"/>
+                </a:solidFill>
+                <a:latin typeface="Consolas"/>
+              </a:rPr>
+              <a:t>&amp;</a:t>
+            </a:r>
+            <a:r>
+              <a:rPr sz="1600">
+                <a:solidFill>
+                  <a:srgbClr val="DCDCDC"/>
+                </a:solidFill>
+                <a:latin typeface="Consolas"/>
+              </a:rPr>
+              <a:t>[</a:t>
+            </a:r>
+            <a:r>
+              <a:rPr sz="1600">
+                <a:solidFill>
+                  <a:srgbClr val="B5CEA8"/>
+                </a:solidFill>
+                <a:latin typeface="Consolas"/>
+              </a:rPr>
+              <a:t>1</a:t>
+            </a:r>
+            <a:r>
+              <a:rPr sz="1600">
+                <a:solidFill>
+                  <a:srgbClr val="DCDCDC"/>
+                </a:solidFill>
+                <a:latin typeface="Consolas"/>
+              </a:rPr>
+              <a:t>,</a:t>
+            </a:r>
+            <a:r>
+              <a:rPr sz="1600">
+                <a:solidFill>
+                  <a:srgbClr val="DCDCDC"/>
+                </a:solidFill>
+                <a:latin typeface="Consolas"/>
+              </a:rPr>
+              <a:t> </a:t>
+            </a:r>
+            <a:r>
+              <a:rPr sz="1600">
+                <a:solidFill>
+                  <a:srgbClr val="B5CEA8"/>
+                </a:solidFill>
+                <a:latin typeface="Consolas"/>
+              </a:rPr>
+              <a:t>2</a:t>
+            </a:r>
+            <a:r>
+              <a:rPr sz="1600">
+                <a:solidFill>
+                  <a:srgbClr val="DCDCDC"/>
+                </a:solidFill>
+                <a:latin typeface="Consolas"/>
+              </a:rPr>
+              <a:t>,</a:t>
+            </a:r>
+            <a:r>
+              <a:rPr sz="1600">
+                <a:solidFill>
+                  <a:srgbClr val="DCDCDC"/>
+                </a:solidFill>
+                <a:latin typeface="Consolas"/>
+              </a:rPr>
+              <a:t> </a:t>
+            </a:r>
+            <a:r>
+              <a:rPr sz="1600">
+                <a:solidFill>
+                  <a:srgbClr val="B5CEA8"/>
+                </a:solidFill>
+                <a:latin typeface="Consolas"/>
+              </a:rPr>
+              <a:t>3</a:t>
+            </a:r>
+            <a:r>
+              <a:rPr sz="1600">
+                <a:solidFill>
+                  <a:srgbClr val="DCDCDC"/>
+                </a:solidFill>
+                <a:latin typeface="Consolas"/>
+              </a:rPr>
+              <a:t>,</a:t>
+            </a:r>
+            <a:r>
+              <a:rPr sz="1600">
+                <a:solidFill>
+                  <a:srgbClr val="DCDCDC"/>
+                </a:solidFill>
+                <a:latin typeface="Consolas"/>
+              </a:rPr>
+              <a:t> </a:t>
+            </a:r>
+            <a:r>
+              <a:rPr sz="1600">
+                <a:solidFill>
+                  <a:srgbClr val="B5CEA8"/>
+                </a:solidFill>
+                <a:latin typeface="Consolas"/>
+              </a:rPr>
+              <a:t>4</a:t>
+            </a:r>
+            <a:r>
+              <a:rPr sz="1600">
+                <a:solidFill>
+                  <a:srgbClr val="DCDCDC"/>
+                </a:solidFill>
+                <a:latin typeface="Consolas"/>
+              </a:rPr>
+              <a:t>,</a:t>
+            </a:r>
+            <a:r>
+              <a:rPr sz="1600">
+                <a:solidFill>
+                  <a:srgbClr val="DCDCDC"/>
+                </a:solidFill>
+                <a:latin typeface="Consolas"/>
+              </a:rPr>
+              <a:t> </a:t>
+            </a:r>
+            <a:r>
+              <a:rPr sz="1600">
+                <a:solidFill>
+                  <a:srgbClr val="B5CEA8"/>
+                </a:solidFill>
+                <a:latin typeface="Consolas"/>
+              </a:rPr>
+              <a:t>5</a:t>
+            </a:r>
+            <a:r>
+              <a:rPr sz="1600">
+                <a:solidFill>
+                  <a:srgbClr val="DCDCDC"/>
+                </a:solidFill>
+                <a:latin typeface="Consolas"/>
+              </a:rPr>
+              <a:t>,</a:t>
+            </a:r>
+            <a:r>
+              <a:rPr sz="1600">
+                <a:solidFill>
+                  <a:srgbClr val="DCDCDC"/>
+                </a:solidFill>
+                <a:latin typeface="Consolas"/>
+              </a:rPr>
+              <a:t> </a:t>
+            </a:r>
+            <a:r>
+              <a:rPr sz="1600">
+                <a:solidFill>
+                  <a:srgbClr val="B5CEA8"/>
+                </a:solidFill>
+                <a:latin typeface="Consolas"/>
+              </a:rPr>
+              <a:t>7</a:t>
+            </a:r>
+            <a:r>
+              <a:rPr sz="1600">
+                <a:solidFill>
+                  <a:srgbClr val="DCDCDC"/>
+                </a:solidFill>
+                <a:latin typeface="Consolas"/>
+              </a:rPr>
+              <a:t>,</a:t>
+            </a:r>
+            <a:r>
+              <a:rPr sz="1600">
+                <a:solidFill>
+                  <a:srgbClr val="DCDCDC"/>
+                </a:solidFill>
+                <a:latin typeface="Consolas"/>
+              </a:rPr>
+              <a:t> </a:t>
+            </a:r>
+            <a:r>
+              <a:rPr sz="1600">
+                <a:solidFill>
+                  <a:srgbClr val="B5CEA8"/>
+                </a:solidFill>
+                <a:latin typeface="Consolas"/>
+              </a:rPr>
+              <a:t>9</a:t>
+            </a:r>
+            <a:r>
+              <a:rPr sz="1600">
+                <a:solidFill>
+                  <a:srgbClr val="DCDCDC"/>
+                </a:solidFill>
+                <a:latin typeface="Consolas"/>
+              </a:rPr>
+              <a:t>]</a:t>
+            </a:r>
+            <a:r>
+              <a:rPr sz="1600">
+                <a:solidFill>
+                  <a:srgbClr val="DCDCDC"/>
+                </a:solidFill>
+                <a:latin typeface="Consolas"/>
+              </a:rPr>
+              <a:t>)</a:t>
+            </a:r>
+            <a:r>
+              <a:rPr sz="1600">
+                <a:solidFill>
+                  <a:srgbClr val="DCDCDC"/>
+                </a:solidFill>
+                <a:latin typeface="Consolas"/>
+              </a:rPr>
+              <a:t>;</a:t>
+            </a:r>
+          </a:p>
+          <a:p>
+            <a:pPr>
+              <a:lnSpc>
+                <a:spcPct val="95000"/>
+              </a:lnSpc>
+              <a:spcBef>
+                <a:spcPts val="0"/>
+              </a:spcBef>
+              <a:spcAft>
+                <a:spcPts val="0"/>
+              </a:spcAft>
+            </a:pPr>
+            <a:r>
+              <a:rPr sz="1600">
+                <a:solidFill>
+                  <a:srgbClr val="DCDCDC"/>
+                </a:solidFill>
+                <a:latin typeface="Consolas"/>
+              </a:rPr>
+              <a:t>    </a:t>
+            </a:r>
+            <a:r>
+              <a:rPr sz="1600">
+                <a:solidFill>
+                  <a:srgbClr val="6A9955"/>
+                </a:solidFill>
+                <a:latin typeface="Consolas"/>
+              </a:rPr>
+              <a:t>// A vector of sets can be unioned together.</a:t>
+            </a:r>
+          </a:p>
+          <a:p>
+            <a:pPr>
+              <a:lnSpc>
+                <a:spcPct val="95000"/>
+              </a:lnSpc>
+              <a:spcBef>
+                <a:spcPts val="0"/>
+              </a:spcBef>
+              <a:spcAft>
+                <a:spcPts val="0"/>
+              </a:spcAft>
+            </a:pPr>
+            <a:r>
+              <a:rPr sz="1600">
+                <a:solidFill>
+                  <a:srgbClr val="DCDCDC"/>
+                </a:solidFill>
+                <a:latin typeface="Consolas"/>
+              </a:rPr>
+              <a:t>    </a:t>
+            </a:r>
+            <a:r>
+              <a:rPr sz="1600">
+                <a:solidFill>
                   <a:srgbClr val="DCDCAA"/>
                 </a:solidFill>
                 <a:latin typeface="Consolas"/>
               </a:rPr>
-              <a:t>println!</a:t>
+              <a:t>assert_eq!</a:t>
             </a:r>
             <a:r>
               <a:rPr sz="1600">
@@ -8572,29 +8522,38 @@
             <a:r>
               <a:rPr sz="1600">
                 <a:solidFill>
-                  <a:srgbClr val="CE9178"/>
-                </a:solidFill>
-                <a:latin typeface="Consolas"/>
-              </a:rPr>
-              <a:t>"</a:t>
-            </a:r>
-            <a:r>
-              <a:rPr sz="1600">
-                <a:solidFill>
-                  <a:srgbClr val="CE9178"/>
-                </a:solidFill>
-                <a:latin typeface="Consolas"/>
-              </a:rPr>
-              <a:t>union (array refs): {:?}</a:t>
-            </a:r>
-            <a:r>
-              <a:rPr sz="1600">
-                <a:solidFill>
-                  <a:srgbClr val="CE9178"/>
-                </a:solidFill>
-                <a:latin typeface="Consolas"/>
-              </a:rPr>
-              <a:t>"</a:t>
+                  <a:srgbClr val="DCDCAA"/>
+                </a:solidFill>
+                <a:latin typeface="Consolas"/>
+              </a:rPr>
+              <a:t>vec!</a:t>
+            </a:r>
+            <a:r>
+              <a:rPr sz="1600">
+                <a:solidFill>
+                  <a:srgbClr val="DCDCDC"/>
+                </a:solidFill>
+                <a:latin typeface="Consolas"/>
+              </a:rPr>
+              <a:t>[</a:t>
+            </a:r>
+            <a:r>
+              <a:rPr sz="1600">
+                <a:solidFill>
+                  <a:srgbClr val="DCDCDC"/>
+                </a:solidFill>
+                <a:latin typeface="Consolas"/>
+              </a:rPr>
+              <a:t>&amp;</a:t>
+            </a:r>
+            <a:r>
+              <a:rPr sz="1600">
+                <a:solidFill>
+                  <a:srgbClr val="DCDCDC"/>
+                </a:solidFill>
+                <a:latin typeface="Consolas"/>
+              </a:rPr>
+              <a:t>a</a:t>
             </a:r>
             <a:r>
               <a:rPr sz="1600">
@@ -8621,6 +8580,221 @@
                 </a:solidFill>
                 <a:latin typeface="Consolas"/>
               </a:rPr>
+              <a:t>&amp;</a:t>
+            </a:r>
+            <a:r>
+              <a:rPr sz="1600">
+                <a:solidFill>
+                  <a:srgbClr val="DCDCDC"/>
+                </a:solidFill>
+                <a:latin typeface="Consolas"/>
+              </a:rPr>
+              <a:t>b</a:t>
+            </a:r>
+            <a:r>
+              <a:rPr sz="1600">
+                <a:solidFill>
+                  <a:srgbClr val="DCDCDC"/>
+                </a:solidFill>
+                <a:latin typeface="Consolas"/>
+              </a:rPr>
+              <a:t>,</a:t>
+            </a:r>
+            <a:r>
+              <a:rPr sz="1600">
+                <a:solidFill>
+                  <a:srgbClr val="DCDCDC"/>
+                </a:solidFill>
+                <a:latin typeface="Consolas"/>
+              </a:rPr>
+              <a:t> </a:t>
+            </a:r>
+            <a:r>
+              <a:rPr sz="1600">
+                <a:solidFill>
+                  <a:srgbClr val="DCDCDC"/>
+                </a:solidFill>
+                <a:latin typeface="Consolas"/>
+              </a:rPr>
+              <a:t>&amp;</a:t>
+            </a:r>
+            <a:r>
+              <a:rPr sz="1600">
+                <a:solidFill>
+                  <a:srgbClr val="DCDCDC"/>
+                </a:solidFill>
+                <a:latin typeface="Consolas"/>
+              </a:rPr>
+              <a:t>c</a:t>
+            </a:r>
+            <a:r>
+              <a:rPr sz="1600">
+                <a:solidFill>
+                  <a:srgbClr val="DCDCDC"/>
+                </a:solidFill>
+                <a:latin typeface="Consolas"/>
+              </a:rPr>
+              <a:t>]</a:t>
+            </a:r>
+            <a:r>
+              <a:rPr sz="1600">
+                <a:solidFill>
+                  <a:srgbClr val="DCDCDC"/>
+                </a:solidFill>
+                <a:latin typeface="Consolas"/>
+              </a:rPr>
+              <a:t>.</a:t>
+            </a:r>
+            <a:r>
+              <a:rPr sz="1600">
+                <a:solidFill>
+                  <a:srgbClr val="C586C0"/>
+                </a:solidFill>
+                <a:latin typeface="Consolas"/>
+              </a:rPr>
+              <a:t>union</a:t>
+            </a:r>
+            <a:r>
+              <a:rPr sz="1600">
+                <a:solidFill>
+                  <a:srgbClr val="DCDCDC"/>
+                </a:solidFill>
+                <a:latin typeface="Consolas"/>
+              </a:rPr>
+              <a:t>(</a:t>
+            </a:r>
+            <a:r>
+              <a:rPr sz="1600">
+                <a:solidFill>
+                  <a:srgbClr val="DCDCDC"/>
+                </a:solidFill>
+                <a:latin typeface="Consolas"/>
+              </a:rPr>
+              <a:t>)</a:t>
+            </a:r>
+            <a:r>
+              <a:rPr sz="1600">
+                <a:solidFill>
+                  <a:srgbClr val="DCDCDC"/>
+                </a:solidFill>
+                <a:latin typeface="Consolas"/>
+              </a:rPr>
+              <a:t>,</a:t>
+            </a:r>
+            <a:r>
+              <a:rPr sz="1600">
+                <a:solidFill>
+                  <a:srgbClr val="DCDCDC"/>
+                </a:solidFill>
+                <a:latin typeface="Consolas"/>
+              </a:rPr>
+              <a:t> </a:t>
+            </a:r>
+            <a:r>
+              <a:rPr sz="1600">
+                <a:solidFill>
+                  <a:srgbClr val="DCDCDC"/>
+                </a:solidFill>
+                <a:latin typeface="Consolas"/>
+              </a:rPr>
+              <a:t>expected</a:t>
+            </a:r>
+            <a:r>
+              <a:rPr sz="1600">
+                <a:solidFill>
+                  <a:srgbClr val="DCDCDC"/>
+                </a:solidFill>
+                <a:latin typeface="Consolas"/>
+              </a:rPr>
+              <a:t>)</a:t>
+            </a:r>
+            <a:r>
+              <a:rPr sz="1600">
+                <a:solidFill>
+                  <a:srgbClr val="DCDCDC"/>
+                </a:solidFill>
+                <a:latin typeface="Consolas"/>
+              </a:rPr>
+              <a:t>;</a:t>
+            </a:r>
+          </a:p>
+          <a:p>
+            <a:pPr>
+              <a:lnSpc>
+                <a:spcPct val="95000"/>
+              </a:lnSpc>
+              <a:spcBef>
+                <a:spcPts val="0"/>
+              </a:spcBef>
+              <a:spcAft>
+                <a:spcPts val="0"/>
+              </a:spcAft>
+            </a:pPr>
+            <a:r>
+              <a:rPr sz="1600">
+                <a:solidFill>
+                  <a:srgbClr val="DCDCDC"/>
+                </a:solidFill>
+                <a:latin typeface="Consolas"/>
+              </a:rPr>
+              <a:t>    </a:t>
+            </a:r>
+            <a:r>
+              <a:rPr sz="1600">
+                <a:solidFill>
+                  <a:srgbClr val="6A9955"/>
+                </a:solidFill>
+                <a:latin typeface="Consolas"/>
+              </a:rPr>
+              <a:t>// An array of sets can be unioned together.</a:t>
+            </a:r>
+          </a:p>
+          <a:p>
+            <a:pPr>
+              <a:lnSpc>
+                <a:spcPct val="95000"/>
+              </a:lnSpc>
+              <a:spcBef>
+                <a:spcPts val="0"/>
+              </a:spcBef>
+              <a:spcAft>
+                <a:spcPts val="0"/>
+              </a:spcAft>
+            </a:pPr>
+            <a:r>
+              <a:rPr sz="1600">
+                <a:solidFill>
+                  <a:srgbClr val="DCDCDC"/>
+                </a:solidFill>
+                <a:latin typeface="Consolas"/>
+              </a:rPr>
+              <a:t>    </a:t>
+            </a:r>
+            <a:r>
+              <a:rPr sz="1600">
+                <a:solidFill>
+                  <a:srgbClr val="DCDCAA"/>
+                </a:solidFill>
+                <a:latin typeface="Consolas"/>
+              </a:rPr>
+              <a:t>assert_eq!</a:t>
+            </a:r>
+            <a:r>
+              <a:rPr sz="1600">
+                <a:solidFill>
+                  <a:srgbClr val="DCDCDC"/>
+                </a:solidFill>
+                <a:latin typeface="Consolas"/>
+              </a:rPr>
+              <a:t>(</a:t>
+            </a:r>
+            <a:r>
+              <a:rPr sz="1600">
+                <a:solidFill>
+                  <a:srgbClr val="DCDCDC"/>
+                </a:solidFill>
+                <a:latin typeface="Consolas"/>
+              </a:rPr>
               <a:t>[</a:t>
             </a:r>
             <a:r>
@@ -8757,6 +8931,356 @@
                 <a:latin typeface="Consolas"/>
               </a:rPr>
               <a:t>)</a:t>
+            </a:r>
+            <a:r>
+              <a:rPr sz="1600">
+                <a:solidFill>
+                  <a:srgbClr val="DCDCDC"/>
+                </a:solidFill>
+                <a:latin typeface="Consolas"/>
+              </a:rPr>
+              <a:t>,</a:t>
+            </a:r>
+            <a:r>
+              <a:rPr sz="1600">
+                <a:solidFill>
+                  <a:srgbClr val="DCDCDC"/>
+                </a:solidFill>
+                <a:latin typeface="Consolas"/>
+              </a:rPr>
+              <a:t> </a:t>
+            </a:r>
+            <a:r>
+              <a:rPr sz="1600">
+                <a:solidFill>
+                  <a:srgbClr val="DCDCDC"/>
+                </a:solidFill>
+                <a:latin typeface="Consolas"/>
+              </a:rPr>
+              <a:t>expected</a:t>
+            </a:r>
+            <a:r>
+              <a:rPr sz="1600">
+                <a:solidFill>
+                  <a:srgbClr val="DCDCDC"/>
+                </a:solidFill>
+                <a:latin typeface="Consolas"/>
+              </a:rPr>
+              <a:t>)</a:t>
+            </a:r>
+            <a:r>
+              <a:rPr sz="1600">
+                <a:solidFill>
+                  <a:srgbClr val="DCDCDC"/>
+                </a:solidFill>
+                <a:latin typeface="Consolas"/>
+              </a:rPr>
+              <a:t>;</a:t>
+            </a:r>
+          </a:p>
+          <a:p>
+            <a:pPr>
+              <a:lnSpc>
+                <a:spcPct val="95000"/>
+              </a:lnSpc>
+              <a:spcBef>
+                <a:spcPts val="0"/>
+              </a:spcBef>
+              <a:spcAft>
+                <a:spcPts val="0"/>
+              </a:spcAft>
+            </a:pPr>
+            <a:r>
+              <a:rPr sz="1600">
+                <a:solidFill>
+                  <a:srgbClr val="DCDCDC"/>
+                </a:solidFill>
+                <a:latin typeface="Consolas"/>
+              </a:rPr>
+              <a:t>    </a:t>
+            </a:r>
+            <a:r>
+              <a:rPr sz="1600">
+                <a:solidFill>
+                  <a:srgbClr val="6A9955"/>
+                </a:solidFill>
+                <a:latin typeface="Consolas"/>
+              </a:rPr>
+              <a:t>// A filtered option can be unioned.</a:t>
+            </a:r>
+          </a:p>
+          <a:p>
+            <a:pPr>
+              <a:lnSpc>
+                <a:spcPct val="95000"/>
+              </a:lnSpc>
+              <a:spcBef>
+                <a:spcPts val="0"/>
+              </a:spcBef>
+              <a:spcAft>
+                <a:spcPts val="0"/>
+              </a:spcAft>
+            </a:pPr>
+            <a:r>
+              <a:rPr sz="1600">
+                <a:solidFill>
+                  <a:srgbClr val="DCDCDC"/>
+                </a:solidFill>
+                <a:latin typeface="Consolas"/>
+              </a:rPr>
+              <a:t>    </a:t>
+            </a:r>
+            <a:r>
+              <a:rPr sz="1600">
+                <a:solidFill>
+                  <a:srgbClr val="DCDCAA"/>
+                </a:solidFill>
+                <a:latin typeface="Consolas"/>
+              </a:rPr>
+              <a:t>assert_eq!</a:t>
+            </a:r>
+            <a:r>
+              <a:rPr sz="1600">
+                <a:solidFill>
+                  <a:srgbClr val="DCDCDC"/>
+                </a:solidFill>
+                <a:latin typeface="Consolas"/>
+              </a:rPr>
+              <a:t>(</a:t>
+            </a:r>
+            <a:r>
+              <a:rPr sz="1600">
+                <a:solidFill>
+                  <a:srgbClr val="4EC9B0"/>
+                </a:solidFill>
+                <a:latin typeface="Consolas"/>
+              </a:rPr>
+              <a:t>Some</a:t>
+            </a:r>
+            <a:r>
+              <a:rPr sz="1600">
+                <a:solidFill>
+                  <a:srgbClr val="DCDCDC"/>
+                </a:solidFill>
+                <a:latin typeface="Consolas"/>
+              </a:rPr>
+              <a:t>(</a:t>
+            </a:r>
+            <a:r>
+              <a:rPr sz="1600">
+                <a:solidFill>
+                  <a:srgbClr val="DCDCDC"/>
+                </a:solidFill>
+                <a:latin typeface="Consolas"/>
+              </a:rPr>
+              <a:t>&amp;</a:t>
+            </a:r>
+            <a:r>
+              <a:rPr sz="1600">
+                <a:solidFill>
+                  <a:srgbClr val="DCDCDC"/>
+                </a:solidFill>
+                <a:latin typeface="Consolas"/>
+              </a:rPr>
+              <a:t>a</a:t>
+            </a:r>
+            <a:r>
+              <a:rPr sz="1600">
+                <a:solidFill>
+                  <a:srgbClr val="DCDCDC"/>
+                </a:solidFill>
+                <a:latin typeface="Consolas"/>
+              </a:rPr>
+              <a:t>)</a:t>
+            </a:r>
+            <a:r>
+              <a:rPr sz="1600">
+                <a:solidFill>
+                  <a:srgbClr val="DCDCDC"/>
+                </a:solidFill>
+                <a:latin typeface="Consolas"/>
+              </a:rPr>
+              <a:t>.</a:t>
+            </a:r>
+            <a:r>
+              <a:rPr sz="1600">
+                <a:solidFill>
+                  <a:srgbClr val="DCDCDC"/>
+                </a:solidFill>
+                <a:latin typeface="Consolas"/>
+              </a:rPr>
+              <a:t>filter</a:t>
+            </a:r>
+            <a:r>
+              <a:rPr sz="1600">
+                <a:solidFill>
+                  <a:srgbClr val="DCDCDC"/>
+                </a:solidFill>
+                <a:latin typeface="Consolas"/>
+              </a:rPr>
+              <a:t>(</a:t>
+            </a:r>
+            <a:r>
+              <a:rPr sz="1600">
+                <a:solidFill>
+                  <a:srgbClr val="DCDCDC"/>
+                </a:solidFill>
+                <a:latin typeface="Consolas"/>
+              </a:rPr>
+              <a:t>|</a:t>
+            </a:r>
+            <a:r>
+              <a:rPr sz="1600">
+                <a:solidFill>
+                  <a:srgbClr val="DCDCDC"/>
+                </a:solidFill>
+                <a:latin typeface="Consolas"/>
+              </a:rPr>
+              <a:t>set</a:t>
+            </a:r>
+            <a:r>
+              <a:rPr sz="1600">
+                <a:solidFill>
+                  <a:srgbClr val="DCDCDC"/>
+                </a:solidFill>
+                <a:latin typeface="Consolas"/>
+              </a:rPr>
+              <a:t>|</a:t>
+            </a:r>
+            <a:r>
+              <a:rPr sz="1600">
+                <a:solidFill>
+                  <a:srgbClr val="DCDCDC"/>
+                </a:solidFill>
+                <a:latin typeface="Consolas"/>
+              </a:rPr>
+              <a:t> </a:t>
+            </a:r>
+            <a:r>
+              <a:rPr sz="1600">
+                <a:solidFill>
+                  <a:srgbClr val="DCDCDC"/>
+                </a:solidFill>
+                <a:latin typeface="Consolas"/>
+              </a:rPr>
+              <a:t>!</a:t>
+            </a:r>
+            <a:r>
+              <a:rPr sz="1600">
+                <a:solidFill>
+                  <a:srgbClr val="DCDCDC"/>
+                </a:solidFill>
+                <a:latin typeface="Consolas"/>
+              </a:rPr>
+              <a:t>set</a:t>
+            </a:r>
+            <a:r>
+              <a:rPr sz="1600">
+                <a:solidFill>
+                  <a:srgbClr val="DCDCDC"/>
+                </a:solidFill>
+                <a:latin typeface="Consolas"/>
+              </a:rPr>
+              <a:t>.</a:t>
+            </a:r>
+            <a:r>
+              <a:rPr sz="1600">
+                <a:solidFill>
+                  <a:srgbClr val="DCDCDC"/>
+                </a:solidFill>
+                <a:latin typeface="Consolas"/>
+              </a:rPr>
+              <a:t>is_empty</a:t>
+            </a:r>
+            <a:r>
+              <a:rPr sz="1600">
+                <a:solidFill>
+                  <a:srgbClr val="DCDCDC"/>
+                </a:solidFill>
+                <a:latin typeface="Consolas"/>
+              </a:rPr>
+              <a:t>(</a:t>
+            </a:r>
+            <a:r>
+              <a:rPr sz="1600">
+                <a:solidFill>
+                  <a:srgbClr val="DCDCDC"/>
+                </a:solidFill>
+                <a:latin typeface="Consolas"/>
+              </a:rPr>
+              <a:t>)</a:t>
+            </a:r>
+            <a:r>
+              <a:rPr sz="1600">
+                <a:solidFill>
+                  <a:srgbClr val="DCDCDC"/>
+                </a:solidFill>
+                <a:latin typeface="Consolas"/>
+              </a:rPr>
+              <a:t>)</a:t>
+            </a:r>
+            <a:r>
+              <a:rPr sz="1600">
+                <a:solidFill>
+                  <a:srgbClr val="DCDCDC"/>
+                </a:solidFill>
+                <a:latin typeface="Consolas"/>
+              </a:rPr>
+              <a:t>.</a:t>
+            </a:r>
+            <a:r>
+              <a:rPr sz="1600">
+                <a:solidFill>
+                  <a:srgbClr val="C586C0"/>
+                </a:solidFill>
+                <a:latin typeface="Consolas"/>
+              </a:rPr>
+              <a:t>union</a:t>
+            </a:r>
+            <a:r>
+              <a:rPr sz="1600">
+                <a:solidFill>
+                  <a:srgbClr val="DCDCDC"/>
+                </a:solidFill>
+                <a:latin typeface="Consolas"/>
+              </a:rPr>
+              <a:t>(</a:t>
+            </a:r>
+            <a:r>
+              <a:rPr sz="1600">
+                <a:solidFill>
+                  <a:srgbClr val="DCDCDC"/>
+                </a:solidFill>
+                <a:latin typeface="Consolas"/>
+              </a:rPr>
+              <a:t>)</a:t>
+            </a:r>
+            <a:r>
+              <a:rPr sz="1600">
+                <a:solidFill>
+                  <a:srgbClr val="DCDCDC"/>
+                </a:solidFill>
+                <a:latin typeface="Consolas"/>
+              </a:rPr>
+              <a:t>,</a:t>
+            </a:r>
+            <a:r>
+              <a:rPr sz="1600">
+                <a:solidFill>
+                  <a:srgbClr val="DCDCDC"/>
+                </a:solidFill>
+                <a:latin typeface="Consolas"/>
+              </a:rPr>
+              <a:t> </a:t>
+            </a:r>
+            <a:r>
+              <a:rPr sz="1600">
+                <a:solidFill>
+                  <a:srgbClr val="DCDCDC"/>
+                </a:solidFill>
+                <a:latin typeface="Consolas"/>
+              </a:rPr>
+              <a:t>a</a:t>
             </a:r>
             <a:r>
               <a:rPr sz="1600">

--- a/docs/example3_walkthrough.pptx
+++ b/docs/example3_walkthrough.pptx
@@ -8,7 +8,7 @@
     <p:sldId id="256" r:id="rId7"/>
     <p:sldId id="257" r:id="rId8"/>
   </p:sldIdLst>
-  <p:sldSz cx="9144000" cy="6858000" type="screen4x3"/>
+  <p:sldSz cx="12192000" cy="6858000" type="screen4x3"/>
   <p:notesSz cx="6858000" cy="9144000"/>
   <p:defaultTextStyle>
     <a:defPPr>
@@ -3098,7 +3098,7 @@
         <p:spPr>
           <a:xfrm>
             <a:off x="0" y="0"/>
-            <a:ext cx="9144000" cy="6858000"/>
+            <a:ext cx="12192000" cy="6858000"/>
           </a:xfrm>
           <a:prstGeom prst="rect">
             <a:avLst/>
@@ -3140,7 +3140,7 @@
         </p:nvSpPr>
         <p:spPr>
           <a:xfrm>
-            <a:off x="7543800" y="0"/>
+            <a:off x="10591800" y="0"/>
             <a:ext cx="1600200" cy="6858000"/>
           </a:xfrm>
           <a:prstGeom prst="rect">
@@ -3185,7 +3185,7 @@
         </p:nvSpPr>
         <p:spPr>
           <a:xfrm rot="16200000">
-            <a:off x="7616952" y="274320"/>
+            <a:off x="10664952" y="274320"/>
             <a:ext cx="1453896" cy="6309360"/>
           </a:xfrm>
           <a:prstGeom prst="rect">
@@ -3222,7 +3222,7 @@
         <p:spPr>
           <a:xfrm>
             <a:off x="731520" y="502920"/>
-            <a:ext cx="6446520" cy="1051560"/>
+            <a:ext cx="9494520" cy="1051560"/>
           </a:xfrm>
           <a:prstGeom prst="rect">
             <a:avLst/>
@@ -3299,7 +3299,7 @@
         </p:blipFill>
         <p:spPr>
           <a:xfrm>
-            <a:off x="1889291" y="1691640"/>
+            <a:off x="3413291" y="1691640"/>
             <a:ext cx="3765217" cy="4846320"/>
           </a:xfrm>
           <a:prstGeom prst="rect">
@@ -3334,7 +3334,7 @@
         <p:spPr>
           <a:xfrm>
             <a:off x="0" y="0"/>
-            <a:ext cx="9144000" cy="6858000"/>
+            <a:ext cx="12192000" cy="6858000"/>
           </a:xfrm>
           <a:prstGeom prst="rect">
             <a:avLst/>
@@ -3377,7 +3377,7 @@
         <p:spPr>
           <a:xfrm>
             <a:off x="164592" y="109728"/>
-            <a:ext cx="8814816" cy="6638544"/>
+            <a:ext cx="11862816" cy="6638544"/>
           </a:xfrm>
           <a:prstGeom prst="rect">
             <a:avLst/>
